--- a/Collaterals/IntelMakersESP32course - class 5.pptx
+++ b/Collaterals/IntelMakersESP32course - class 5.pptx
@@ -6,39 +6,40 @@
     <p:sldMasterId id="2147483691" r:id="rId2"/>
   </p:sldMasterIdLst>
   <p:notesMasterIdLst>
-    <p:notesMasterId r:id="rId30"/>
+    <p:notesMasterId r:id="rId31"/>
   </p:notesMasterIdLst>
   <p:handoutMasterIdLst>
-    <p:handoutMasterId r:id="rId31"/>
+    <p:handoutMasterId r:id="rId32"/>
   </p:handoutMasterIdLst>
   <p:sldIdLst>
     <p:sldId id="318" r:id="rId3"/>
     <p:sldId id="321" r:id="rId4"/>
     <p:sldId id="349" r:id="rId5"/>
-    <p:sldId id="369" r:id="rId6"/>
-    <p:sldId id="352" r:id="rId7"/>
-    <p:sldId id="351" r:id="rId8"/>
-    <p:sldId id="353" r:id="rId9"/>
-    <p:sldId id="370" r:id="rId10"/>
-    <p:sldId id="354" r:id="rId11"/>
-    <p:sldId id="355" r:id="rId12"/>
-    <p:sldId id="356" r:id="rId13"/>
-    <p:sldId id="357" r:id="rId14"/>
-    <p:sldId id="358" r:id="rId15"/>
-    <p:sldId id="359" r:id="rId16"/>
-    <p:sldId id="373" r:id="rId17"/>
-    <p:sldId id="363" r:id="rId18"/>
-    <p:sldId id="360" r:id="rId19"/>
-    <p:sldId id="361" r:id="rId20"/>
-    <p:sldId id="362" r:id="rId21"/>
-    <p:sldId id="367" r:id="rId22"/>
-    <p:sldId id="364" r:id="rId23"/>
-    <p:sldId id="365" r:id="rId24"/>
-    <p:sldId id="366" r:id="rId25"/>
-    <p:sldId id="368" r:id="rId26"/>
-    <p:sldId id="371" r:id="rId27"/>
-    <p:sldId id="372" r:id="rId28"/>
-    <p:sldId id="294" r:id="rId29"/>
+    <p:sldId id="374" r:id="rId6"/>
+    <p:sldId id="369" r:id="rId7"/>
+    <p:sldId id="352" r:id="rId8"/>
+    <p:sldId id="351" r:id="rId9"/>
+    <p:sldId id="353" r:id="rId10"/>
+    <p:sldId id="370" r:id="rId11"/>
+    <p:sldId id="354" r:id="rId12"/>
+    <p:sldId id="355" r:id="rId13"/>
+    <p:sldId id="356" r:id="rId14"/>
+    <p:sldId id="357" r:id="rId15"/>
+    <p:sldId id="358" r:id="rId16"/>
+    <p:sldId id="359" r:id="rId17"/>
+    <p:sldId id="373" r:id="rId18"/>
+    <p:sldId id="363" r:id="rId19"/>
+    <p:sldId id="360" r:id="rId20"/>
+    <p:sldId id="361" r:id="rId21"/>
+    <p:sldId id="362" r:id="rId22"/>
+    <p:sldId id="367" r:id="rId23"/>
+    <p:sldId id="364" r:id="rId24"/>
+    <p:sldId id="365" r:id="rId25"/>
+    <p:sldId id="366" r:id="rId26"/>
+    <p:sldId id="368" r:id="rId27"/>
+    <p:sldId id="371" r:id="rId28"/>
+    <p:sldId id="372" r:id="rId29"/>
+    <p:sldId id="294" r:id="rId30"/>
   </p:sldIdLst>
   <p:sldSz cx="9144000" cy="5143500" type="screen16x9"/>
   <p:notesSz cx="6858000" cy="9144000"/>
@@ -268,7 +269,7 @@
                 <a:latin typeface="Intel Clear"/>
               </a:rPr>
               <a:pPr/>
-              <a:t>11-Jul-21</a:t>
+              <a:t>5/15/2024</a:t>
             </a:fld>
             <a:endParaRPr lang="en-US" dirty="0">
               <a:latin typeface="Intel Clear"/>
@@ -448,7 +449,7 @@
             <a:fld id="{ED7FC5FE-6F0D-D34A-8EE6-C95B4F5F4DC8}" type="datetimeFigureOut">
               <a:rPr lang="en-US" smtClean="0"/>
               <a:pPr/>
-              <a:t>11-Jul-21</a:t>
+              <a:t>5/15/2024</a:t>
             </a:fld>
             <a:endParaRPr lang="en-US" dirty="0"/>
           </a:p>
@@ -990,7 +991,7 @@
           <a:noFill/>
           <a:extLst>
             <a:ext uri="{909E8E84-426E-40dd-AFC4-6F175D3DCCD1}">
-              <a14:hiddenFill xmlns:a14="http://schemas.microsoft.com/office/drawing/2010/main" xmlns="">
+              <a14:hiddenFill xmlns="" xmlns:a14="http://schemas.microsoft.com/office/drawing/2010/main">
                 <a:solidFill>
                   <a:srgbClr val="FFFFFF"/>
                 </a:solidFill>
@@ -3864,7 +3865,7 @@
           <a:noFill/>
           <a:extLst>
             <a:ext uri="{909E8E84-426E-40dd-AFC4-6F175D3DCCD1}">
-              <a14:hiddenFill xmlns:a14="http://schemas.microsoft.com/office/drawing/2010/main" xmlns="">
+              <a14:hiddenFill xmlns="" xmlns:a14="http://schemas.microsoft.com/office/drawing/2010/main">
                 <a:solidFill>
                   <a:srgbClr val="FFFFFF"/>
                 </a:solidFill>
@@ -4033,7 +4034,7 @@
           <a:noFill/>
           <a:extLst>
             <a:ext uri="{909E8E84-426E-40dd-AFC4-6F175D3DCCD1}">
-              <a14:hiddenFill xmlns:a14="http://schemas.microsoft.com/office/drawing/2010/main" xmlns="">
+              <a14:hiddenFill xmlns="" xmlns:a14="http://schemas.microsoft.com/office/drawing/2010/main">
                 <a:solidFill>
                   <a:srgbClr val="FFFFFF"/>
                 </a:solidFill>
@@ -4428,7 +4429,7 @@
           <a:noFill/>
           <a:extLst>
             <a:ext uri="{909E8E84-426E-40dd-AFC4-6F175D3DCCD1}">
-              <a14:hiddenFill xmlns:a14="http://schemas.microsoft.com/office/drawing/2010/main" xmlns="">
+              <a14:hiddenFill xmlns="" xmlns:a14="http://schemas.microsoft.com/office/drawing/2010/main">
                 <a:solidFill>
                   <a:srgbClr val="FFFFFF"/>
                 </a:solidFill>
@@ -4731,7 +4732,7 @@
           <a:noFill/>
           <a:extLst>
             <a:ext uri="{909E8E84-426E-40dd-AFC4-6F175D3DCCD1}">
-              <a14:hiddenFill xmlns:a14="http://schemas.microsoft.com/office/drawing/2010/main" xmlns="">
+              <a14:hiddenFill xmlns="" xmlns:a14="http://schemas.microsoft.com/office/drawing/2010/main">
                 <a:solidFill>
                   <a:srgbClr val="FFFFFF"/>
                 </a:solidFill>
@@ -5067,7 +5068,7 @@
           <a:noFill/>
           <a:extLst>
             <a:ext uri="{909E8E84-426E-40dd-AFC4-6F175D3DCCD1}">
-              <a14:hiddenFill xmlns:a14="http://schemas.microsoft.com/office/drawing/2010/main" xmlns="">
+              <a14:hiddenFill xmlns="" xmlns:a14="http://schemas.microsoft.com/office/drawing/2010/main">
                 <a:solidFill>
                   <a:srgbClr val="FFFFFF"/>
                 </a:solidFill>
@@ -9283,7 +9284,7 @@
           <a:noFill/>
           <a:extLst>
             <a:ext uri="{909E8E84-426E-40dd-AFC4-6F175D3DCCD1}">
-              <a14:hiddenFill xmlns:a14="http://schemas.microsoft.com/office/drawing/2010/main" xmlns="">
+              <a14:hiddenFill xmlns="" xmlns:a14="http://schemas.microsoft.com/office/drawing/2010/main">
                 <a:solidFill>
                   <a:srgbClr val="FFFFFF"/>
                 </a:solidFill>
@@ -9527,7 +9528,7 @@
           <a:noFill/>
           <a:extLst>
             <a:ext uri="{909E8E84-426E-40dd-AFC4-6F175D3DCCD1}">
-              <a14:hiddenFill xmlns:a14="http://schemas.microsoft.com/office/drawing/2010/main" xmlns="">
+              <a14:hiddenFill xmlns="" xmlns:a14="http://schemas.microsoft.com/office/drawing/2010/main">
                 <a:solidFill>
                   <a:srgbClr val="FFFFFF"/>
                 </a:solidFill>
@@ -10952,7 +10953,7 @@
           <a:noFill/>
           <a:extLst>
             <a:ext uri="{909E8E84-426E-40dd-AFC4-6F175D3DCCD1}">
-              <a14:hiddenFill xmlns:a14="http://schemas.microsoft.com/office/drawing/2010/main" xmlns="">
+              <a14:hiddenFill xmlns="" xmlns:a14="http://schemas.microsoft.com/office/drawing/2010/main">
                 <a:solidFill>
                   <a:srgbClr val="FFFFFF"/>
                 </a:solidFill>
@@ -11569,7 +11570,7 @@
           <a:noFill/>
           <a:extLst>
             <a:ext uri="{909E8E84-426E-40dd-AFC4-6F175D3DCCD1}">
-              <a14:hiddenFill xmlns:a14="http://schemas.microsoft.com/office/drawing/2010/main" xmlns="">
+              <a14:hiddenFill xmlns="" xmlns:a14="http://schemas.microsoft.com/office/drawing/2010/main">
                 <a:solidFill>
                   <a:srgbClr val="FFFFFF"/>
                 </a:solidFill>
@@ -12136,7 +12137,12 @@
             <p:ph type="ctrTitle"/>
           </p:nvPr>
         </p:nvSpPr>
-        <p:spPr/>
+        <p:spPr>
+          <a:xfrm>
+            <a:off x="1359087" y="4040981"/>
+            <a:ext cx="8212886" cy="1102519"/>
+          </a:xfrm>
+        </p:spPr>
         <p:txBody>
           <a:bodyPr/>
           <a:lstStyle/>
@@ -12304,7 +12310,7 @@
             </a:pPr>
             <a:r>
               <a:rPr lang="en-US" sz="3600" dirty="0"/>
-              <a:t>Webserver – what can we do with it</a:t>
+              <a:t>webserver</a:t>
             </a:r>
           </a:p>
         </p:txBody>
@@ -12343,8 +12349,34 @@
               <a:buChar char="•"/>
             </a:pPr>
             <a:r>
-              <a:rPr lang="en-US" dirty="0"/>
-              <a:t>Have a nice GUI to communicate with the ESP32 using a browser</a:t>
+              <a:rPr lang="en-US" sz="1600" dirty="0"/>
+              <a:t>Web pages are hosted on a webserver</a:t>
+            </a:r>
+          </a:p>
+          <a:p>
+            <a:pPr marL="511175" lvl="1" indent="-285750">
+              <a:spcBef>
+                <a:spcPts val="600"/>
+              </a:spcBef>
+              <a:buFont typeface="Arial" panose="020B0604020202020204" pitchFamily="34" charset="0"/>
+              <a:buChar char="•"/>
+            </a:pPr>
+            <a:r>
+              <a:rPr lang="en-US" sz="1600" dirty="0"/>
+              <a:t>Most commonly written in HTML5 + JAVA script</a:t>
+            </a:r>
+          </a:p>
+          <a:p>
+            <a:pPr marL="511175" lvl="1" indent="-285750">
+              <a:spcBef>
+                <a:spcPts val="600"/>
+              </a:spcBef>
+              <a:buFont typeface="Arial" panose="020B0604020202020204" pitchFamily="34" charset="0"/>
+              <a:buChar char="•"/>
+            </a:pPr>
+            <a:r>
+              <a:rPr lang="en-US" sz="1600" dirty="0"/>
+              <a:t>There are various HTML5 emulators out there</a:t>
             </a:r>
           </a:p>
           <a:p>
@@ -12356,8 +12388,8 @@
               <a:buChar char="•"/>
             </a:pPr>
             <a:r>
-              <a:rPr lang="en-US" dirty="0"/>
-              <a:t>Control IOs</a:t>
+              <a:rPr lang="en-US" sz="1600" dirty="0"/>
+              <a:t>Has a specific IP address (192.168.14.1 for example)</a:t>
             </a:r>
           </a:p>
           <a:p>
@@ -12369,8 +12401,21 @@
               <a:buChar char="•"/>
             </a:pPr>
             <a:r>
-              <a:rPr lang="en-US" dirty="0"/>
-              <a:t>Get information from our ESP32</a:t>
+              <a:rPr lang="en-US" sz="1600" dirty="0"/>
+              <a:t>Is a passive device</a:t>
+            </a:r>
+          </a:p>
+          <a:p>
+            <a:pPr marL="285750" indent="-285750">
+              <a:spcBef>
+                <a:spcPts val="600"/>
+              </a:spcBef>
+              <a:buFont typeface="Arial" panose="020B0604020202020204" pitchFamily="34" charset="0"/>
+              <a:buChar char="•"/>
+            </a:pPr>
+            <a:r>
+              <a:rPr lang="en-US" sz="1600" dirty="0"/>
+              <a:t>We need a browser to access it</a:t>
             </a:r>
           </a:p>
           <a:p>
@@ -12382,8 +12427,33 @@
               <a:buChar char="•"/>
             </a:pPr>
             <a:r>
-              <a:rPr lang="en-US" dirty="0"/>
-              <a:t>Such as temperature, humidity depending on what we connected </a:t>
+              <a:rPr lang="en-US" sz="1600" dirty="0"/>
+              <a:t>Browser </a:t>
+            </a:r>
+            <a:r>
+              <a:rPr lang="en-US" sz="1600" b="1" dirty="0">
+                <a:highlight>
+                  <a:srgbClr val="FFFF00"/>
+                </a:highlight>
+              </a:rPr>
+              <a:t>is</a:t>
+            </a:r>
+            <a:r>
+              <a:rPr lang="en-US" sz="1600" dirty="0"/>
+              <a:t> executing the HTML5 code</a:t>
+            </a:r>
+          </a:p>
+          <a:p>
+            <a:pPr marL="511175" lvl="1" indent="-285750">
+              <a:spcBef>
+                <a:spcPts val="600"/>
+              </a:spcBef>
+              <a:buFont typeface="Arial" panose="020B0604020202020204" pitchFamily="34" charset="0"/>
+              <a:buChar char="•"/>
+            </a:pPr>
+            <a:r>
+              <a:rPr lang="en-US" sz="1600" dirty="0"/>
+              <a:t>The communication protocol is HTTP</a:t>
             </a:r>
           </a:p>
           <a:p>
@@ -12395,8 +12465,21 @@
               <a:buChar char="•"/>
             </a:pPr>
             <a:r>
-              <a:rPr lang="en-US" dirty="0"/>
-              <a:t>Send data to the ESP32</a:t>
+              <a:rPr lang="en-US" sz="1600" dirty="0"/>
+              <a:t>There are large number of hosting providers</a:t>
+            </a:r>
+          </a:p>
+          <a:p>
+            <a:pPr marL="285750" indent="-285750">
+              <a:spcBef>
+                <a:spcPts val="600"/>
+              </a:spcBef>
+              <a:buFont typeface="Arial" panose="020B0604020202020204" pitchFamily="34" charset="0"/>
+              <a:buChar char="•"/>
+            </a:pPr>
+            <a:r>
+              <a:rPr lang="en-US" sz="1600" dirty="0"/>
+              <a:t>IP address can be replaced by a name</a:t>
             </a:r>
           </a:p>
           <a:p>
@@ -12408,9 +12491,40 @@
               <a:buChar char="•"/>
             </a:pPr>
             <a:r>
-              <a:rPr lang="en-US" dirty="0"/>
-              <a:t>Files</a:t>
-            </a:r>
+              <a:rPr lang="en-US" sz="1600" dirty="0"/>
+              <a:t>DNS server translates the name to the specific IP address</a:t>
+            </a:r>
+          </a:p>
+          <a:p>
+            <a:pPr marL="285750" indent="-285750">
+              <a:spcBef>
+                <a:spcPts val="600"/>
+              </a:spcBef>
+              <a:buFont typeface="Arial" panose="020B0604020202020204" pitchFamily="34" charset="0"/>
+              <a:buChar char="•"/>
+            </a:pPr>
+            <a:r>
+              <a:rPr lang="en-US" sz="1600" dirty="0">
+                <a:highlight>
+                  <a:srgbClr val="FFFF00"/>
+                </a:highlight>
+              </a:rPr>
+              <a:t>ESP32 can run a webserver! </a:t>
+            </a:r>
+            <a:r>
+              <a:rPr lang="en-US" sz="1600" dirty="0">
+                <a:highlight>
+                  <a:srgbClr val="FFFF00"/>
+                </a:highlight>
+                <a:sym typeface="Wingdings" panose="05000000000000000000" pitchFamily="2" charset="2"/>
+              </a:rPr>
+              <a:t></a:t>
+            </a:r>
+            <a:endParaRPr lang="en-US" sz="1600" dirty="0">
+              <a:highlight>
+                <a:srgbClr val="FFFF00"/>
+              </a:highlight>
+            </a:endParaRPr>
           </a:p>
           <a:p>
             <a:pPr marL="511175" lvl="1" indent="-285750">
@@ -12420,17 +12534,44 @@
               <a:buFont typeface="Arial" panose="020B0604020202020204" pitchFamily="34" charset="0"/>
               <a:buChar char="•"/>
             </a:pPr>
-            <a:r>
-              <a:rPr lang="en-US" dirty="0"/>
-              <a:t>Raw data</a:t>
-            </a:r>
+            <a:endParaRPr lang="en-US" sz="1600" dirty="0"/>
           </a:p>
         </p:txBody>
       </p:sp>
+      <p:pic>
+        <p:nvPicPr>
+          <p:cNvPr id="5" name="Picture 4">
+            <a:extLst>
+              <a:ext uri="{FF2B5EF4-FFF2-40B4-BE49-F238E27FC236}">
+                <a16:creationId xmlns:a16="http://schemas.microsoft.com/office/drawing/2014/main" id="{D84109C7-EA7E-4815-A02E-48B3E8DA296F}"/>
+              </a:ext>
+            </a:extLst>
+          </p:cNvPr>
+          <p:cNvPicPr>
+            <a:picLocks noChangeAspect="1"/>
+          </p:cNvPicPr>
+          <p:nvPr/>
+        </p:nvPicPr>
+        <p:blipFill>
+          <a:blip r:embed="rId2"/>
+          <a:stretch>
+            <a:fillRect/>
+          </a:stretch>
+        </p:blipFill>
+        <p:spPr>
+          <a:xfrm>
+            <a:off x="5930283" y="308848"/>
+            <a:ext cx="3121979" cy="3663352"/>
+          </a:xfrm>
+          <a:prstGeom prst="rect">
+            <a:avLst/>
+          </a:prstGeom>
+        </p:spPr>
+      </p:pic>
     </p:spTree>
     <p:extLst>
       <p:ext uri="{BB962C8B-B14F-4D97-AF65-F5344CB8AC3E}">
-        <p14:creationId xmlns:p14="http://schemas.microsoft.com/office/powerpoint/2010/main" val="3640505480"/>
+        <p14:creationId xmlns:p14="http://schemas.microsoft.com/office/powerpoint/2010/main" val="3135779313"/>
       </p:ext>
     </p:extLst>
   </p:cSld>
@@ -12532,7 +12673,7 @@
             </a:pPr>
             <a:r>
               <a:rPr lang="en-US" sz="3600" dirty="0"/>
-              <a:t>Webserver – work flow</a:t>
+              <a:t>Webserver – what can we do with it</a:t>
             </a:r>
           </a:p>
         </p:txBody>
@@ -12572,7 +12713,33 @@
             </a:pPr>
             <a:r>
               <a:rPr lang="en-US" dirty="0"/>
-              <a:t>We need to initialize:</a:t>
+              <a:t>Have a nice GUI to communicate with the ESP32 using a browser</a:t>
+            </a:r>
+          </a:p>
+          <a:p>
+            <a:pPr marL="285750" indent="-285750">
+              <a:spcBef>
+                <a:spcPts val="600"/>
+              </a:spcBef>
+              <a:buFont typeface="Arial" panose="020B0604020202020204" pitchFamily="34" charset="0"/>
+              <a:buChar char="•"/>
+            </a:pPr>
+            <a:r>
+              <a:rPr lang="en-US" dirty="0"/>
+              <a:t>Control IOs</a:t>
+            </a:r>
+          </a:p>
+          <a:p>
+            <a:pPr marL="285750" indent="-285750">
+              <a:spcBef>
+                <a:spcPts val="600"/>
+              </a:spcBef>
+              <a:buFont typeface="Arial" panose="020B0604020202020204" pitchFamily="34" charset="0"/>
+              <a:buChar char="•"/>
+            </a:pPr>
+            <a:r>
+              <a:rPr lang="en-US" dirty="0"/>
+              <a:t>Get information from our ESP32</a:t>
             </a:r>
           </a:p>
           <a:p>
@@ -12584,10 +12751,22 @@
               <a:buChar char="•"/>
             </a:pPr>
             <a:r>
-              <a:rPr lang="en-US" dirty="0" err="1"/>
-              <a:t>WiFi</a:t>
-            </a:r>
-            <a:endParaRPr lang="en-US" dirty="0"/>
+              <a:rPr lang="en-US" dirty="0"/>
+              <a:t>Such as temperature, humidity depending on what we connected </a:t>
+            </a:r>
+          </a:p>
+          <a:p>
+            <a:pPr marL="285750" indent="-285750">
+              <a:spcBef>
+                <a:spcPts val="600"/>
+              </a:spcBef>
+              <a:buFont typeface="Arial" panose="020B0604020202020204" pitchFamily="34" charset="0"/>
+              <a:buChar char="•"/>
+            </a:pPr>
+            <a:r>
+              <a:rPr lang="en-US" dirty="0"/>
+              <a:t>Send data to the ESP32</a:t>
+            </a:r>
           </a:p>
           <a:p>
             <a:pPr marL="511175" lvl="1" indent="-285750">
@@ -12599,11 +12778,11 @@
             </a:pPr>
             <a:r>
               <a:rPr lang="en-US" dirty="0"/>
-              <a:t>Webserver</a:t>
-            </a:r>
-          </a:p>
-          <a:p>
-            <a:pPr marL="285750" indent="-285750">
+              <a:t>Files</a:t>
+            </a:r>
+          </a:p>
+          <a:p>
+            <a:pPr marL="511175" lvl="1" indent="-285750">
               <a:spcBef>
                 <a:spcPts val="600"/>
               </a:spcBef>
@@ -12612,33 +12791,7 @@
             </a:pPr>
             <a:r>
               <a:rPr lang="en-US" dirty="0"/>
-              <a:t>Prepare the HTML for the pages</a:t>
-            </a:r>
-          </a:p>
-          <a:p>
-            <a:pPr marL="285750" indent="-285750">
-              <a:spcBef>
-                <a:spcPts val="600"/>
-              </a:spcBef>
-              <a:buFont typeface="Arial" panose="020B0604020202020204" pitchFamily="34" charset="0"/>
-              <a:buChar char="•"/>
-            </a:pPr>
-            <a:r>
-              <a:rPr lang="en-US" dirty="0"/>
-              <a:t>Handle the client which interacts with the browser</a:t>
-            </a:r>
-          </a:p>
-          <a:p>
-            <a:pPr marL="285750" indent="-285750">
-              <a:spcBef>
-                <a:spcPts val="600"/>
-              </a:spcBef>
-              <a:buFont typeface="Arial" panose="020B0604020202020204" pitchFamily="34" charset="0"/>
-              <a:buChar char="•"/>
-            </a:pPr>
-            <a:r>
-              <a:rPr lang="en-US" dirty="0"/>
-              <a:t>Process the incoming data from the browser to perform actions on the ESP</a:t>
+              <a:t>Raw data</a:t>
             </a:r>
           </a:p>
         </p:txBody>
@@ -12646,7 +12799,7 @@
     </p:spTree>
     <p:extLst>
       <p:ext uri="{BB962C8B-B14F-4D97-AF65-F5344CB8AC3E}">
-        <p14:creationId xmlns:p14="http://schemas.microsoft.com/office/powerpoint/2010/main" val="1064368233"/>
+        <p14:creationId xmlns:p14="http://schemas.microsoft.com/office/powerpoint/2010/main" val="3640505480"/>
       </p:ext>
     </p:extLst>
   </p:cSld>
@@ -12748,135 +12901,121 @@
             </a:pPr>
             <a:r>
               <a:rPr lang="en-US" sz="3600" dirty="0"/>
-              <a:t>Webserver – Init code</a:t>
+              <a:t>Webserver – work flow</a:t>
             </a:r>
           </a:p>
         </p:txBody>
       </p:sp>
-      <p:pic>
-        <p:nvPicPr>
-          <p:cNvPr id="7" name="Picture 6">
+      <p:sp>
+        <p:nvSpPr>
+          <p:cNvPr id="4" name="Content Placeholder 3">
             <a:extLst>
               <a:ext uri="{FF2B5EF4-FFF2-40B4-BE49-F238E27FC236}">
-                <a16:creationId xmlns:a16="http://schemas.microsoft.com/office/drawing/2014/main" id="{79E84ADF-B740-4776-87C7-4AB40C11F71C}"/>
+                <a16:creationId xmlns:a16="http://schemas.microsoft.com/office/drawing/2014/main" id="{0DA5B5C6-365A-4798-8EE3-9AAC1659E9D7}"/>
               </a:ext>
             </a:extLst>
           </p:cNvPr>
-          <p:cNvPicPr>
-            <a:picLocks noChangeAspect="1"/>
-          </p:cNvPicPr>
-          <p:nvPr/>
-        </p:nvPicPr>
-        <p:blipFill>
-          <a:blip r:embed="rId2"/>
-          <a:stretch>
-            <a:fillRect/>
-          </a:stretch>
-        </p:blipFill>
-        <p:spPr>
-          <a:xfrm>
-            <a:off x="389668" y="1012648"/>
-            <a:ext cx="2051692" cy="1933439"/>
-          </a:xfrm>
-          <a:prstGeom prst="rect">
-            <a:avLst/>
-          </a:prstGeom>
-          <a:solidFill>
-            <a:srgbClr val="FFFFFF">
-              <a:shade val="85000"/>
-            </a:srgbClr>
-          </a:solidFill>
-          <a:ln w="88900" cap="sq">
-            <a:solidFill>
-              <a:srgbClr val="FFFFFF"/>
-            </a:solidFill>
-            <a:miter lim="800000"/>
-          </a:ln>
-          <a:effectLst>
-            <a:outerShdw blurRad="55000" dist="18000" dir="5400000" algn="tl" rotWithShape="0">
-              <a:srgbClr val="000000">
-                <a:alpha val="40000"/>
-              </a:srgbClr>
-            </a:outerShdw>
-          </a:effectLst>
-          <a:scene3d>
-            <a:camera prst="orthographicFront"/>
-            <a:lightRig rig="twoPt" dir="t">
-              <a:rot lat="0" lon="0" rev="7200000"/>
-            </a:lightRig>
-          </a:scene3d>
-          <a:sp3d>
-            <a:bevelT w="25400" h="19050"/>
-            <a:contourClr>
-              <a:srgbClr val="FFFFFF"/>
-            </a:contourClr>
-          </a:sp3d>
-        </p:spPr>
-      </p:pic>
-      <p:pic>
-        <p:nvPicPr>
-          <p:cNvPr id="8" name="Picture 7">
-            <a:extLst>
-              <a:ext uri="{FF2B5EF4-FFF2-40B4-BE49-F238E27FC236}">
-                <a16:creationId xmlns:a16="http://schemas.microsoft.com/office/drawing/2014/main" id="{D0E6B839-BF29-4E94-9095-6B2F6CEAA1D5}"/>
-              </a:ext>
-            </a:extLst>
-          </p:cNvPr>
-          <p:cNvPicPr>
-            <a:picLocks noChangeAspect="1"/>
-          </p:cNvPicPr>
-          <p:nvPr/>
-        </p:nvPicPr>
-        <p:blipFill>
-          <a:blip r:embed="rId3"/>
-          <a:stretch>
-            <a:fillRect/>
-          </a:stretch>
-        </p:blipFill>
-        <p:spPr>
-          <a:xfrm>
-            <a:off x="3523273" y="139084"/>
-            <a:ext cx="3608455" cy="4474771"/>
-          </a:xfrm>
-          <a:prstGeom prst="rect">
-            <a:avLst/>
-          </a:prstGeom>
-          <a:solidFill>
-            <a:srgbClr val="FFFFFF">
-              <a:shade val="85000"/>
-            </a:srgbClr>
-          </a:solidFill>
-          <a:ln w="88900" cap="sq">
-            <a:solidFill>
-              <a:srgbClr val="FFFFFF"/>
-            </a:solidFill>
-            <a:miter lim="800000"/>
-          </a:ln>
-          <a:effectLst>
-            <a:outerShdw blurRad="55000" dist="18000" dir="5400000" algn="tl" rotWithShape="0">
-              <a:srgbClr val="000000">
-                <a:alpha val="40000"/>
-              </a:srgbClr>
-            </a:outerShdw>
-          </a:effectLst>
-          <a:scene3d>
-            <a:camera prst="orthographicFront"/>
-            <a:lightRig rig="twoPt" dir="t">
-              <a:rot lat="0" lon="0" rev="7200000"/>
-            </a:lightRig>
-          </a:scene3d>
-          <a:sp3d>
-            <a:bevelT w="25400" h="19050"/>
-            <a:contourClr>
-              <a:srgbClr val="FFFFFF"/>
-            </a:contourClr>
-          </a:sp3d>
-        </p:spPr>
-      </p:pic>
+          <p:cNvSpPr>
+            <a:spLocks noGrp="1"/>
+          </p:cNvSpPr>
+          <p:nvPr>
+            <p:ph sz="quarter" idx="13"/>
+          </p:nvPr>
+        </p:nvSpPr>
+        <p:spPr>
+          <a:xfrm>
+            <a:off x="455613" y="715109"/>
+            <a:ext cx="8228012" cy="3914042"/>
+          </a:xfrm>
+        </p:spPr>
+        <p:txBody>
+          <a:bodyPr/>
+          <a:lstStyle/>
+          <a:p>
+            <a:pPr marL="285750" indent="-285750">
+              <a:spcBef>
+                <a:spcPts val="600"/>
+              </a:spcBef>
+              <a:buFont typeface="Arial" panose="020B0604020202020204" pitchFamily="34" charset="0"/>
+              <a:buChar char="•"/>
+            </a:pPr>
+            <a:r>
+              <a:rPr lang="en-US" dirty="0"/>
+              <a:t>We need to initialize:</a:t>
+            </a:r>
+          </a:p>
+          <a:p>
+            <a:pPr marL="511175" lvl="1" indent="-285750">
+              <a:spcBef>
+                <a:spcPts val="600"/>
+              </a:spcBef>
+              <a:buFont typeface="Arial" panose="020B0604020202020204" pitchFamily="34" charset="0"/>
+              <a:buChar char="•"/>
+            </a:pPr>
+            <a:r>
+              <a:rPr lang="en-US" dirty="0" err="1"/>
+              <a:t>WiFi</a:t>
+            </a:r>
+            <a:endParaRPr lang="en-US" dirty="0"/>
+          </a:p>
+          <a:p>
+            <a:pPr marL="511175" lvl="1" indent="-285750">
+              <a:spcBef>
+                <a:spcPts val="600"/>
+              </a:spcBef>
+              <a:buFont typeface="Arial" panose="020B0604020202020204" pitchFamily="34" charset="0"/>
+              <a:buChar char="•"/>
+            </a:pPr>
+            <a:r>
+              <a:rPr lang="en-US" dirty="0"/>
+              <a:t>Webserver</a:t>
+            </a:r>
+          </a:p>
+          <a:p>
+            <a:pPr marL="285750" indent="-285750">
+              <a:spcBef>
+                <a:spcPts val="600"/>
+              </a:spcBef>
+              <a:buFont typeface="Arial" panose="020B0604020202020204" pitchFamily="34" charset="0"/>
+              <a:buChar char="•"/>
+            </a:pPr>
+            <a:r>
+              <a:rPr lang="en-US" dirty="0"/>
+              <a:t>Prepare the HTML for the pages</a:t>
+            </a:r>
+          </a:p>
+          <a:p>
+            <a:pPr marL="285750" indent="-285750">
+              <a:spcBef>
+                <a:spcPts val="600"/>
+              </a:spcBef>
+              <a:buFont typeface="Arial" panose="020B0604020202020204" pitchFamily="34" charset="0"/>
+              <a:buChar char="•"/>
+            </a:pPr>
+            <a:r>
+              <a:rPr lang="en-US" dirty="0"/>
+              <a:t>Handle the client which interacts with the browser</a:t>
+            </a:r>
+          </a:p>
+          <a:p>
+            <a:pPr marL="285750" indent="-285750">
+              <a:spcBef>
+                <a:spcPts val="600"/>
+              </a:spcBef>
+              <a:buFont typeface="Arial" panose="020B0604020202020204" pitchFamily="34" charset="0"/>
+              <a:buChar char="•"/>
+            </a:pPr>
+            <a:r>
+              <a:rPr lang="en-US" dirty="0"/>
+              <a:t>Process the incoming data from the browser to perform actions on the ESP</a:t>
+            </a:r>
+          </a:p>
+        </p:txBody>
+      </p:sp>
     </p:spTree>
     <p:extLst>
       <p:ext uri="{BB962C8B-B14F-4D97-AF65-F5344CB8AC3E}">
-        <p14:creationId xmlns:p14="http://schemas.microsoft.com/office/powerpoint/2010/main" val="1554997935"/>
+        <p14:creationId xmlns:p14="http://schemas.microsoft.com/office/powerpoint/2010/main" val="1064368233"/>
       </p:ext>
     </p:extLst>
   </p:cSld>
@@ -12978,17 +13117,17 @@
             </a:pPr>
             <a:r>
               <a:rPr lang="en-US" sz="3600" dirty="0"/>
-              <a:t>Webserver – INIT code</a:t>
+              <a:t>Webserver – Init code</a:t>
             </a:r>
           </a:p>
         </p:txBody>
       </p:sp>
       <p:pic>
         <p:nvPicPr>
-          <p:cNvPr id="4" name="Picture 3">
+          <p:cNvPr id="7" name="Picture 6">
             <a:extLst>
               <a:ext uri="{FF2B5EF4-FFF2-40B4-BE49-F238E27FC236}">
-                <a16:creationId xmlns:a16="http://schemas.microsoft.com/office/drawing/2014/main" id="{EE09051D-9811-4CEB-AC65-05F15163F3F4}"/>
+                <a16:creationId xmlns:a16="http://schemas.microsoft.com/office/drawing/2014/main" id="{79E84ADF-B740-4776-87C7-4AB40C11F71C}"/>
               </a:ext>
             </a:extLst>
           </p:cNvPr>
@@ -13005,8 +13144,8 @@
         </p:blipFill>
         <p:spPr>
           <a:xfrm>
-            <a:off x="455613" y="809684"/>
-            <a:ext cx="5042159" cy="1257365"/>
+            <a:off x="389668" y="1012648"/>
+            <a:ext cx="2051692" cy="1933439"/>
           </a:xfrm>
           <a:prstGeom prst="rect">
             <a:avLst/>
@@ -13043,10 +13182,70 @@
           </a:sp3d>
         </p:spPr>
       </p:pic>
+      <p:pic>
+        <p:nvPicPr>
+          <p:cNvPr id="8" name="Picture 7">
+            <a:extLst>
+              <a:ext uri="{FF2B5EF4-FFF2-40B4-BE49-F238E27FC236}">
+                <a16:creationId xmlns:a16="http://schemas.microsoft.com/office/drawing/2014/main" id="{D0E6B839-BF29-4E94-9095-6B2F6CEAA1D5}"/>
+              </a:ext>
+            </a:extLst>
+          </p:cNvPr>
+          <p:cNvPicPr>
+            <a:picLocks noChangeAspect="1"/>
+          </p:cNvPicPr>
+          <p:nvPr/>
+        </p:nvPicPr>
+        <p:blipFill>
+          <a:blip r:embed="rId3"/>
+          <a:stretch>
+            <a:fillRect/>
+          </a:stretch>
+        </p:blipFill>
+        <p:spPr>
+          <a:xfrm>
+            <a:off x="3523273" y="139084"/>
+            <a:ext cx="3608455" cy="4474771"/>
+          </a:xfrm>
+          <a:prstGeom prst="rect">
+            <a:avLst/>
+          </a:prstGeom>
+          <a:solidFill>
+            <a:srgbClr val="FFFFFF">
+              <a:shade val="85000"/>
+            </a:srgbClr>
+          </a:solidFill>
+          <a:ln w="88900" cap="sq">
+            <a:solidFill>
+              <a:srgbClr val="FFFFFF"/>
+            </a:solidFill>
+            <a:miter lim="800000"/>
+          </a:ln>
+          <a:effectLst>
+            <a:outerShdw blurRad="55000" dist="18000" dir="5400000" algn="tl" rotWithShape="0">
+              <a:srgbClr val="000000">
+                <a:alpha val="40000"/>
+              </a:srgbClr>
+            </a:outerShdw>
+          </a:effectLst>
+          <a:scene3d>
+            <a:camera prst="orthographicFront"/>
+            <a:lightRig rig="twoPt" dir="t">
+              <a:rot lat="0" lon="0" rev="7200000"/>
+            </a:lightRig>
+          </a:scene3d>
+          <a:sp3d>
+            <a:bevelT w="25400" h="19050"/>
+            <a:contourClr>
+              <a:srgbClr val="FFFFFF"/>
+            </a:contourClr>
+          </a:sp3d>
+        </p:spPr>
+      </p:pic>
     </p:spTree>
     <p:extLst>
       <p:ext uri="{BB962C8B-B14F-4D97-AF65-F5344CB8AC3E}">
-        <p14:creationId xmlns:p14="http://schemas.microsoft.com/office/powerpoint/2010/main" val="3263317341"/>
+        <p14:creationId xmlns:p14="http://schemas.microsoft.com/office/powerpoint/2010/main" val="1554997935"/>
       </p:ext>
     </p:extLst>
   </p:cSld>
@@ -13148,17 +13347,17 @@
             </a:pPr>
             <a:r>
               <a:rPr lang="en-US" sz="3600" dirty="0"/>
-              <a:t>Webserver – html data</a:t>
+              <a:t>Webserver – INIT code</a:t>
             </a:r>
           </a:p>
         </p:txBody>
       </p:sp>
       <p:pic>
         <p:nvPicPr>
-          <p:cNvPr id="5" name="Picture 4">
+          <p:cNvPr id="4" name="Picture 3">
             <a:extLst>
               <a:ext uri="{FF2B5EF4-FFF2-40B4-BE49-F238E27FC236}">
-                <a16:creationId xmlns:a16="http://schemas.microsoft.com/office/drawing/2014/main" id="{55C7DBF9-8821-4413-9882-00A2B4401C65}"/>
+                <a16:creationId xmlns:a16="http://schemas.microsoft.com/office/drawing/2014/main" id="{EE09051D-9811-4CEB-AC65-05F15163F3F4}"/>
               </a:ext>
             </a:extLst>
           </p:cNvPr>
@@ -13175,18 +13374,48 @@
         </p:blipFill>
         <p:spPr>
           <a:xfrm>
-            <a:off x="183471" y="778570"/>
-            <a:ext cx="8626136" cy="3865787"/>
+            <a:off x="455613" y="809684"/>
+            <a:ext cx="5042159" cy="1257365"/>
           </a:xfrm>
           <a:prstGeom prst="rect">
             <a:avLst/>
           </a:prstGeom>
+          <a:solidFill>
+            <a:srgbClr val="FFFFFF">
+              <a:shade val="85000"/>
+            </a:srgbClr>
+          </a:solidFill>
+          <a:ln w="88900" cap="sq">
+            <a:solidFill>
+              <a:srgbClr val="FFFFFF"/>
+            </a:solidFill>
+            <a:miter lim="800000"/>
+          </a:ln>
+          <a:effectLst>
+            <a:outerShdw blurRad="55000" dist="18000" dir="5400000" algn="tl" rotWithShape="0">
+              <a:srgbClr val="000000">
+                <a:alpha val="40000"/>
+              </a:srgbClr>
+            </a:outerShdw>
+          </a:effectLst>
+          <a:scene3d>
+            <a:camera prst="orthographicFront"/>
+            <a:lightRig rig="twoPt" dir="t">
+              <a:rot lat="0" lon="0" rev="7200000"/>
+            </a:lightRig>
+          </a:scene3d>
+          <a:sp3d>
+            <a:bevelT w="25400" h="19050"/>
+            <a:contourClr>
+              <a:srgbClr val="FFFFFF"/>
+            </a:contourClr>
+          </a:sp3d>
         </p:spPr>
       </p:pic>
     </p:spTree>
     <p:extLst>
       <p:ext uri="{BB962C8B-B14F-4D97-AF65-F5344CB8AC3E}">
-        <p14:creationId xmlns:p14="http://schemas.microsoft.com/office/powerpoint/2010/main" val="384169297"/>
+        <p14:creationId xmlns:p14="http://schemas.microsoft.com/office/powerpoint/2010/main" val="3263317341"/>
       </p:ext>
     </p:extLst>
   </p:cSld>
@@ -13230,7 +13459,7 @@
           <p:cNvPr id="2" name="Slide Number Placeholder 1">
             <a:extLst>
               <a:ext uri="{FF2B5EF4-FFF2-40B4-BE49-F238E27FC236}">
-                <a16:creationId xmlns:a16="http://schemas.microsoft.com/office/drawing/2014/main" id="{37157233-EC5F-4AB8-BF4E-863412F94918}"/>
+                <a16:creationId xmlns:a16="http://schemas.microsoft.com/office/drawing/2014/main" id="{17744C99-9A24-4D6F-8D3C-A4CB41E876CA}"/>
               </a:ext>
             </a:extLst>
           </p:cNvPr>
@@ -13260,7 +13489,7 @@
           <p:cNvPr id="3" name="Title 2">
             <a:extLst>
               <a:ext uri="{FF2B5EF4-FFF2-40B4-BE49-F238E27FC236}">
-                <a16:creationId xmlns:a16="http://schemas.microsoft.com/office/drawing/2014/main" id="{5062CBCF-B3CA-4317-9016-54D494C2D28A}"/>
+                <a16:creationId xmlns:a16="http://schemas.microsoft.com/office/drawing/2014/main" id="{DFCD3F10-262A-49AA-92F3-A28E2073C0CF}"/>
               </a:ext>
             </a:extLst>
           </p:cNvPr>
@@ -13274,125 +13503,59 @@
         <p:spPr>
           <a:xfrm>
             <a:off x="455613" y="308848"/>
-            <a:ext cx="8229600" cy="350719"/>
+            <a:ext cx="8229600" cy="379883"/>
           </a:xfrm>
         </p:spPr>
         <p:txBody>
           <a:bodyPr/>
           <a:lstStyle/>
           <a:p>
-            <a:r>
-              <a:rPr lang="en-US" sz="3200" dirty="0"/>
+            <a:pPr>
+              <a:spcBef>
+                <a:spcPts val="600"/>
+              </a:spcBef>
+            </a:pPr>
+            <a:r>
+              <a:rPr lang="en-US" sz="3600" dirty="0"/>
               <a:t>Webserver – html data</a:t>
             </a:r>
-            <a:endParaRPr lang="en-US" dirty="0"/>
           </a:p>
         </p:txBody>
       </p:sp>
-      <p:sp>
-        <p:nvSpPr>
-          <p:cNvPr id="4" name="Content Placeholder 3">
+      <p:pic>
+        <p:nvPicPr>
+          <p:cNvPr id="5" name="Picture 4">
             <a:extLst>
               <a:ext uri="{FF2B5EF4-FFF2-40B4-BE49-F238E27FC236}">
-                <a16:creationId xmlns:a16="http://schemas.microsoft.com/office/drawing/2014/main" id="{F29819DE-3E85-490B-BE80-F9200B91C27E}"/>
+                <a16:creationId xmlns:a16="http://schemas.microsoft.com/office/drawing/2014/main" id="{55C7DBF9-8821-4413-9882-00A2B4401C65}"/>
               </a:ext>
             </a:extLst>
           </p:cNvPr>
-          <p:cNvSpPr>
-            <a:spLocks noGrp="1"/>
-          </p:cNvSpPr>
-          <p:nvPr>
-            <p:ph sz="quarter" idx="13"/>
-          </p:nvPr>
-        </p:nvSpPr>
-        <p:spPr>
-          <a:xfrm>
-            <a:off x="455613" y="716531"/>
-            <a:ext cx="8228012" cy="3912620"/>
-          </a:xfrm>
-        </p:spPr>
-        <p:txBody>
-          <a:bodyPr/>
-          <a:lstStyle/>
-          <a:p>
-            <a:pPr marL="285750" indent="-285750">
-              <a:buFont typeface="Arial" panose="020B0604020202020204" pitchFamily="34" charset="0"/>
-              <a:buChar char="•"/>
-            </a:pPr>
-            <a:r>
-              <a:rPr lang="en-US" b="1" dirty="0"/>
-              <a:t>For static data with pre-defined start conditions:</a:t>
-            </a:r>
-          </a:p>
-          <a:p>
-            <a:pPr marL="285750" indent="-285750">
-              <a:buFont typeface="Arial" panose="020B0604020202020204" pitchFamily="34" charset="0"/>
-              <a:buChar char="•"/>
-            </a:pPr>
-            <a:r>
-              <a:rPr lang="pt-BR" dirty="0"/>
-              <a:t>const char mainMenuPage[]PROGMEM = R"rawliteral(</a:t>
-            </a:r>
-          </a:p>
-          <a:p>
-            <a:pPr marL="511175" lvl="1" indent="-285750">
-              <a:buFont typeface="Arial" panose="020B0604020202020204" pitchFamily="34" charset="0"/>
-              <a:buChar char="•"/>
-            </a:pPr>
-            <a:r>
-              <a:rPr lang="pt-BR" dirty="0"/>
-              <a:t>HTML Data</a:t>
-            </a:r>
-          </a:p>
-          <a:p>
-            <a:pPr marL="285750" indent="-285750">
-              <a:buFont typeface="Arial" panose="020B0604020202020204" pitchFamily="34" charset="0"/>
-              <a:buChar char="•"/>
-            </a:pPr>
-            <a:r>
-              <a:rPr lang="en-US" dirty="0"/>
-              <a:t>)</a:t>
-            </a:r>
-            <a:r>
-              <a:rPr lang="en-US" dirty="0" err="1"/>
-              <a:t>rawliteral</a:t>
-            </a:r>
-            <a:r>
-              <a:rPr lang="en-US" dirty="0"/>
-              <a:t>";</a:t>
-            </a:r>
-          </a:p>
-          <a:p>
-            <a:pPr marL="285750" indent="-285750">
-              <a:buFont typeface="Arial" panose="020B0604020202020204" pitchFamily="34" charset="0"/>
-              <a:buChar char="•"/>
-            </a:pPr>
-            <a:r>
-              <a:rPr lang="en-US" dirty="0"/>
-              <a:t>For </a:t>
-            </a:r>
-            <a:r>
-              <a:rPr lang="en-US" b="1" dirty="0"/>
-              <a:t>dynamic data </a:t>
-            </a:r>
-            <a:r>
-              <a:rPr lang="en-US" dirty="0"/>
-              <a:t>with interactive page with need to use String and build the page in real time!</a:t>
-            </a:r>
-          </a:p>
-          <a:p>
-            <a:pPr marL="285750" indent="-285750">
-              <a:buFont typeface="Arial" panose="020B0604020202020204" pitchFamily="34" charset="0"/>
-              <a:buChar char="•"/>
-            </a:pPr>
-            <a:endParaRPr lang="en-US" dirty="0"/>
-          </a:p>
-        </p:txBody>
-      </p:sp>
+          <p:cNvPicPr>
+            <a:picLocks noChangeAspect="1"/>
+          </p:cNvPicPr>
+          <p:nvPr/>
+        </p:nvPicPr>
+        <p:blipFill>
+          <a:blip r:embed="rId2"/>
+          <a:stretch>
+            <a:fillRect/>
+          </a:stretch>
+        </p:blipFill>
+        <p:spPr>
+          <a:xfrm>
+            <a:off x="183471" y="778570"/>
+            <a:ext cx="8626136" cy="3865787"/>
+          </a:xfrm>
+          <a:prstGeom prst="rect">
+            <a:avLst/>
+          </a:prstGeom>
+        </p:spPr>
+      </p:pic>
     </p:spTree>
     <p:extLst>
       <p:ext uri="{BB962C8B-B14F-4D97-AF65-F5344CB8AC3E}">
-        <p14:creationId xmlns:p14="http://schemas.microsoft.com/office/powerpoint/2010/main" val="45496730"/>
+        <p14:creationId xmlns:p14="http://schemas.microsoft.com/office/powerpoint/2010/main" val="384169297"/>
       </p:ext>
     </p:extLst>
   </p:cSld>
@@ -13436,7 +13599,7 @@
           <p:cNvPr id="2" name="Slide Number Placeholder 1">
             <a:extLst>
               <a:ext uri="{FF2B5EF4-FFF2-40B4-BE49-F238E27FC236}">
-                <a16:creationId xmlns:a16="http://schemas.microsoft.com/office/drawing/2014/main" id="{56E3DFE6-6742-4651-92CA-250425F97004}"/>
+                <a16:creationId xmlns:a16="http://schemas.microsoft.com/office/drawing/2014/main" id="{37157233-EC5F-4AB8-BF4E-863412F94918}"/>
               </a:ext>
             </a:extLst>
           </p:cNvPr>
@@ -13466,7 +13629,7 @@
           <p:cNvPr id="3" name="Title 2">
             <a:extLst>
               <a:ext uri="{FF2B5EF4-FFF2-40B4-BE49-F238E27FC236}">
-                <a16:creationId xmlns:a16="http://schemas.microsoft.com/office/drawing/2014/main" id="{E2589F46-9087-4D5C-87AB-7AB0D3A6C3DB}"/>
+                <a16:creationId xmlns:a16="http://schemas.microsoft.com/office/drawing/2014/main" id="{5062CBCF-B3CA-4317-9016-54D494C2D28A}"/>
               </a:ext>
             </a:extLst>
           </p:cNvPr>
@@ -13479,8 +13642,8 @@
         </p:nvSpPr>
         <p:spPr>
           <a:xfrm>
-            <a:off x="454025" y="202041"/>
-            <a:ext cx="8229600" cy="380651"/>
+            <a:off x="455613" y="308848"/>
+            <a:ext cx="8229600" cy="350719"/>
           </a:xfrm>
         </p:spPr>
         <p:txBody>
@@ -13488,477 +13651,117 @@
           <a:lstStyle/>
           <a:p>
             <a:r>
-              <a:rPr lang="en-US" dirty="0"/>
-              <a:t>How does it looks…</a:t>
-            </a:r>
+              <a:rPr lang="en-US" sz="3200" dirty="0"/>
+              <a:t>Webserver – html data</a:t>
+            </a:r>
+            <a:endParaRPr lang="en-US" dirty="0"/>
           </a:p>
         </p:txBody>
       </p:sp>
-      <p:pic>
-        <p:nvPicPr>
-          <p:cNvPr id="6" name="Picture 5">
+      <p:sp>
+        <p:nvSpPr>
+          <p:cNvPr id="4" name="Content Placeholder 3">
             <a:extLst>
               <a:ext uri="{FF2B5EF4-FFF2-40B4-BE49-F238E27FC236}">
-                <a16:creationId xmlns:a16="http://schemas.microsoft.com/office/drawing/2014/main" id="{8DD4EEEE-F122-487D-B84A-7590AE455063}"/>
+                <a16:creationId xmlns:a16="http://schemas.microsoft.com/office/drawing/2014/main" id="{F29819DE-3E85-490B-BE80-F9200B91C27E}"/>
               </a:ext>
             </a:extLst>
           </p:cNvPr>
-          <p:cNvPicPr>
-            <a:picLocks noChangeAspect="1"/>
-          </p:cNvPicPr>
-          <p:nvPr/>
-        </p:nvPicPr>
-        <p:blipFill>
-          <a:blip r:embed="rId2"/>
-          <a:stretch>
-            <a:fillRect/>
-          </a:stretch>
-        </p:blipFill>
-        <p:spPr>
-          <a:xfrm>
-            <a:off x="4673975" y="801948"/>
-            <a:ext cx="1655873" cy="3539601"/>
-          </a:xfrm>
-          <a:prstGeom prst="rect">
-            <a:avLst/>
-          </a:prstGeom>
-          <a:ln>
-            <a:noFill/>
-          </a:ln>
-          <a:effectLst>
-            <a:outerShdw blurRad="292100" dist="139700" dir="2700000" algn="tl" rotWithShape="0">
-              <a:srgbClr val="333333">
-                <a:alpha val="65000"/>
-              </a:srgbClr>
-            </a:outerShdw>
-          </a:effectLst>
-        </p:spPr>
-      </p:pic>
-      <p:pic>
-        <p:nvPicPr>
-          <p:cNvPr id="7" name="Picture 6">
-            <a:extLst>
-              <a:ext uri="{FF2B5EF4-FFF2-40B4-BE49-F238E27FC236}">
-                <a16:creationId xmlns:a16="http://schemas.microsoft.com/office/drawing/2014/main" id="{8E4A0632-2833-4A40-A154-B560E1A43420}"/>
-              </a:ext>
-            </a:extLst>
-          </p:cNvPr>
-          <p:cNvPicPr>
-            <a:picLocks noChangeAspect="1"/>
-          </p:cNvPicPr>
-          <p:nvPr/>
-        </p:nvPicPr>
-        <p:blipFill>
-          <a:blip r:embed="rId3"/>
-          <a:stretch>
-            <a:fillRect/>
-          </a:stretch>
-        </p:blipFill>
-        <p:spPr>
-          <a:xfrm>
-            <a:off x="391637" y="801948"/>
-            <a:ext cx="1648931" cy="3539601"/>
-          </a:xfrm>
-          <a:prstGeom prst="rect">
-            <a:avLst/>
-          </a:prstGeom>
-          <a:ln>
-            <a:noFill/>
-          </a:ln>
-          <a:effectLst>
-            <a:outerShdw blurRad="292100" dist="139700" dir="2700000" algn="tl" rotWithShape="0">
-              <a:srgbClr val="333333">
-                <a:alpha val="65000"/>
-              </a:srgbClr>
-            </a:outerShdw>
-          </a:effectLst>
-        </p:spPr>
-      </p:pic>
-      <p:pic>
-        <p:nvPicPr>
-          <p:cNvPr id="8" name="Picture 7">
-            <a:extLst>
-              <a:ext uri="{FF2B5EF4-FFF2-40B4-BE49-F238E27FC236}">
-                <a16:creationId xmlns:a16="http://schemas.microsoft.com/office/drawing/2014/main" id="{1563C456-643B-4665-807C-AF40417EE4D1}"/>
-              </a:ext>
-            </a:extLst>
-          </p:cNvPr>
-          <p:cNvPicPr>
-            <a:picLocks noChangeAspect="1"/>
-          </p:cNvPicPr>
-          <p:nvPr/>
-        </p:nvPicPr>
-        <p:blipFill>
-          <a:blip r:embed="rId4"/>
-          <a:stretch>
-            <a:fillRect/>
-          </a:stretch>
-        </p:blipFill>
-        <p:spPr>
-          <a:xfrm>
-            <a:off x="2532806" y="801948"/>
-            <a:ext cx="1648931" cy="3535387"/>
-          </a:xfrm>
-          <a:prstGeom prst="rect">
-            <a:avLst/>
-          </a:prstGeom>
-          <a:ln>
-            <a:noFill/>
-          </a:ln>
-          <a:effectLst>
-            <a:outerShdw blurRad="292100" dist="139700" dir="2700000" algn="tl" rotWithShape="0">
-              <a:srgbClr val="333333">
-                <a:alpha val="65000"/>
-              </a:srgbClr>
-            </a:outerShdw>
-          </a:effectLst>
-        </p:spPr>
-      </p:pic>
-      <p:pic>
-        <p:nvPicPr>
-          <p:cNvPr id="9" name="Picture 8">
-            <a:extLst>
-              <a:ext uri="{FF2B5EF4-FFF2-40B4-BE49-F238E27FC236}">
-                <a16:creationId xmlns:a16="http://schemas.microsoft.com/office/drawing/2014/main" id="{8A2EBB5C-00C7-4A0E-8CF2-02604A2EE57E}"/>
-              </a:ext>
-            </a:extLst>
-          </p:cNvPr>
-          <p:cNvPicPr>
-            <a:picLocks noChangeAspect="1"/>
-          </p:cNvPicPr>
-          <p:nvPr/>
-        </p:nvPicPr>
-        <p:blipFill>
-          <a:blip r:embed="rId5"/>
-          <a:stretch>
-            <a:fillRect/>
-          </a:stretch>
-        </p:blipFill>
-        <p:spPr>
-          <a:xfrm>
-            <a:off x="6554254" y="1177675"/>
-            <a:ext cx="2348586" cy="2172166"/>
-          </a:xfrm>
-          <a:prstGeom prst="rect">
-            <a:avLst/>
-          </a:prstGeom>
-          <a:ln>
-            <a:noFill/>
-          </a:ln>
-          <a:effectLst>
-            <a:outerShdw blurRad="292100" dist="139700" dir="2700000" algn="tl" rotWithShape="0">
-              <a:srgbClr val="333333">
-                <a:alpha val="65000"/>
-              </a:srgbClr>
-            </a:outerShdw>
-          </a:effectLst>
-        </p:spPr>
-      </p:pic>
-      <p:cxnSp>
-        <p:nvCxnSpPr>
-          <p:cNvPr id="11" name="Straight Arrow Connector 10">
-            <a:extLst>
-              <a:ext uri="{FF2B5EF4-FFF2-40B4-BE49-F238E27FC236}">
-                <a16:creationId xmlns:a16="http://schemas.microsoft.com/office/drawing/2014/main" id="{1E243132-4924-40D1-8FBE-B91012733E9F}"/>
-              </a:ext>
-            </a:extLst>
-          </p:cNvPr>
-          <p:cNvCxnSpPr/>
-          <p:nvPr/>
-        </p:nvCxnSpPr>
-        <p:spPr>
-          <a:xfrm flipV="1">
-            <a:off x="1559511" y="1592062"/>
-            <a:ext cx="855215" cy="399495"/>
-          </a:xfrm>
-          <a:prstGeom prst="straightConnector1">
-            <a:avLst/>
-          </a:prstGeom>
-          <a:ln>
-            <a:solidFill>
-              <a:schemeClr val="tx2"/>
-            </a:solidFill>
-            <a:tailEnd type="triangle"/>
-          </a:ln>
-          <a:effectLst/>
-        </p:spPr>
-        <p:style>
-          <a:lnRef idx="2">
-            <a:schemeClr val="accent1"/>
-          </a:lnRef>
-          <a:fillRef idx="0">
-            <a:schemeClr val="accent1"/>
-          </a:fillRef>
-          <a:effectRef idx="1">
-            <a:schemeClr val="accent1"/>
-          </a:effectRef>
-          <a:fontRef idx="minor">
-            <a:schemeClr val="tx1"/>
-          </a:fontRef>
-        </p:style>
-      </p:cxnSp>
-      <p:cxnSp>
-        <p:nvCxnSpPr>
-          <p:cNvPr id="13" name="Straight Arrow Connector 12">
-            <a:extLst>
-              <a:ext uri="{FF2B5EF4-FFF2-40B4-BE49-F238E27FC236}">
-                <a16:creationId xmlns:a16="http://schemas.microsoft.com/office/drawing/2014/main" id="{8878AC90-4FB9-49D6-9591-5B5601A7A0B6}"/>
-              </a:ext>
-            </a:extLst>
-          </p:cNvPr>
-          <p:cNvCxnSpPr/>
-          <p:nvPr/>
-        </p:nvCxnSpPr>
-        <p:spPr>
-          <a:xfrm>
-            <a:off x="1512163" y="2453196"/>
-            <a:ext cx="3083511" cy="0"/>
-          </a:xfrm>
-          <a:prstGeom prst="straightConnector1">
-            <a:avLst/>
-          </a:prstGeom>
-          <a:ln>
-            <a:solidFill>
-              <a:schemeClr val="tx2"/>
-            </a:solidFill>
-            <a:tailEnd type="triangle"/>
-          </a:ln>
-          <a:effectLst/>
-        </p:spPr>
-        <p:style>
-          <a:lnRef idx="2">
-            <a:schemeClr val="accent1"/>
-          </a:lnRef>
-          <a:fillRef idx="0">
-            <a:schemeClr val="accent1"/>
-          </a:fillRef>
-          <a:effectRef idx="1">
-            <a:schemeClr val="accent1"/>
-          </a:effectRef>
-          <a:fontRef idx="minor">
-            <a:schemeClr val="tx1"/>
-          </a:fontRef>
-        </p:style>
-      </p:cxnSp>
-      <p:cxnSp>
-        <p:nvCxnSpPr>
-          <p:cNvPr id="15" name="Straight Arrow Connector 14">
-            <a:extLst>
-              <a:ext uri="{FF2B5EF4-FFF2-40B4-BE49-F238E27FC236}">
-                <a16:creationId xmlns:a16="http://schemas.microsoft.com/office/drawing/2014/main" id="{1932FE31-5EFE-44B5-99F7-6A1AF8BC90BF}"/>
-              </a:ext>
-            </a:extLst>
-          </p:cNvPr>
-          <p:cNvCxnSpPr/>
-          <p:nvPr/>
-        </p:nvCxnSpPr>
-        <p:spPr>
-          <a:xfrm flipV="1">
-            <a:off x="5959876" y="1814004"/>
-            <a:ext cx="547456" cy="547456"/>
-          </a:xfrm>
-          <a:prstGeom prst="straightConnector1">
-            <a:avLst/>
-          </a:prstGeom>
-          <a:ln>
-            <a:solidFill>
-              <a:schemeClr val="tx2"/>
-            </a:solidFill>
-            <a:tailEnd type="triangle"/>
-          </a:ln>
-          <a:effectLst/>
-        </p:spPr>
-        <p:style>
-          <a:lnRef idx="2">
-            <a:schemeClr val="accent1"/>
-          </a:lnRef>
-          <a:fillRef idx="0">
-            <a:schemeClr val="accent1"/>
-          </a:fillRef>
-          <a:effectRef idx="1">
-            <a:schemeClr val="accent1"/>
-          </a:effectRef>
-          <a:fontRef idx="minor">
-            <a:schemeClr val="tx1"/>
-          </a:fontRef>
-        </p:style>
-      </p:cxnSp>
-      <p:cxnSp>
-        <p:nvCxnSpPr>
-          <p:cNvPr id="17" name="Straight Arrow Connector 16">
-            <a:extLst>
-              <a:ext uri="{FF2B5EF4-FFF2-40B4-BE49-F238E27FC236}">
-                <a16:creationId xmlns:a16="http://schemas.microsoft.com/office/drawing/2014/main" id="{2D075E91-5C13-4E5C-AC87-0FD80B8C858E}"/>
-              </a:ext>
-            </a:extLst>
-          </p:cNvPr>
-          <p:cNvCxnSpPr/>
-          <p:nvPr/>
-        </p:nvCxnSpPr>
-        <p:spPr>
-          <a:xfrm flipH="1">
-            <a:off x="2089212" y="2024109"/>
-            <a:ext cx="1050524" cy="183472"/>
-          </a:xfrm>
-          <a:prstGeom prst="straightConnector1">
-            <a:avLst/>
-          </a:prstGeom>
-          <a:ln>
-            <a:solidFill>
-              <a:schemeClr val="tx2"/>
-            </a:solidFill>
-            <a:tailEnd type="triangle"/>
-          </a:ln>
-          <a:effectLst/>
-        </p:spPr>
-        <p:style>
-          <a:lnRef idx="2">
-            <a:schemeClr val="accent1"/>
-          </a:lnRef>
-          <a:fillRef idx="0">
-            <a:schemeClr val="accent1"/>
-          </a:fillRef>
-          <a:effectRef idx="1">
-            <a:schemeClr val="accent1"/>
-          </a:effectRef>
-          <a:fontRef idx="minor">
-            <a:schemeClr val="tx1"/>
-          </a:fontRef>
-        </p:style>
-      </p:cxnSp>
-      <p:cxnSp>
-        <p:nvCxnSpPr>
-          <p:cNvPr id="19" name="Straight Arrow Connector 18">
-            <a:extLst>
-              <a:ext uri="{FF2B5EF4-FFF2-40B4-BE49-F238E27FC236}">
-                <a16:creationId xmlns:a16="http://schemas.microsoft.com/office/drawing/2014/main" id="{B009A4EE-7A25-4B30-8156-053F768DD953}"/>
-              </a:ext>
-            </a:extLst>
-          </p:cNvPr>
-          <p:cNvCxnSpPr/>
-          <p:nvPr/>
-        </p:nvCxnSpPr>
-        <p:spPr>
-          <a:xfrm flipH="1" flipV="1">
-            <a:off x="2089212" y="2805344"/>
-            <a:ext cx="3086470" cy="630314"/>
-          </a:xfrm>
-          <a:prstGeom prst="straightConnector1">
-            <a:avLst/>
-          </a:prstGeom>
-          <a:ln>
-            <a:solidFill>
-              <a:schemeClr val="tx2"/>
-            </a:solidFill>
-            <a:tailEnd type="triangle"/>
-          </a:ln>
-          <a:effectLst/>
-        </p:spPr>
-        <p:style>
-          <a:lnRef idx="2">
-            <a:schemeClr val="accent1"/>
-          </a:lnRef>
-          <a:fillRef idx="0">
-            <a:schemeClr val="accent1"/>
-          </a:fillRef>
-          <a:effectRef idx="1">
-            <a:schemeClr val="accent1"/>
-          </a:effectRef>
-          <a:fontRef idx="minor">
-            <a:schemeClr val="tx1"/>
-          </a:fontRef>
-        </p:style>
-      </p:cxnSp>
-      <p:cxnSp>
-        <p:nvCxnSpPr>
-          <p:cNvPr id="21" name="Straight Arrow Connector 20">
-            <a:extLst>
-              <a:ext uri="{FF2B5EF4-FFF2-40B4-BE49-F238E27FC236}">
-                <a16:creationId xmlns:a16="http://schemas.microsoft.com/office/drawing/2014/main" id="{923DC895-548F-4E38-9DA0-EC2C94AE735F}"/>
-              </a:ext>
-            </a:extLst>
-          </p:cNvPr>
-          <p:cNvCxnSpPr/>
-          <p:nvPr/>
-        </p:nvCxnSpPr>
-        <p:spPr>
-          <a:xfrm flipV="1">
-            <a:off x="5785282" y="1775534"/>
-            <a:ext cx="677662" cy="216023"/>
-          </a:xfrm>
-          <a:prstGeom prst="straightConnector1">
-            <a:avLst/>
-          </a:prstGeom>
-          <a:ln>
-            <a:solidFill>
-              <a:schemeClr val="tx2"/>
-            </a:solidFill>
-            <a:tailEnd type="triangle"/>
-          </a:ln>
-          <a:effectLst/>
-        </p:spPr>
-        <p:style>
-          <a:lnRef idx="2">
-            <a:schemeClr val="accent1"/>
-          </a:lnRef>
-          <a:fillRef idx="0">
-            <a:schemeClr val="accent1"/>
-          </a:fillRef>
-          <a:effectRef idx="1">
-            <a:schemeClr val="accent1"/>
-          </a:effectRef>
-          <a:fontRef idx="minor">
-            <a:schemeClr val="tx1"/>
-          </a:fontRef>
-        </p:style>
-      </p:cxnSp>
-      <p:cxnSp>
-        <p:nvCxnSpPr>
-          <p:cNvPr id="23" name="Straight Arrow Connector 22">
-            <a:extLst>
-              <a:ext uri="{FF2B5EF4-FFF2-40B4-BE49-F238E27FC236}">
-                <a16:creationId xmlns:a16="http://schemas.microsoft.com/office/drawing/2014/main" id="{CD4B4DAD-96B4-4A34-892D-67213CE60CF1}"/>
-              </a:ext>
-            </a:extLst>
-          </p:cNvPr>
-          <p:cNvCxnSpPr/>
-          <p:nvPr/>
-        </p:nvCxnSpPr>
-        <p:spPr>
-          <a:xfrm flipV="1">
-            <a:off x="5779363" y="1991557"/>
-            <a:ext cx="683581" cy="1068280"/>
-          </a:xfrm>
-          <a:prstGeom prst="straightConnector1">
-            <a:avLst/>
-          </a:prstGeom>
-          <a:ln>
-            <a:solidFill>
-              <a:schemeClr val="tx2"/>
-            </a:solidFill>
-            <a:tailEnd type="triangle"/>
-          </a:ln>
-          <a:effectLst/>
-        </p:spPr>
-        <p:style>
-          <a:lnRef idx="2">
-            <a:schemeClr val="accent1"/>
-          </a:lnRef>
-          <a:fillRef idx="0">
-            <a:schemeClr val="accent1"/>
-          </a:fillRef>
-          <a:effectRef idx="1">
-            <a:schemeClr val="accent1"/>
-          </a:effectRef>
-          <a:fontRef idx="minor">
-            <a:schemeClr val="tx1"/>
-          </a:fontRef>
-        </p:style>
-      </p:cxnSp>
+          <p:cNvSpPr>
+            <a:spLocks noGrp="1"/>
+          </p:cNvSpPr>
+          <p:nvPr>
+            <p:ph sz="quarter" idx="13"/>
+          </p:nvPr>
+        </p:nvSpPr>
+        <p:spPr>
+          <a:xfrm>
+            <a:off x="455613" y="716531"/>
+            <a:ext cx="8228012" cy="3912620"/>
+          </a:xfrm>
+        </p:spPr>
+        <p:txBody>
+          <a:bodyPr/>
+          <a:lstStyle/>
+          <a:p>
+            <a:pPr marL="285750" indent="-285750">
+              <a:buFont typeface="Arial" panose="020B0604020202020204" pitchFamily="34" charset="0"/>
+              <a:buChar char="•"/>
+            </a:pPr>
+            <a:r>
+              <a:rPr lang="en-US" b="1" dirty="0"/>
+              <a:t>For static data with pre-defined start conditions:</a:t>
+            </a:r>
+          </a:p>
+          <a:p>
+            <a:pPr marL="285750" indent="-285750">
+              <a:buFont typeface="Arial" panose="020B0604020202020204" pitchFamily="34" charset="0"/>
+              <a:buChar char="•"/>
+            </a:pPr>
+            <a:r>
+              <a:rPr lang="pt-BR" dirty="0"/>
+              <a:t>const char mainMenuPage[]PROGMEM = R"rawliteral(</a:t>
+            </a:r>
+          </a:p>
+          <a:p>
+            <a:pPr marL="511175" lvl="1" indent="-285750">
+              <a:buFont typeface="Arial" panose="020B0604020202020204" pitchFamily="34" charset="0"/>
+              <a:buChar char="•"/>
+            </a:pPr>
+            <a:r>
+              <a:rPr lang="pt-BR" dirty="0"/>
+              <a:t>HTML Data</a:t>
+            </a:r>
+          </a:p>
+          <a:p>
+            <a:pPr marL="285750" indent="-285750">
+              <a:buFont typeface="Arial" panose="020B0604020202020204" pitchFamily="34" charset="0"/>
+              <a:buChar char="•"/>
+            </a:pPr>
+            <a:r>
+              <a:rPr lang="en-US" dirty="0"/>
+              <a:t>)</a:t>
+            </a:r>
+            <a:r>
+              <a:rPr lang="en-US" dirty="0" err="1"/>
+              <a:t>rawliteral</a:t>
+            </a:r>
+            <a:r>
+              <a:rPr lang="en-US" dirty="0"/>
+              <a:t>";</a:t>
+            </a:r>
+          </a:p>
+          <a:p>
+            <a:pPr marL="285750" indent="-285750">
+              <a:buFont typeface="Arial" panose="020B0604020202020204" pitchFamily="34" charset="0"/>
+              <a:buChar char="•"/>
+            </a:pPr>
+            <a:r>
+              <a:rPr lang="en-US" dirty="0"/>
+              <a:t>For </a:t>
+            </a:r>
+            <a:r>
+              <a:rPr lang="en-US" b="1" dirty="0"/>
+              <a:t>dynamic data </a:t>
+            </a:r>
+            <a:r>
+              <a:rPr lang="en-US" dirty="0"/>
+              <a:t>with interactive page with need to use String and build the page in real time!</a:t>
+            </a:r>
+          </a:p>
+          <a:p>
+            <a:pPr marL="285750" indent="-285750">
+              <a:buFont typeface="Arial" panose="020B0604020202020204" pitchFamily="34" charset="0"/>
+              <a:buChar char="•"/>
+            </a:pPr>
+            <a:endParaRPr lang="en-US" dirty="0"/>
+          </a:p>
+        </p:txBody>
+      </p:sp>
     </p:spTree>
     <p:extLst>
       <p:ext uri="{BB962C8B-B14F-4D97-AF65-F5344CB8AC3E}">
-        <p14:creationId xmlns:p14="http://schemas.microsoft.com/office/powerpoint/2010/main" val="2896346666"/>
+        <p14:creationId xmlns:p14="http://schemas.microsoft.com/office/powerpoint/2010/main" val="45496730"/>
       </p:ext>
     </p:extLst>
   </p:cSld>
@@ -14002,7 +13805,7 @@
           <p:cNvPr id="2" name="Slide Number Placeholder 1">
             <a:extLst>
               <a:ext uri="{FF2B5EF4-FFF2-40B4-BE49-F238E27FC236}">
-                <a16:creationId xmlns:a16="http://schemas.microsoft.com/office/drawing/2014/main" id="{17744C99-9A24-4D6F-8D3C-A4CB41E876CA}"/>
+                <a16:creationId xmlns:a16="http://schemas.microsoft.com/office/drawing/2014/main" id="{56E3DFE6-6742-4651-92CA-250425F97004}"/>
               </a:ext>
             </a:extLst>
           </p:cNvPr>
@@ -14032,7 +13835,7 @@
           <p:cNvPr id="3" name="Title 2">
             <a:extLst>
               <a:ext uri="{FF2B5EF4-FFF2-40B4-BE49-F238E27FC236}">
-                <a16:creationId xmlns:a16="http://schemas.microsoft.com/office/drawing/2014/main" id="{DFCD3F10-262A-49AA-92F3-A28E2073C0CF}"/>
+                <a16:creationId xmlns:a16="http://schemas.microsoft.com/office/drawing/2014/main" id="{E2589F46-9087-4D5C-87AB-7AB0D3A6C3DB}"/>
               </a:ext>
             </a:extLst>
           </p:cNvPr>
@@ -14045,32 +13848,27 @@
         </p:nvSpPr>
         <p:spPr>
           <a:xfrm>
-            <a:off x="455613" y="308848"/>
-            <a:ext cx="8229600" cy="379883"/>
+            <a:off x="454025" y="202041"/>
+            <a:ext cx="8229600" cy="380651"/>
           </a:xfrm>
         </p:spPr>
         <p:txBody>
           <a:bodyPr/>
           <a:lstStyle/>
           <a:p>
-            <a:pPr>
-              <a:spcBef>
-                <a:spcPts val="600"/>
-              </a:spcBef>
-            </a:pPr>
-            <a:r>
-              <a:rPr lang="en-US" sz="3600" dirty="0"/>
-              <a:t>Webserver – handle the client</a:t>
+            <a:r>
+              <a:rPr lang="en-US" dirty="0"/>
+              <a:t>How does it looks…</a:t>
             </a:r>
           </a:p>
         </p:txBody>
       </p:sp>
       <p:pic>
         <p:nvPicPr>
-          <p:cNvPr id="5" name="Picture 4">
+          <p:cNvPr id="6" name="Picture 5">
             <a:extLst>
               <a:ext uri="{FF2B5EF4-FFF2-40B4-BE49-F238E27FC236}">
-                <a16:creationId xmlns:a16="http://schemas.microsoft.com/office/drawing/2014/main" id="{D03C19B6-A71E-4097-BF97-64AF78C3C9DD}"/>
+                <a16:creationId xmlns:a16="http://schemas.microsoft.com/office/drawing/2014/main" id="{8DD4EEEE-F122-487D-B84A-7590AE455063}"/>
               </a:ext>
             </a:extLst>
           </p:cNvPr>
@@ -14087,50 +13885,30 @@
         </p:blipFill>
         <p:spPr>
           <a:xfrm>
-            <a:off x="487081" y="879747"/>
-            <a:ext cx="1949550" cy="241312"/>
+            <a:off x="4673975" y="801948"/>
+            <a:ext cx="1655873" cy="3539601"/>
           </a:xfrm>
           <a:prstGeom prst="rect">
             <a:avLst/>
           </a:prstGeom>
-          <a:solidFill>
-            <a:srgbClr val="FFFFFF">
-              <a:shade val="85000"/>
-            </a:srgbClr>
-          </a:solidFill>
-          <a:ln w="88900" cap="sq">
-            <a:solidFill>
-              <a:srgbClr val="FFFFFF"/>
-            </a:solidFill>
-            <a:miter lim="800000"/>
+          <a:ln>
+            <a:noFill/>
           </a:ln>
           <a:effectLst>
-            <a:outerShdw blurRad="55000" dist="18000" dir="5400000" algn="tl" rotWithShape="0">
-              <a:srgbClr val="000000">
-                <a:alpha val="40000"/>
+            <a:outerShdw blurRad="292100" dist="139700" dir="2700000" algn="tl" rotWithShape="0">
+              <a:srgbClr val="333333">
+                <a:alpha val="65000"/>
               </a:srgbClr>
             </a:outerShdw>
           </a:effectLst>
-          <a:scene3d>
-            <a:camera prst="orthographicFront"/>
-            <a:lightRig rig="twoPt" dir="t">
-              <a:rot lat="0" lon="0" rev="7200000"/>
-            </a:lightRig>
-          </a:scene3d>
-          <a:sp3d>
-            <a:bevelT w="25400" h="19050"/>
-            <a:contourClr>
-              <a:srgbClr val="FFFFFF"/>
-            </a:contourClr>
-          </a:sp3d>
         </p:spPr>
       </p:pic>
       <p:pic>
         <p:nvPicPr>
-          <p:cNvPr id="6" name="Picture 5">
+          <p:cNvPr id="7" name="Picture 6">
             <a:extLst>
               <a:ext uri="{FF2B5EF4-FFF2-40B4-BE49-F238E27FC236}">
-                <a16:creationId xmlns:a16="http://schemas.microsoft.com/office/drawing/2014/main" id="{617F0D4F-6A5A-4A04-8C9C-998BE6414510}"/>
+                <a16:creationId xmlns:a16="http://schemas.microsoft.com/office/drawing/2014/main" id="{8E4A0632-2833-4A40-A154-B560E1A43420}"/>
               </a:ext>
             </a:extLst>
           </p:cNvPr>
@@ -14147,48 +13925,409 @@
         </p:blipFill>
         <p:spPr>
           <a:xfrm>
-            <a:off x="2820140" y="1121059"/>
-            <a:ext cx="3205292" cy="3484212"/>
+            <a:off x="391637" y="801948"/>
+            <a:ext cx="1648931" cy="3539601"/>
           </a:xfrm>
           <a:prstGeom prst="rect">
             <a:avLst/>
           </a:prstGeom>
-          <a:solidFill>
-            <a:srgbClr val="FFFFFF">
-              <a:shade val="85000"/>
-            </a:srgbClr>
-          </a:solidFill>
-          <a:ln w="88900" cap="sq">
-            <a:solidFill>
-              <a:srgbClr val="FFFFFF"/>
-            </a:solidFill>
-            <a:miter lim="800000"/>
+          <a:ln>
+            <a:noFill/>
           </a:ln>
           <a:effectLst>
-            <a:outerShdw blurRad="55000" dist="18000" dir="5400000" algn="tl" rotWithShape="0">
-              <a:srgbClr val="000000">
-                <a:alpha val="40000"/>
+            <a:outerShdw blurRad="292100" dist="139700" dir="2700000" algn="tl" rotWithShape="0">
+              <a:srgbClr val="333333">
+                <a:alpha val="65000"/>
               </a:srgbClr>
             </a:outerShdw>
           </a:effectLst>
-          <a:scene3d>
-            <a:camera prst="orthographicFront"/>
-            <a:lightRig rig="twoPt" dir="t">
-              <a:rot lat="0" lon="0" rev="7200000"/>
-            </a:lightRig>
-          </a:scene3d>
-          <a:sp3d>
-            <a:bevelT w="25400" h="19050"/>
-            <a:contourClr>
-              <a:srgbClr val="FFFFFF"/>
-            </a:contourClr>
-          </a:sp3d>
         </p:spPr>
       </p:pic>
+      <p:pic>
+        <p:nvPicPr>
+          <p:cNvPr id="8" name="Picture 7">
+            <a:extLst>
+              <a:ext uri="{FF2B5EF4-FFF2-40B4-BE49-F238E27FC236}">
+                <a16:creationId xmlns:a16="http://schemas.microsoft.com/office/drawing/2014/main" id="{1563C456-643B-4665-807C-AF40417EE4D1}"/>
+              </a:ext>
+            </a:extLst>
+          </p:cNvPr>
+          <p:cNvPicPr>
+            <a:picLocks noChangeAspect="1"/>
+          </p:cNvPicPr>
+          <p:nvPr/>
+        </p:nvPicPr>
+        <p:blipFill>
+          <a:blip r:embed="rId4"/>
+          <a:stretch>
+            <a:fillRect/>
+          </a:stretch>
+        </p:blipFill>
+        <p:spPr>
+          <a:xfrm>
+            <a:off x="2532806" y="801948"/>
+            <a:ext cx="1648931" cy="3535387"/>
+          </a:xfrm>
+          <a:prstGeom prst="rect">
+            <a:avLst/>
+          </a:prstGeom>
+          <a:ln>
+            <a:noFill/>
+          </a:ln>
+          <a:effectLst>
+            <a:outerShdw blurRad="292100" dist="139700" dir="2700000" algn="tl" rotWithShape="0">
+              <a:srgbClr val="333333">
+                <a:alpha val="65000"/>
+              </a:srgbClr>
+            </a:outerShdw>
+          </a:effectLst>
+        </p:spPr>
+      </p:pic>
+      <p:pic>
+        <p:nvPicPr>
+          <p:cNvPr id="9" name="Picture 8">
+            <a:extLst>
+              <a:ext uri="{FF2B5EF4-FFF2-40B4-BE49-F238E27FC236}">
+                <a16:creationId xmlns:a16="http://schemas.microsoft.com/office/drawing/2014/main" id="{8A2EBB5C-00C7-4A0E-8CF2-02604A2EE57E}"/>
+              </a:ext>
+            </a:extLst>
+          </p:cNvPr>
+          <p:cNvPicPr>
+            <a:picLocks noChangeAspect="1"/>
+          </p:cNvPicPr>
+          <p:nvPr/>
+        </p:nvPicPr>
+        <p:blipFill>
+          <a:blip r:embed="rId5"/>
+          <a:stretch>
+            <a:fillRect/>
+          </a:stretch>
+        </p:blipFill>
+        <p:spPr>
+          <a:xfrm>
+            <a:off x="6554254" y="1177675"/>
+            <a:ext cx="2348586" cy="2172166"/>
+          </a:xfrm>
+          <a:prstGeom prst="rect">
+            <a:avLst/>
+          </a:prstGeom>
+          <a:ln>
+            <a:noFill/>
+          </a:ln>
+          <a:effectLst>
+            <a:outerShdw blurRad="292100" dist="139700" dir="2700000" algn="tl" rotWithShape="0">
+              <a:srgbClr val="333333">
+                <a:alpha val="65000"/>
+              </a:srgbClr>
+            </a:outerShdw>
+          </a:effectLst>
+        </p:spPr>
+      </p:pic>
+      <p:cxnSp>
+        <p:nvCxnSpPr>
+          <p:cNvPr id="11" name="Straight Arrow Connector 10">
+            <a:extLst>
+              <a:ext uri="{FF2B5EF4-FFF2-40B4-BE49-F238E27FC236}">
+                <a16:creationId xmlns:a16="http://schemas.microsoft.com/office/drawing/2014/main" id="{1E243132-4924-40D1-8FBE-B91012733E9F}"/>
+              </a:ext>
+            </a:extLst>
+          </p:cNvPr>
+          <p:cNvCxnSpPr/>
+          <p:nvPr/>
+        </p:nvCxnSpPr>
+        <p:spPr>
+          <a:xfrm flipV="1">
+            <a:off x="1559511" y="1592062"/>
+            <a:ext cx="855215" cy="399495"/>
+          </a:xfrm>
+          <a:prstGeom prst="straightConnector1">
+            <a:avLst/>
+          </a:prstGeom>
+          <a:ln>
+            <a:solidFill>
+              <a:schemeClr val="tx2"/>
+            </a:solidFill>
+            <a:tailEnd type="triangle"/>
+          </a:ln>
+          <a:effectLst/>
+        </p:spPr>
+        <p:style>
+          <a:lnRef idx="2">
+            <a:schemeClr val="accent1"/>
+          </a:lnRef>
+          <a:fillRef idx="0">
+            <a:schemeClr val="accent1"/>
+          </a:fillRef>
+          <a:effectRef idx="1">
+            <a:schemeClr val="accent1"/>
+          </a:effectRef>
+          <a:fontRef idx="minor">
+            <a:schemeClr val="tx1"/>
+          </a:fontRef>
+        </p:style>
+      </p:cxnSp>
+      <p:cxnSp>
+        <p:nvCxnSpPr>
+          <p:cNvPr id="13" name="Straight Arrow Connector 12">
+            <a:extLst>
+              <a:ext uri="{FF2B5EF4-FFF2-40B4-BE49-F238E27FC236}">
+                <a16:creationId xmlns:a16="http://schemas.microsoft.com/office/drawing/2014/main" id="{8878AC90-4FB9-49D6-9591-5B5601A7A0B6}"/>
+              </a:ext>
+            </a:extLst>
+          </p:cNvPr>
+          <p:cNvCxnSpPr/>
+          <p:nvPr/>
+        </p:nvCxnSpPr>
+        <p:spPr>
+          <a:xfrm>
+            <a:off x="1512163" y="2453196"/>
+            <a:ext cx="3083511" cy="0"/>
+          </a:xfrm>
+          <a:prstGeom prst="straightConnector1">
+            <a:avLst/>
+          </a:prstGeom>
+          <a:ln>
+            <a:solidFill>
+              <a:schemeClr val="tx2"/>
+            </a:solidFill>
+            <a:tailEnd type="triangle"/>
+          </a:ln>
+          <a:effectLst/>
+        </p:spPr>
+        <p:style>
+          <a:lnRef idx="2">
+            <a:schemeClr val="accent1"/>
+          </a:lnRef>
+          <a:fillRef idx="0">
+            <a:schemeClr val="accent1"/>
+          </a:fillRef>
+          <a:effectRef idx="1">
+            <a:schemeClr val="accent1"/>
+          </a:effectRef>
+          <a:fontRef idx="minor">
+            <a:schemeClr val="tx1"/>
+          </a:fontRef>
+        </p:style>
+      </p:cxnSp>
+      <p:cxnSp>
+        <p:nvCxnSpPr>
+          <p:cNvPr id="15" name="Straight Arrow Connector 14">
+            <a:extLst>
+              <a:ext uri="{FF2B5EF4-FFF2-40B4-BE49-F238E27FC236}">
+                <a16:creationId xmlns:a16="http://schemas.microsoft.com/office/drawing/2014/main" id="{1932FE31-5EFE-44B5-99F7-6A1AF8BC90BF}"/>
+              </a:ext>
+            </a:extLst>
+          </p:cNvPr>
+          <p:cNvCxnSpPr/>
+          <p:nvPr/>
+        </p:nvCxnSpPr>
+        <p:spPr>
+          <a:xfrm flipV="1">
+            <a:off x="5959876" y="1814004"/>
+            <a:ext cx="547456" cy="547456"/>
+          </a:xfrm>
+          <a:prstGeom prst="straightConnector1">
+            <a:avLst/>
+          </a:prstGeom>
+          <a:ln>
+            <a:solidFill>
+              <a:schemeClr val="tx2"/>
+            </a:solidFill>
+            <a:tailEnd type="triangle"/>
+          </a:ln>
+          <a:effectLst/>
+        </p:spPr>
+        <p:style>
+          <a:lnRef idx="2">
+            <a:schemeClr val="accent1"/>
+          </a:lnRef>
+          <a:fillRef idx="0">
+            <a:schemeClr val="accent1"/>
+          </a:fillRef>
+          <a:effectRef idx="1">
+            <a:schemeClr val="accent1"/>
+          </a:effectRef>
+          <a:fontRef idx="minor">
+            <a:schemeClr val="tx1"/>
+          </a:fontRef>
+        </p:style>
+      </p:cxnSp>
+      <p:cxnSp>
+        <p:nvCxnSpPr>
+          <p:cNvPr id="17" name="Straight Arrow Connector 16">
+            <a:extLst>
+              <a:ext uri="{FF2B5EF4-FFF2-40B4-BE49-F238E27FC236}">
+                <a16:creationId xmlns:a16="http://schemas.microsoft.com/office/drawing/2014/main" id="{2D075E91-5C13-4E5C-AC87-0FD80B8C858E}"/>
+              </a:ext>
+            </a:extLst>
+          </p:cNvPr>
+          <p:cNvCxnSpPr/>
+          <p:nvPr/>
+        </p:nvCxnSpPr>
+        <p:spPr>
+          <a:xfrm flipH="1">
+            <a:off x="2089212" y="2024109"/>
+            <a:ext cx="1050524" cy="183472"/>
+          </a:xfrm>
+          <a:prstGeom prst="straightConnector1">
+            <a:avLst/>
+          </a:prstGeom>
+          <a:ln>
+            <a:solidFill>
+              <a:schemeClr val="tx2"/>
+            </a:solidFill>
+            <a:tailEnd type="triangle"/>
+          </a:ln>
+          <a:effectLst/>
+        </p:spPr>
+        <p:style>
+          <a:lnRef idx="2">
+            <a:schemeClr val="accent1"/>
+          </a:lnRef>
+          <a:fillRef idx="0">
+            <a:schemeClr val="accent1"/>
+          </a:fillRef>
+          <a:effectRef idx="1">
+            <a:schemeClr val="accent1"/>
+          </a:effectRef>
+          <a:fontRef idx="minor">
+            <a:schemeClr val="tx1"/>
+          </a:fontRef>
+        </p:style>
+      </p:cxnSp>
+      <p:cxnSp>
+        <p:nvCxnSpPr>
+          <p:cNvPr id="19" name="Straight Arrow Connector 18">
+            <a:extLst>
+              <a:ext uri="{FF2B5EF4-FFF2-40B4-BE49-F238E27FC236}">
+                <a16:creationId xmlns:a16="http://schemas.microsoft.com/office/drawing/2014/main" id="{B009A4EE-7A25-4B30-8156-053F768DD953}"/>
+              </a:ext>
+            </a:extLst>
+          </p:cNvPr>
+          <p:cNvCxnSpPr/>
+          <p:nvPr/>
+        </p:nvCxnSpPr>
+        <p:spPr>
+          <a:xfrm flipH="1" flipV="1">
+            <a:off x="2089212" y="2805344"/>
+            <a:ext cx="3086470" cy="630314"/>
+          </a:xfrm>
+          <a:prstGeom prst="straightConnector1">
+            <a:avLst/>
+          </a:prstGeom>
+          <a:ln>
+            <a:solidFill>
+              <a:schemeClr val="tx2"/>
+            </a:solidFill>
+            <a:tailEnd type="triangle"/>
+          </a:ln>
+          <a:effectLst/>
+        </p:spPr>
+        <p:style>
+          <a:lnRef idx="2">
+            <a:schemeClr val="accent1"/>
+          </a:lnRef>
+          <a:fillRef idx="0">
+            <a:schemeClr val="accent1"/>
+          </a:fillRef>
+          <a:effectRef idx="1">
+            <a:schemeClr val="accent1"/>
+          </a:effectRef>
+          <a:fontRef idx="minor">
+            <a:schemeClr val="tx1"/>
+          </a:fontRef>
+        </p:style>
+      </p:cxnSp>
+      <p:cxnSp>
+        <p:nvCxnSpPr>
+          <p:cNvPr id="21" name="Straight Arrow Connector 20">
+            <a:extLst>
+              <a:ext uri="{FF2B5EF4-FFF2-40B4-BE49-F238E27FC236}">
+                <a16:creationId xmlns:a16="http://schemas.microsoft.com/office/drawing/2014/main" id="{923DC895-548F-4E38-9DA0-EC2C94AE735F}"/>
+              </a:ext>
+            </a:extLst>
+          </p:cNvPr>
+          <p:cNvCxnSpPr/>
+          <p:nvPr/>
+        </p:nvCxnSpPr>
+        <p:spPr>
+          <a:xfrm flipV="1">
+            <a:off x="5785282" y="1775534"/>
+            <a:ext cx="677662" cy="216023"/>
+          </a:xfrm>
+          <a:prstGeom prst="straightConnector1">
+            <a:avLst/>
+          </a:prstGeom>
+          <a:ln>
+            <a:solidFill>
+              <a:schemeClr val="tx2"/>
+            </a:solidFill>
+            <a:tailEnd type="triangle"/>
+          </a:ln>
+          <a:effectLst/>
+        </p:spPr>
+        <p:style>
+          <a:lnRef idx="2">
+            <a:schemeClr val="accent1"/>
+          </a:lnRef>
+          <a:fillRef idx="0">
+            <a:schemeClr val="accent1"/>
+          </a:fillRef>
+          <a:effectRef idx="1">
+            <a:schemeClr val="accent1"/>
+          </a:effectRef>
+          <a:fontRef idx="minor">
+            <a:schemeClr val="tx1"/>
+          </a:fontRef>
+        </p:style>
+      </p:cxnSp>
+      <p:cxnSp>
+        <p:nvCxnSpPr>
+          <p:cNvPr id="23" name="Straight Arrow Connector 22">
+            <a:extLst>
+              <a:ext uri="{FF2B5EF4-FFF2-40B4-BE49-F238E27FC236}">
+                <a16:creationId xmlns:a16="http://schemas.microsoft.com/office/drawing/2014/main" id="{CD4B4DAD-96B4-4A34-892D-67213CE60CF1}"/>
+              </a:ext>
+            </a:extLst>
+          </p:cNvPr>
+          <p:cNvCxnSpPr/>
+          <p:nvPr/>
+        </p:nvCxnSpPr>
+        <p:spPr>
+          <a:xfrm flipV="1">
+            <a:off x="5779363" y="1991557"/>
+            <a:ext cx="683581" cy="1068280"/>
+          </a:xfrm>
+          <a:prstGeom prst="straightConnector1">
+            <a:avLst/>
+          </a:prstGeom>
+          <a:ln>
+            <a:solidFill>
+              <a:schemeClr val="tx2"/>
+            </a:solidFill>
+            <a:tailEnd type="triangle"/>
+          </a:ln>
+          <a:effectLst/>
+        </p:spPr>
+        <p:style>
+          <a:lnRef idx="2">
+            <a:schemeClr val="accent1"/>
+          </a:lnRef>
+          <a:fillRef idx="0">
+            <a:schemeClr val="accent1"/>
+          </a:fillRef>
+          <a:effectRef idx="1">
+            <a:schemeClr val="accent1"/>
+          </a:effectRef>
+          <a:fontRef idx="minor">
+            <a:schemeClr val="tx1"/>
+          </a:fontRef>
+        </p:style>
+      </p:cxnSp>
     </p:spTree>
     <p:extLst>
       <p:ext uri="{BB962C8B-B14F-4D97-AF65-F5344CB8AC3E}">
-        <p14:creationId xmlns:p14="http://schemas.microsoft.com/office/powerpoint/2010/main" val="1516356890"/>
+        <p14:creationId xmlns:p14="http://schemas.microsoft.com/office/powerpoint/2010/main" val="2896346666"/>
       </p:ext>
     </p:extLst>
   </p:cSld>
@@ -14290,7 +14429,7 @@
             </a:pPr>
             <a:r>
               <a:rPr lang="en-US" sz="3600" dirty="0"/>
-              <a:t>Webserver – processing incoming data</a:t>
+              <a:t>Webserver – handle the client</a:t>
             </a:r>
           </a:p>
         </p:txBody>
@@ -14300,7 +14439,7 @@
           <p:cNvPr id="5" name="Picture 4">
             <a:extLst>
               <a:ext uri="{FF2B5EF4-FFF2-40B4-BE49-F238E27FC236}">
-                <a16:creationId xmlns:a16="http://schemas.microsoft.com/office/drawing/2014/main" id="{43B6518C-35FA-488C-A62F-6D7373906BFD}"/>
+                <a16:creationId xmlns:a16="http://schemas.microsoft.com/office/drawing/2014/main" id="{D03C19B6-A71E-4097-BF97-64AF78C3C9DD}"/>
               </a:ext>
             </a:extLst>
           </p:cNvPr>
@@ -14317,28 +14456,108 @@
         </p:blipFill>
         <p:spPr>
           <a:xfrm>
-            <a:off x="476435" y="842490"/>
-            <a:ext cx="5042609" cy="3662021"/>
+            <a:off x="487081" y="879747"/>
+            <a:ext cx="1949550" cy="241312"/>
           </a:xfrm>
           <a:prstGeom prst="rect">
             <a:avLst/>
           </a:prstGeom>
-          <a:ln>
-            <a:noFill/>
+          <a:solidFill>
+            <a:srgbClr val="FFFFFF">
+              <a:shade val="85000"/>
+            </a:srgbClr>
+          </a:solidFill>
+          <a:ln w="88900" cap="sq">
+            <a:solidFill>
+              <a:srgbClr val="FFFFFF"/>
+            </a:solidFill>
+            <a:miter lim="800000"/>
           </a:ln>
           <a:effectLst>
-            <a:outerShdw blurRad="292100" dist="139700" dir="2700000" algn="tl" rotWithShape="0">
-              <a:srgbClr val="333333">
-                <a:alpha val="65000"/>
+            <a:outerShdw blurRad="55000" dist="18000" dir="5400000" algn="tl" rotWithShape="0">
+              <a:srgbClr val="000000">
+                <a:alpha val="40000"/>
               </a:srgbClr>
             </a:outerShdw>
           </a:effectLst>
+          <a:scene3d>
+            <a:camera prst="orthographicFront"/>
+            <a:lightRig rig="twoPt" dir="t">
+              <a:rot lat="0" lon="0" rev="7200000"/>
+            </a:lightRig>
+          </a:scene3d>
+          <a:sp3d>
+            <a:bevelT w="25400" h="19050"/>
+            <a:contourClr>
+              <a:srgbClr val="FFFFFF"/>
+            </a:contourClr>
+          </a:sp3d>
+        </p:spPr>
+      </p:pic>
+      <p:pic>
+        <p:nvPicPr>
+          <p:cNvPr id="6" name="Picture 5">
+            <a:extLst>
+              <a:ext uri="{FF2B5EF4-FFF2-40B4-BE49-F238E27FC236}">
+                <a16:creationId xmlns:a16="http://schemas.microsoft.com/office/drawing/2014/main" id="{617F0D4F-6A5A-4A04-8C9C-998BE6414510}"/>
+              </a:ext>
+            </a:extLst>
+          </p:cNvPr>
+          <p:cNvPicPr>
+            <a:picLocks noChangeAspect="1"/>
+          </p:cNvPicPr>
+          <p:nvPr/>
+        </p:nvPicPr>
+        <p:blipFill>
+          <a:blip r:embed="rId3"/>
+          <a:stretch>
+            <a:fillRect/>
+          </a:stretch>
+        </p:blipFill>
+        <p:spPr>
+          <a:xfrm>
+            <a:off x="2820140" y="1121059"/>
+            <a:ext cx="3205292" cy="3484212"/>
+          </a:xfrm>
+          <a:prstGeom prst="rect">
+            <a:avLst/>
+          </a:prstGeom>
+          <a:solidFill>
+            <a:srgbClr val="FFFFFF">
+              <a:shade val="85000"/>
+            </a:srgbClr>
+          </a:solidFill>
+          <a:ln w="88900" cap="sq">
+            <a:solidFill>
+              <a:srgbClr val="FFFFFF"/>
+            </a:solidFill>
+            <a:miter lim="800000"/>
+          </a:ln>
+          <a:effectLst>
+            <a:outerShdw blurRad="55000" dist="18000" dir="5400000" algn="tl" rotWithShape="0">
+              <a:srgbClr val="000000">
+                <a:alpha val="40000"/>
+              </a:srgbClr>
+            </a:outerShdw>
+          </a:effectLst>
+          <a:scene3d>
+            <a:camera prst="orthographicFront"/>
+            <a:lightRig rig="twoPt" dir="t">
+              <a:rot lat="0" lon="0" rev="7200000"/>
+            </a:lightRig>
+          </a:scene3d>
+          <a:sp3d>
+            <a:bevelT w="25400" h="19050"/>
+            <a:contourClr>
+              <a:srgbClr val="FFFFFF"/>
+            </a:contourClr>
+          </a:sp3d>
         </p:spPr>
       </p:pic>
     </p:spTree>
     <p:extLst>
       <p:ext uri="{BB962C8B-B14F-4D97-AF65-F5344CB8AC3E}">
-        <p14:creationId xmlns:p14="http://schemas.microsoft.com/office/powerpoint/2010/main" val="1478037567"/>
+        <p14:creationId xmlns:p14="http://schemas.microsoft.com/office/powerpoint/2010/main" val="1516356890"/>
       </p:ext>
     </p:extLst>
   </p:cSld>
@@ -14382,7 +14601,7 @@
           <p:cNvPr id="2" name="Slide Number Placeholder 1">
             <a:extLst>
               <a:ext uri="{FF2B5EF4-FFF2-40B4-BE49-F238E27FC236}">
-                <a16:creationId xmlns:a16="http://schemas.microsoft.com/office/drawing/2014/main" id="{3A593B7C-E8D2-4B46-B78A-999B8BAA3EAA}"/>
+                <a16:creationId xmlns:a16="http://schemas.microsoft.com/office/drawing/2014/main" id="{17744C99-9A24-4D6F-8D3C-A4CB41E876CA}"/>
               </a:ext>
             </a:extLst>
           </p:cNvPr>
@@ -14412,7 +14631,7 @@
           <p:cNvPr id="3" name="Title 2">
             <a:extLst>
               <a:ext uri="{FF2B5EF4-FFF2-40B4-BE49-F238E27FC236}">
-                <a16:creationId xmlns:a16="http://schemas.microsoft.com/office/drawing/2014/main" id="{00DA84AE-279B-4C0A-A00C-BC68F43ED32C}"/>
+                <a16:creationId xmlns:a16="http://schemas.microsoft.com/office/drawing/2014/main" id="{DFCD3F10-262A-49AA-92F3-A28E2073C0CF}"/>
               </a:ext>
             </a:extLst>
           </p:cNvPr>
@@ -14426,187 +14645,22 @@
         <p:spPr>
           <a:xfrm>
             <a:off x="455613" y="308848"/>
-            <a:ext cx="8229600" cy="374733"/>
+            <a:ext cx="8229600" cy="379883"/>
           </a:xfrm>
         </p:spPr>
         <p:txBody>
           <a:bodyPr/>
           <a:lstStyle/>
           <a:p>
-            <a:r>
-              <a:rPr lang="en-US" dirty="0"/>
-              <a:t>Multicast DNS</a:t>
-            </a:r>
-          </a:p>
-        </p:txBody>
-      </p:sp>
-      <p:sp>
-        <p:nvSpPr>
-          <p:cNvPr id="4" name="Content Placeholder 3">
-            <a:extLst>
-              <a:ext uri="{FF2B5EF4-FFF2-40B4-BE49-F238E27FC236}">
-                <a16:creationId xmlns:a16="http://schemas.microsoft.com/office/drawing/2014/main" id="{1298216D-561B-4FF6-8D04-24AA74CC1B6F}"/>
-              </a:ext>
-            </a:extLst>
-          </p:cNvPr>
-          <p:cNvSpPr>
-            <a:spLocks noGrp="1"/>
-          </p:cNvSpPr>
-          <p:nvPr>
-            <p:ph sz="quarter" idx="13"/>
-          </p:nvPr>
-        </p:nvSpPr>
-        <p:spPr>
-          <a:xfrm>
-            <a:off x="455613" y="730929"/>
-            <a:ext cx="8228012" cy="3898222"/>
-          </a:xfrm>
-        </p:spPr>
-        <p:txBody>
-          <a:bodyPr/>
-          <a:lstStyle/>
-          <a:p>
-            <a:pPr marL="285750" indent="-285750">
-              <a:buFont typeface="Arial" panose="020B0604020202020204" pitchFamily="34" charset="0"/>
-              <a:buChar char="•"/>
+            <a:pPr>
+              <a:spcBef>
+                <a:spcPts val="600"/>
+              </a:spcBef>
             </a:pPr>
             <a:r>
-              <a:rPr lang="en-US" b="1" dirty="0"/>
-              <a:t>Domain Name System</a:t>
-            </a:r>
-          </a:p>
-          <a:p>
-            <a:pPr marL="285750" indent="-285750">
-              <a:buFont typeface="Arial" panose="020B0604020202020204" pitchFamily="34" charset="0"/>
-              <a:buChar char="•"/>
-            </a:pPr>
-            <a:r>
-              <a:rPr lang="en-US" b="1" dirty="0"/>
-              <a:t>MDNS – Is a zero-configuration service</a:t>
-            </a:r>
-          </a:p>
-          <a:p>
-            <a:pPr marL="285750" indent="-285750">
-              <a:buFont typeface="Arial" panose="020B0604020202020204" pitchFamily="34" charset="0"/>
-              <a:buChar char="•"/>
-            </a:pPr>
-            <a:r>
-              <a:rPr lang="en-US" b="1" dirty="0"/>
-              <a:t>Enables usage of names instead of IP address</a:t>
-            </a:r>
-          </a:p>
-          <a:p>
-            <a:pPr marL="285750" indent="-285750">
-              <a:buFont typeface="Arial" panose="020B0604020202020204" pitchFamily="34" charset="0"/>
-              <a:buChar char="•"/>
-            </a:pPr>
-            <a:r>
-              <a:rPr lang="en-US" b="1" dirty="0"/>
-              <a:t>Our ESP32 runs Multicast DNS (MDNS)</a:t>
-            </a:r>
-          </a:p>
-          <a:p>
-            <a:pPr marL="285750" indent="-285750">
-              <a:buFont typeface="Arial" panose="020B0604020202020204" pitchFamily="34" charset="0"/>
-              <a:buChar char="•"/>
-            </a:pPr>
-            <a:r>
-              <a:rPr lang="en-US" b="1" dirty="0"/>
-              <a:t>Windows and Apple devices can work with MDNS</a:t>
-            </a:r>
-          </a:p>
-          <a:p>
-            <a:pPr marL="285750" indent="-285750">
-              <a:buFont typeface="Arial" panose="020B0604020202020204" pitchFamily="34" charset="0"/>
-              <a:buChar char="•"/>
-            </a:pPr>
-            <a:r>
-              <a:rPr lang="en-US" b="1" dirty="0"/>
-              <a:t>Sadly Android does not </a:t>
-            </a:r>
-            <a:r>
-              <a:rPr lang="en-US" b="1" dirty="0">
-                <a:sym typeface="Wingdings" panose="05000000000000000000" pitchFamily="2" charset="2"/>
-              </a:rPr>
-              <a:t></a:t>
-            </a:r>
-          </a:p>
-          <a:p>
-            <a:pPr marL="285750" indent="-285750">
-              <a:buFont typeface="Arial" panose="020B0604020202020204" pitchFamily="34" charset="0"/>
-              <a:buChar char="•"/>
-            </a:pPr>
-            <a:r>
-              <a:rPr lang="en-US" b="1" dirty="0">
-                <a:sym typeface="Wingdings" panose="05000000000000000000" pitchFamily="2" charset="2"/>
-              </a:rPr>
-              <a:t>Usage:</a:t>
-            </a:r>
-          </a:p>
-          <a:p>
-            <a:pPr marL="511175" lvl="1" indent="-285750">
-              <a:buFont typeface="Arial" panose="020B0604020202020204" pitchFamily="34" charset="0"/>
-              <a:buChar char="•"/>
-            </a:pPr>
-            <a:r>
-              <a:rPr lang="en-US" b="1" dirty="0">
-                <a:sym typeface="Wingdings" panose="05000000000000000000" pitchFamily="2" charset="2"/>
-                <a:hlinkClick r:id="rId2"/>
-              </a:rPr>
-              <a:t>http://esp32</a:t>
-            </a:r>
-            <a:r>
-              <a:rPr lang="en-US" b="1" dirty="0">
-                <a:highlight>
-                  <a:srgbClr val="FFFF00"/>
-                </a:highlight>
-                <a:sym typeface="Wingdings" panose="05000000000000000000" pitchFamily="2" charset="2"/>
-                <a:hlinkClick r:id="rId2"/>
-              </a:rPr>
-              <a:t>.local</a:t>
-            </a:r>
-            <a:r>
-              <a:rPr lang="en-US" b="1" dirty="0">
-                <a:sym typeface="Wingdings" panose="05000000000000000000" pitchFamily="2" charset="2"/>
-                <a:hlinkClick r:id="rId2"/>
-              </a:rPr>
-              <a:t>/</a:t>
-            </a:r>
-            <a:endParaRPr lang="en-US" b="1" dirty="0">
-              <a:sym typeface="Wingdings" panose="05000000000000000000" pitchFamily="2" charset="2"/>
-            </a:endParaRPr>
-          </a:p>
-          <a:p>
-            <a:pPr marL="511175" lvl="1" indent="-285750">
-              <a:buFont typeface="Arial" panose="020B0604020202020204" pitchFamily="34" charset="0"/>
-              <a:buChar char="•"/>
-            </a:pPr>
-            <a:r>
-              <a:rPr lang="en-US" b="1" dirty="0">
-                <a:sym typeface="Wingdings" panose="05000000000000000000" pitchFamily="2" charset="2"/>
-              </a:rPr>
-              <a:t>No MDNS support - </a:t>
-            </a:r>
-            <a:r>
-              <a:rPr lang="en-US" b="1" dirty="0">
-                <a:sym typeface="Wingdings" panose="05000000000000000000" pitchFamily="2" charset="2"/>
-                <a:hlinkClick r:id="rId3"/>
-              </a:rPr>
-              <a:t>http://192.168.14.1/</a:t>
-            </a:r>
-            <a:r>
-              <a:rPr lang="en-US" b="1" dirty="0">
-                <a:sym typeface="Wingdings" panose="05000000000000000000" pitchFamily="2" charset="2"/>
-              </a:rPr>
-              <a:t> (just an example IP)</a:t>
-            </a:r>
-          </a:p>
-          <a:p>
-            <a:pPr marL="511175" lvl="1" indent="-285750">
-              <a:buFont typeface="Arial" panose="020B0604020202020204" pitchFamily="34" charset="0"/>
-              <a:buChar char="•"/>
-            </a:pPr>
-            <a:endParaRPr lang="en-US" dirty="0"/>
+              <a:rPr lang="en-US" sz="3600" dirty="0"/>
+              <a:t>Webserver – processing incoming data</a:t>
+            </a:r>
           </a:p>
         </p:txBody>
       </p:sp>
@@ -14615,7 +14669,7 @@
           <p:cNvPr id="5" name="Picture 4">
             <a:extLst>
               <a:ext uri="{FF2B5EF4-FFF2-40B4-BE49-F238E27FC236}">
-                <a16:creationId xmlns:a16="http://schemas.microsoft.com/office/drawing/2014/main" id="{24E19BFC-531D-4A69-AB7A-52BD42626B4B}"/>
+                <a16:creationId xmlns:a16="http://schemas.microsoft.com/office/drawing/2014/main" id="{43B6518C-35FA-488C-A62F-6D7373906BFD}"/>
               </a:ext>
             </a:extLst>
           </p:cNvPr>
@@ -14625,15 +14679,15 @@
           <p:nvPr/>
         </p:nvPicPr>
         <p:blipFill>
-          <a:blip r:embed="rId4"/>
+          <a:blip r:embed="rId2"/>
           <a:stretch>
             <a:fillRect/>
           </a:stretch>
         </p:blipFill>
         <p:spPr>
           <a:xfrm>
-            <a:off x="4158866" y="2680040"/>
-            <a:ext cx="4134062" cy="1441524"/>
+            <a:off x="476435" y="842490"/>
+            <a:ext cx="5042609" cy="3662021"/>
           </a:xfrm>
           <a:prstGeom prst="rect">
             <a:avLst/>
@@ -14653,7 +14707,7 @@
     </p:spTree>
     <p:extLst>
       <p:ext uri="{BB962C8B-B14F-4D97-AF65-F5344CB8AC3E}">
-        <p14:creationId xmlns:p14="http://schemas.microsoft.com/office/powerpoint/2010/main" val="1548630015"/>
+        <p14:creationId xmlns:p14="http://schemas.microsoft.com/office/powerpoint/2010/main" val="1478037567"/>
       </p:ext>
     </p:extLst>
   </p:cSld>
@@ -14739,7 +14793,7 @@
           <p:cNvPr id="2" name="Slide Number Placeholder 1">
             <a:extLst>
               <a:ext uri="{FF2B5EF4-FFF2-40B4-BE49-F238E27FC236}">
-                <a16:creationId xmlns:a16="http://schemas.microsoft.com/office/drawing/2014/main" id="{B1FF6DCD-B39F-48CD-83C3-B2F86A1E1258}"/>
+                <a16:creationId xmlns:a16="http://schemas.microsoft.com/office/drawing/2014/main" id="{3A593B7C-E8D2-4B46-B78A-999B8BAA3EAA}"/>
               </a:ext>
             </a:extLst>
           </p:cNvPr>
@@ -14769,7 +14823,7 @@
           <p:cNvPr id="3" name="Title 2">
             <a:extLst>
               <a:ext uri="{FF2B5EF4-FFF2-40B4-BE49-F238E27FC236}">
-                <a16:creationId xmlns:a16="http://schemas.microsoft.com/office/drawing/2014/main" id="{479C472F-5734-47D5-8B13-8377293992A0}"/>
+                <a16:creationId xmlns:a16="http://schemas.microsoft.com/office/drawing/2014/main" id="{00DA84AE-279B-4C0A-A00C-BC68F43ED32C}"/>
               </a:ext>
             </a:extLst>
           </p:cNvPr>
@@ -14782,8 +14836,8 @@
         </p:nvSpPr>
         <p:spPr>
           <a:xfrm>
-            <a:off x="457200" y="143748"/>
-            <a:ext cx="8229600" cy="370602"/>
+            <a:off x="455613" y="308848"/>
+            <a:ext cx="8229600" cy="374733"/>
           </a:xfrm>
         </p:spPr>
         <p:txBody>
@@ -14792,92 +14846,187 @@
           <a:p>
             <a:r>
               <a:rPr lang="en-US" dirty="0"/>
-              <a:t>No </a:t>
-            </a:r>
-            <a:r>
-              <a:rPr lang="en-US" dirty="0" err="1"/>
-              <a:t>mdns</a:t>
-            </a:r>
-            <a:r>
-              <a:rPr lang="en-US" dirty="0"/>
-              <a:t> on Android so… (buy an iPhone </a:t>
-            </a:r>
-            <a:r>
-              <a:rPr lang="en-US" dirty="0">
+              <a:t>Multicast DNS</a:t>
+            </a:r>
+          </a:p>
+        </p:txBody>
+      </p:sp>
+      <p:sp>
+        <p:nvSpPr>
+          <p:cNvPr id="4" name="Content Placeholder 3">
+            <a:extLst>
+              <a:ext uri="{FF2B5EF4-FFF2-40B4-BE49-F238E27FC236}">
+                <a16:creationId xmlns:a16="http://schemas.microsoft.com/office/drawing/2014/main" id="{1298216D-561B-4FF6-8D04-24AA74CC1B6F}"/>
+              </a:ext>
+            </a:extLst>
+          </p:cNvPr>
+          <p:cNvSpPr>
+            <a:spLocks noGrp="1"/>
+          </p:cNvSpPr>
+          <p:nvPr>
+            <p:ph sz="quarter" idx="13"/>
+          </p:nvPr>
+        </p:nvSpPr>
+        <p:spPr>
+          <a:xfrm>
+            <a:off x="455613" y="730929"/>
+            <a:ext cx="8228012" cy="3898222"/>
+          </a:xfrm>
+        </p:spPr>
+        <p:txBody>
+          <a:bodyPr/>
+          <a:lstStyle/>
+          <a:p>
+            <a:pPr marL="285750" indent="-285750">
+              <a:buFont typeface="Arial" panose="020B0604020202020204" pitchFamily="34" charset="0"/>
+              <a:buChar char="•"/>
+            </a:pPr>
+            <a:r>
+              <a:rPr lang="en-US" b="1" dirty="0"/>
+              <a:t>Domain Name System</a:t>
+            </a:r>
+          </a:p>
+          <a:p>
+            <a:pPr marL="285750" indent="-285750">
+              <a:buFont typeface="Arial" panose="020B0604020202020204" pitchFamily="34" charset="0"/>
+              <a:buChar char="•"/>
+            </a:pPr>
+            <a:r>
+              <a:rPr lang="en-US" b="1" dirty="0"/>
+              <a:t>MDNS – Is a zero-configuration service</a:t>
+            </a:r>
+          </a:p>
+          <a:p>
+            <a:pPr marL="285750" indent="-285750">
+              <a:buFont typeface="Arial" panose="020B0604020202020204" pitchFamily="34" charset="0"/>
+              <a:buChar char="•"/>
+            </a:pPr>
+            <a:r>
+              <a:rPr lang="en-US" b="1" dirty="0"/>
+              <a:t>Enables usage of names instead of IP address</a:t>
+            </a:r>
+          </a:p>
+          <a:p>
+            <a:pPr marL="285750" indent="-285750">
+              <a:buFont typeface="Arial" panose="020B0604020202020204" pitchFamily="34" charset="0"/>
+              <a:buChar char="•"/>
+            </a:pPr>
+            <a:r>
+              <a:rPr lang="en-US" b="1" dirty="0"/>
+              <a:t>Our ESP32 runs Multicast DNS (MDNS)</a:t>
+            </a:r>
+          </a:p>
+          <a:p>
+            <a:pPr marL="285750" indent="-285750">
+              <a:buFont typeface="Arial" panose="020B0604020202020204" pitchFamily="34" charset="0"/>
+              <a:buChar char="•"/>
+            </a:pPr>
+            <a:r>
+              <a:rPr lang="en-US" b="1" dirty="0"/>
+              <a:t>Windows and Apple devices can work with MDNS</a:t>
+            </a:r>
+          </a:p>
+          <a:p>
+            <a:pPr marL="285750" indent="-285750">
+              <a:buFont typeface="Arial" panose="020B0604020202020204" pitchFamily="34" charset="0"/>
+              <a:buChar char="•"/>
+            </a:pPr>
+            <a:r>
+              <a:rPr lang="en-US" b="1" dirty="0"/>
+              <a:t>Sadly Android does not </a:t>
+            </a:r>
+            <a:r>
+              <a:rPr lang="en-US" b="1" dirty="0">
                 <a:sym typeface="Wingdings" panose="05000000000000000000" pitchFamily="2" charset="2"/>
               </a:rPr>
-              <a:t> or)</a:t>
-            </a:r>
+              <a:t></a:t>
+            </a:r>
+          </a:p>
+          <a:p>
+            <a:pPr marL="285750" indent="-285750">
+              <a:buFont typeface="Arial" panose="020B0604020202020204" pitchFamily="34" charset="0"/>
+              <a:buChar char="•"/>
+            </a:pPr>
+            <a:r>
+              <a:rPr lang="en-US" b="1" dirty="0">
+                <a:sym typeface="Wingdings" panose="05000000000000000000" pitchFamily="2" charset="2"/>
+              </a:rPr>
+              <a:t>Usage:</a:t>
+            </a:r>
+          </a:p>
+          <a:p>
+            <a:pPr marL="511175" lvl="1" indent="-285750">
+              <a:buFont typeface="Arial" panose="020B0604020202020204" pitchFamily="34" charset="0"/>
+              <a:buChar char="•"/>
+            </a:pPr>
+            <a:r>
+              <a:rPr lang="en-US" b="1" dirty="0">
+                <a:sym typeface="Wingdings" panose="05000000000000000000" pitchFamily="2" charset="2"/>
+                <a:hlinkClick r:id="rId2"/>
+              </a:rPr>
+              <a:t>http://esp32</a:t>
+            </a:r>
+            <a:r>
+              <a:rPr lang="en-US" b="1" dirty="0">
+                <a:highlight>
+                  <a:srgbClr val="FFFF00"/>
+                </a:highlight>
+                <a:sym typeface="Wingdings" panose="05000000000000000000" pitchFamily="2" charset="2"/>
+                <a:hlinkClick r:id="rId2"/>
+              </a:rPr>
+              <a:t>.local</a:t>
+            </a:r>
+            <a:r>
+              <a:rPr lang="en-US" b="1" dirty="0">
+                <a:sym typeface="Wingdings" panose="05000000000000000000" pitchFamily="2" charset="2"/>
+                <a:hlinkClick r:id="rId2"/>
+              </a:rPr>
+              <a:t>/</a:t>
+            </a:r>
+            <a:endParaRPr lang="en-US" b="1" dirty="0">
+              <a:sym typeface="Wingdings" panose="05000000000000000000" pitchFamily="2" charset="2"/>
+            </a:endParaRPr>
+          </a:p>
+          <a:p>
+            <a:pPr marL="511175" lvl="1" indent="-285750">
+              <a:buFont typeface="Arial" panose="020B0604020202020204" pitchFamily="34" charset="0"/>
+              <a:buChar char="•"/>
+            </a:pPr>
+            <a:r>
+              <a:rPr lang="en-US" b="1" dirty="0">
+                <a:sym typeface="Wingdings" panose="05000000000000000000" pitchFamily="2" charset="2"/>
+              </a:rPr>
+              <a:t>No MDNS support - </a:t>
+            </a:r>
+            <a:r>
+              <a:rPr lang="en-US" b="1" dirty="0">
+                <a:sym typeface="Wingdings" panose="05000000000000000000" pitchFamily="2" charset="2"/>
+                <a:hlinkClick r:id="rId3"/>
+              </a:rPr>
+              <a:t>http://192.168.14.1/</a:t>
+            </a:r>
+            <a:r>
+              <a:rPr lang="en-US" b="1" dirty="0">
+                <a:sym typeface="Wingdings" panose="05000000000000000000" pitchFamily="2" charset="2"/>
+              </a:rPr>
+              <a:t> (just an example IP)</a:t>
+            </a:r>
+          </a:p>
+          <a:p>
+            <a:pPr marL="511175" lvl="1" indent="-285750">
+              <a:buFont typeface="Arial" panose="020B0604020202020204" pitchFamily="34" charset="0"/>
+              <a:buChar char="•"/>
+            </a:pPr>
             <a:endParaRPr lang="en-US" dirty="0"/>
           </a:p>
         </p:txBody>
       </p:sp>
       <p:pic>
         <p:nvPicPr>
-          <p:cNvPr id="6" name="Picture 5" descr="A screen shot of a smart phone&#10;&#10;Description automatically generated">
+          <p:cNvPr id="5" name="Picture 4">
             <a:extLst>
               <a:ext uri="{FF2B5EF4-FFF2-40B4-BE49-F238E27FC236}">
-                <a16:creationId xmlns:a16="http://schemas.microsoft.com/office/drawing/2014/main" id="{17E44084-A604-4F48-BBF2-DCC799E8AD28}"/>
-              </a:ext>
-            </a:extLst>
-          </p:cNvPr>
-          <p:cNvPicPr>
-            <a:picLocks noChangeAspect="1"/>
-          </p:cNvPicPr>
-          <p:nvPr/>
-        </p:nvPicPr>
-        <p:blipFill>
-          <a:blip r:embed="rId2"/>
-          <a:stretch>
-            <a:fillRect/>
-          </a:stretch>
-        </p:blipFill>
-        <p:spPr>
-          <a:xfrm>
-            <a:off x="7062853" y="628649"/>
-            <a:ext cx="1752598" cy="3797297"/>
-          </a:xfrm>
-          <a:prstGeom prst="rect">
-            <a:avLst/>
-          </a:prstGeom>
-        </p:spPr>
-      </p:pic>
-      <p:pic>
-        <p:nvPicPr>
-          <p:cNvPr id="8" name="Picture 7" descr="A screenshot of a cell phone&#10;&#10;Description automatically generated">
-            <a:extLst>
-              <a:ext uri="{FF2B5EF4-FFF2-40B4-BE49-F238E27FC236}">
-                <a16:creationId xmlns:a16="http://schemas.microsoft.com/office/drawing/2014/main" id="{15FD725A-C0D2-4DCF-BAF3-F10462A671C6}"/>
-              </a:ext>
-            </a:extLst>
-          </p:cNvPr>
-          <p:cNvPicPr>
-            <a:picLocks noChangeAspect="1"/>
-          </p:cNvPicPr>
-          <p:nvPr/>
-        </p:nvPicPr>
-        <p:blipFill>
-          <a:blip r:embed="rId3"/>
-          <a:stretch>
-            <a:fillRect/>
-          </a:stretch>
-        </p:blipFill>
-        <p:spPr>
-          <a:xfrm>
-            <a:off x="2689639" y="628649"/>
-            <a:ext cx="1752599" cy="3797300"/>
-          </a:xfrm>
-          <a:prstGeom prst="rect">
-            <a:avLst/>
-          </a:prstGeom>
-        </p:spPr>
-      </p:pic>
-      <p:pic>
-        <p:nvPicPr>
-          <p:cNvPr id="10" name="Picture 9" descr="A screenshot of a cell phone&#10;&#10;Description automatically generated">
-            <a:extLst>
-              <a:ext uri="{FF2B5EF4-FFF2-40B4-BE49-F238E27FC236}">
-                <a16:creationId xmlns:a16="http://schemas.microsoft.com/office/drawing/2014/main" id="{3D050D2A-767E-4567-B538-45961B0377E4}"/>
+                <a16:creationId xmlns:a16="http://schemas.microsoft.com/office/drawing/2014/main" id="{24E19BFC-531D-4A69-AB7A-52BD42626B4B}"/>
               </a:ext>
             </a:extLst>
           </p:cNvPr>
@@ -14894,177 +15043,28 @@
         </p:blipFill>
         <p:spPr>
           <a:xfrm>
-            <a:off x="4801991" y="628646"/>
-            <a:ext cx="1752600" cy="3797300"/>
+            <a:off x="4158866" y="2680040"/>
+            <a:ext cx="4134062" cy="1441524"/>
           </a:xfrm>
           <a:prstGeom prst="rect">
             <a:avLst/>
           </a:prstGeom>
+          <a:ln>
+            <a:noFill/>
+          </a:ln>
+          <a:effectLst>
+            <a:outerShdw blurRad="292100" dist="139700" dir="2700000" algn="tl" rotWithShape="0">
+              <a:srgbClr val="333333">
+                <a:alpha val="65000"/>
+              </a:srgbClr>
+            </a:outerShdw>
+          </a:effectLst>
         </p:spPr>
       </p:pic>
-      <p:pic>
-        <p:nvPicPr>
-          <p:cNvPr id="12" name="Picture 11" descr="A screenshot of a cell phone&#10;&#10;Description automatically generated">
-            <a:extLst>
-              <a:ext uri="{FF2B5EF4-FFF2-40B4-BE49-F238E27FC236}">
-                <a16:creationId xmlns:a16="http://schemas.microsoft.com/office/drawing/2014/main" id="{DE326BE5-D38A-4794-92E7-3313E7434CAC}"/>
-              </a:ext>
-            </a:extLst>
-          </p:cNvPr>
-          <p:cNvPicPr>
-            <a:picLocks noChangeAspect="1"/>
-          </p:cNvPicPr>
-          <p:nvPr/>
-        </p:nvPicPr>
-        <p:blipFill>
-          <a:blip r:embed="rId5"/>
-          <a:stretch>
-            <a:fillRect/>
-          </a:stretch>
-        </p:blipFill>
-        <p:spPr>
-          <a:xfrm>
-            <a:off x="428776" y="628646"/>
-            <a:ext cx="1752600" cy="3797300"/>
-          </a:xfrm>
-          <a:prstGeom prst="rect">
-            <a:avLst/>
-          </a:prstGeom>
-        </p:spPr>
-      </p:pic>
-      <p:cxnSp>
-        <p:nvCxnSpPr>
-          <p:cNvPr id="14" name="Straight Arrow Connector 13">
-            <a:extLst>
-              <a:ext uri="{FF2B5EF4-FFF2-40B4-BE49-F238E27FC236}">
-                <a16:creationId xmlns:a16="http://schemas.microsoft.com/office/drawing/2014/main" id="{525D55CA-5DF0-439A-8E29-2FBFBE89680A}"/>
-              </a:ext>
-            </a:extLst>
-          </p:cNvPr>
-          <p:cNvCxnSpPr/>
-          <p:nvPr/>
-        </p:nvCxnSpPr>
-        <p:spPr>
-          <a:xfrm flipH="1">
-            <a:off x="6553200" y="3067050"/>
-            <a:ext cx="1562100" cy="0"/>
-          </a:xfrm>
-          <a:prstGeom prst="straightConnector1">
-            <a:avLst/>
-          </a:prstGeom>
-          <a:ln>
-            <a:solidFill>
-              <a:schemeClr val="tx2"/>
-            </a:solidFill>
-            <a:tailEnd type="triangle"/>
-          </a:ln>
-          <a:effectLst/>
-        </p:spPr>
-        <p:style>
-          <a:lnRef idx="2">
-            <a:schemeClr val="accent1"/>
-          </a:lnRef>
-          <a:fillRef idx="0">
-            <a:schemeClr val="accent1"/>
-          </a:fillRef>
-          <a:effectRef idx="1">
-            <a:schemeClr val="accent1"/>
-          </a:effectRef>
-          <a:fontRef idx="minor">
-            <a:schemeClr val="tx1"/>
-          </a:fontRef>
-        </p:style>
-      </p:cxnSp>
-      <p:cxnSp>
-        <p:nvCxnSpPr>
-          <p:cNvPr id="16" name="Straight Arrow Connector 15">
-            <a:extLst>
-              <a:ext uri="{FF2B5EF4-FFF2-40B4-BE49-F238E27FC236}">
-                <a16:creationId xmlns:a16="http://schemas.microsoft.com/office/drawing/2014/main" id="{3C18FD72-2A52-4A14-8E3C-1F1D218203F2}"/>
-              </a:ext>
-            </a:extLst>
-          </p:cNvPr>
-          <p:cNvCxnSpPr/>
-          <p:nvPr/>
-        </p:nvCxnSpPr>
-        <p:spPr>
-          <a:xfrm flipH="1" flipV="1">
-            <a:off x="4286250" y="1295400"/>
-            <a:ext cx="812800" cy="1771650"/>
-          </a:xfrm>
-          <a:prstGeom prst="straightConnector1">
-            <a:avLst/>
-          </a:prstGeom>
-          <a:ln>
-            <a:solidFill>
-              <a:schemeClr val="tx2"/>
-            </a:solidFill>
-            <a:tailEnd type="triangle"/>
-          </a:ln>
-          <a:effectLst/>
-        </p:spPr>
-        <p:style>
-          <a:lnRef idx="2">
-            <a:schemeClr val="accent1"/>
-          </a:lnRef>
-          <a:fillRef idx="0">
-            <a:schemeClr val="accent1"/>
-          </a:fillRef>
-          <a:effectRef idx="1">
-            <a:schemeClr val="accent1"/>
-          </a:effectRef>
-          <a:fontRef idx="minor">
-            <a:schemeClr val="tx1"/>
-          </a:fontRef>
-        </p:style>
-      </p:cxnSp>
-      <p:cxnSp>
-        <p:nvCxnSpPr>
-          <p:cNvPr id="18" name="Straight Arrow Connector 17">
-            <a:extLst>
-              <a:ext uri="{FF2B5EF4-FFF2-40B4-BE49-F238E27FC236}">
-                <a16:creationId xmlns:a16="http://schemas.microsoft.com/office/drawing/2014/main" id="{115654D4-1310-431E-A6BB-68D66EE272E6}"/>
-              </a:ext>
-            </a:extLst>
-          </p:cNvPr>
-          <p:cNvCxnSpPr/>
-          <p:nvPr/>
-        </p:nvCxnSpPr>
-        <p:spPr>
-          <a:xfrm flipH="1" flipV="1">
-            <a:off x="2181376" y="2774950"/>
-            <a:ext cx="1571474" cy="1003300"/>
-          </a:xfrm>
-          <a:prstGeom prst="straightConnector1">
-            <a:avLst/>
-          </a:prstGeom>
-          <a:ln>
-            <a:solidFill>
-              <a:schemeClr val="tx2"/>
-            </a:solidFill>
-            <a:tailEnd type="triangle"/>
-          </a:ln>
-          <a:effectLst/>
-        </p:spPr>
-        <p:style>
-          <a:lnRef idx="2">
-            <a:schemeClr val="accent1"/>
-          </a:lnRef>
-          <a:fillRef idx="0">
-            <a:schemeClr val="accent1"/>
-          </a:fillRef>
-          <a:effectRef idx="1">
-            <a:schemeClr val="accent1"/>
-          </a:effectRef>
-          <a:fontRef idx="minor">
-            <a:schemeClr val="tx1"/>
-          </a:fontRef>
-        </p:style>
-      </p:cxnSp>
     </p:spTree>
     <p:extLst>
       <p:ext uri="{BB962C8B-B14F-4D97-AF65-F5344CB8AC3E}">
-        <p14:creationId xmlns:p14="http://schemas.microsoft.com/office/powerpoint/2010/main" val="716925225"/>
+        <p14:creationId xmlns:p14="http://schemas.microsoft.com/office/powerpoint/2010/main" val="1548630015"/>
       </p:ext>
     </p:extLst>
   </p:cSld>
@@ -15108,7 +15108,7 @@
           <p:cNvPr id="2" name="Slide Number Placeholder 1">
             <a:extLst>
               <a:ext uri="{FF2B5EF4-FFF2-40B4-BE49-F238E27FC236}">
-                <a16:creationId xmlns:a16="http://schemas.microsoft.com/office/drawing/2014/main" id="{17744C99-9A24-4D6F-8D3C-A4CB41E876CA}"/>
+                <a16:creationId xmlns:a16="http://schemas.microsoft.com/office/drawing/2014/main" id="{B1FF6DCD-B39F-48CD-83C3-B2F86A1E1258}"/>
               </a:ext>
             </a:extLst>
           </p:cNvPr>
@@ -15135,10 +15135,10 @@
       </p:sp>
       <p:sp>
         <p:nvSpPr>
-          <p:cNvPr id="4" name="Content Placeholder 3">
+          <p:cNvPr id="3" name="Title 2">
             <a:extLst>
               <a:ext uri="{FF2B5EF4-FFF2-40B4-BE49-F238E27FC236}">
-                <a16:creationId xmlns:a16="http://schemas.microsoft.com/office/drawing/2014/main" id="{0DA5B5C6-365A-4798-8EE3-9AAC1659E9D7}"/>
+                <a16:creationId xmlns:a16="http://schemas.microsoft.com/office/drawing/2014/main" id="{479C472F-5734-47D5-8B13-8377293992A0}"/>
               </a:ext>
             </a:extLst>
           </p:cNvPr>
@@ -15146,111 +15146,36 @@
             <a:spLocks noGrp="1"/>
           </p:cNvSpPr>
           <p:nvPr>
-            <p:ph sz="quarter" idx="13"/>
+            <p:ph type="title"/>
           </p:nvPr>
         </p:nvSpPr>
         <p:spPr>
           <a:xfrm>
-            <a:off x="455613" y="715109"/>
-            <a:ext cx="8228012" cy="3914042"/>
+            <a:off x="457200" y="143748"/>
+            <a:ext cx="8229600" cy="370602"/>
           </a:xfrm>
         </p:spPr>
         <p:txBody>
           <a:bodyPr/>
           <a:lstStyle/>
           <a:p>
-            <a:pPr marL="285750" indent="-285750">
-              <a:spcBef>
-                <a:spcPts val="600"/>
-              </a:spcBef>
-              <a:buFont typeface="Arial" panose="020B0604020202020204" pitchFamily="34" charset="0"/>
-              <a:buChar char="•"/>
-            </a:pPr>
-            <a:r>
-              <a:rPr lang="en-US" dirty="0"/>
-              <a:t>Protocol developed by </a:t>
+            <a:r>
+              <a:rPr lang="en-US" dirty="0"/>
+              <a:t>No </a:t>
             </a:r>
             <a:r>
               <a:rPr lang="en-US" dirty="0" err="1"/>
-              <a:t>Espressif</a:t>
-            </a:r>
-            <a:endParaRPr lang="en-US" dirty="0"/>
-          </a:p>
-          <a:p>
-            <a:pPr marL="285750" indent="-285750">
-              <a:spcBef>
-                <a:spcPts val="600"/>
-              </a:spcBef>
-              <a:buFont typeface="Arial" panose="020B0604020202020204" pitchFamily="34" charset="0"/>
-              <a:buChar char="•"/>
-            </a:pPr>
-            <a:r>
-              <a:rPr lang="en-US" dirty="0"/>
-              <a:t>Enables multiple devices to communicate without using Wi-Fi</a:t>
-            </a:r>
-          </a:p>
-          <a:p>
-            <a:pPr marL="285750" indent="-285750">
-              <a:spcBef>
-                <a:spcPts val="600"/>
-              </a:spcBef>
-              <a:buFont typeface="Arial" panose="020B0604020202020204" pitchFamily="34" charset="0"/>
-              <a:buChar char="•"/>
-            </a:pPr>
-            <a:r>
-              <a:rPr lang="en-US" dirty="0"/>
-              <a:t>Low-power 2.4GHz wireless connectivity</a:t>
-            </a:r>
-          </a:p>
-          <a:p>
-            <a:pPr marL="285750" indent="-285750">
-              <a:spcBef>
-                <a:spcPts val="600"/>
-              </a:spcBef>
-              <a:buFont typeface="Arial" panose="020B0604020202020204" pitchFamily="34" charset="0"/>
-              <a:buChar char="•"/>
-            </a:pPr>
-            <a:r>
-              <a:rPr lang="en-US" dirty="0"/>
-              <a:t>Encrypted and unencrypted unicast communication</a:t>
-            </a:r>
-          </a:p>
-          <a:p>
-            <a:pPr marL="285750" indent="-285750">
-              <a:spcBef>
-                <a:spcPts val="600"/>
-              </a:spcBef>
-              <a:buFont typeface="Arial" panose="020B0604020202020204" pitchFamily="34" charset="0"/>
-              <a:buChar char="•"/>
-            </a:pPr>
-            <a:r>
-              <a:rPr lang="en-US" dirty="0"/>
-              <a:t>Up to 250-byte payload can be carried</a:t>
-            </a:r>
-          </a:p>
-          <a:p>
-            <a:pPr marL="285750" indent="-285750">
-              <a:spcBef>
-                <a:spcPts val="600"/>
-              </a:spcBef>
-              <a:buFont typeface="Arial" panose="020B0604020202020204" pitchFamily="34" charset="0"/>
-              <a:buChar char="•"/>
-            </a:pPr>
-            <a:r>
-              <a:rPr lang="en-US" dirty="0"/>
-              <a:t>10 encrypted peers at the most (STA mode), 6 for </a:t>
-            </a:r>
-            <a:r>
-              <a:rPr lang="en-US" dirty="0" err="1"/>
-              <a:t>SoftAP</a:t>
-            </a:r>
-            <a:r>
-              <a:rPr lang="en-US" dirty="0"/>
-              <a:t> or STA + </a:t>
-            </a:r>
-            <a:r>
-              <a:rPr lang="en-US" dirty="0" err="1"/>
-              <a:t>SoftAP</a:t>
+              <a:t>mdns</a:t>
+            </a:r>
+            <a:r>
+              <a:rPr lang="en-US" dirty="0"/>
+              <a:t> on Android so… (buy an iPhone </a:t>
+            </a:r>
+            <a:r>
+              <a:rPr lang="en-US" dirty="0">
+                <a:sym typeface="Wingdings" panose="05000000000000000000" pitchFamily="2" charset="2"/>
+              </a:rPr>
+              <a:t> or)</a:t>
             </a:r>
             <a:endParaRPr lang="en-US" dirty="0"/>
           </a:p>
@@ -15258,10 +15183,10 @@
       </p:sp>
       <p:pic>
         <p:nvPicPr>
-          <p:cNvPr id="5" name="Picture 4">
+          <p:cNvPr id="6" name="Picture 5" descr="A screen shot of a smart phone&#10;&#10;Description automatically generated">
             <a:extLst>
               <a:ext uri="{FF2B5EF4-FFF2-40B4-BE49-F238E27FC236}">
-                <a16:creationId xmlns:a16="http://schemas.microsoft.com/office/drawing/2014/main" id="{E2EC1960-0710-42C1-8B0A-4665A64FE647}"/>
+                <a16:creationId xmlns:a16="http://schemas.microsoft.com/office/drawing/2014/main" id="{17E44084-A604-4F48-BBF2-DCC799E8AD28}"/>
               </a:ext>
             </a:extLst>
           </p:cNvPr>
@@ -15278,8 +15203,8 @@
         </p:blipFill>
         <p:spPr>
           <a:xfrm>
-            <a:off x="3393701" y="41890"/>
-            <a:ext cx="2351836" cy="673219"/>
+            <a:off x="7062853" y="628649"/>
+            <a:ext cx="1752598" cy="3797297"/>
           </a:xfrm>
           <a:prstGeom prst="rect">
             <a:avLst/>
@@ -15288,10 +15213,10 @@
       </p:pic>
       <p:pic>
         <p:nvPicPr>
-          <p:cNvPr id="8" name="Picture 7">
+          <p:cNvPr id="8" name="Picture 7" descr="A screenshot of a cell phone&#10;&#10;Description automatically generated">
             <a:extLst>
               <a:ext uri="{FF2B5EF4-FFF2-40B4-BE49-F238E27FC236}">
-                <a16:creationId xmlns:a16="http://schemas.microsoft.com/office/drawing/2014/main" id="{17C7A402-78E7-4D22-801D-EB951135DBE9}"/>
+                <a16:creationId xmlns:a16="http://schemas.microsoft.com/office/drawing/2014/main" id="{15FD725A-C0D2-4DCF-BAF3-F10462A671C6}"/>
               </a:ext>
             </a:extLst>
           </p:cNvPr>
@@ -15308,28 +15233,207 @@
         </p:blipFill>
         <p:spPr>
           <a:xfrm>
-            <a:off x="2743200" y="2795652"/>
-            <a:ext cx="2617365" cy="1876113"/>
+            <a:off x="2689639" y="628649"/>
+            <a:ext cx="1752599" cy="3797300"/>
           </a:xfrm>
           <a:prstGeom prst="rect">
             <a:avLst/>
           </a:prstGeom>
+        </p:spPr>
+      </p:pic>
+      <p:pic>
+        <p:nvPicPr>
+          <p:cNvPr id="10" name="Picture 9" descr="A screenshot of a cell phone&#10;&#10;Description automatically generated">
+            <a:extLst>
+              <a:ext uri="{FF2B5EF4-FFF2-40B4-BE49-F238E27FC236}">
+                <a16:creationId xmlns:a16="http://schemas.microsoft.com/office/drawing/2014/main" id="{3D050D2A-767E-4567-B538-45961B0377E4}"/>
+              </a:ext>
+            </a:extLst>
+          </p:cNvPr>
+          <p:cNvPicPr>
+            <a:picLocks noChangeAspect="1"/>
+          </p:cNvPicPr>
+          <p:nvPr/>
+        </p:nvPicPr>
+        <p:blipFill>
+          <a:blip r:embed="rId4"/>
+          <a:stretch>
+            <a:fillRect/>
+          </a:stretch>
+        </p:blipFill>
+        <p:spPr>
+          <a:xfrm>
+            <a:off x="4801991" y="628646"/>
+            <a:ext cx="1752600" cy="3797300"/>
+          </a:xfrm>
+          <a:prstGeom prst="rect">
+            <a:avLst/>
+          </a:prstGeom>
+        </p:spPr>
+      </p:pic>
+      <p:pic>
+        <p:nvPicPr>
+          <p:cNvPr id="12" name="Picture 11" descr="A screenshot of a cell phone&#10;&#10;Description automatically generated">
+            <a:extLst>
+              <a:ext uri="{FF2B5EF4-FFF2-40B4-BE49-F238E27FC236}">
+                <a16:creationId xmlns:a16="http://schemas.microsoft.com/office/drawing/2014/main" id="{DE326BE5-D38A-4794-92E7-3313E7434CAC}"/>
+              </a:ext>
+            </a:extLst>
+          </p:cNvPr>
+          <p:cNvPicPr>
+            <a:picLocks noChangeAspect="1"/>
+          </p:cNvPicPr>
+          <p:nvPr/>
+        </p:nvPicPr>
+        <p:blipFill>
+          <a:blip r:embed="rId5"/>
+          <a:stretch>
+            <a:fillRect/>
+          </a:stretch>
+        </p:blipFill>
+        <p:spPr>
+          <a:xfrm>
+            <a:off x="428776" y="628646"/>
+            <a:ext cx="1752600" cy="3797300"/>
+          </a:xfrm>
+          <a:prstGeom prst="rect">
+            <a:avLst/>
+          </a:prstGeom>
+        </p:spPr>
+      </p:pic>
+      <p:cxnSp>
+        <p:nvCxnSpPr>
+          <p:cNvPr id="14" name="Straight Arrow Connector 13">
+            <a:extLst>
+              <a:ext uri="{FF2B5EF4-FFF2-40B4-BE49-F238E27FC236}">
+                <a16:creationId xmlns:a16="http://schemas.microsoft.com/office/drawing/2014/main" id="{525D55CA-5DF0-439A-8E29-2FBFBE89680A}"/>
+              </a:ext>
+            </a:extLst>
+          </p:cNvPr>
+          <p:cNvCxnSpPr/>
+          <p:nvPr/>
+        </p:nvCxnSpPr>
+        <p:spPr>
+          <a:xfrm flipH="1">
+            <a:off x="6553200" y="3067050"/>
+            <a:ext cx="1562100" cy="0"/>
+          </a:xfrm>
+          <a:prstGeom prst="straightConnector1">
+            <a:avLst/>
+          </a:prstGeom>
           <a:ln>
-            <a:noFill/>
+            <a:solidFill>
+              <a:schemeClr val="tx2"/>
+            </a:solidFill>
+            <a:tailEnd type="triangle"/>
           </a:ln>
-          <a:effectLst>
-            <a:outerShdw blurRad="292100" dist="139700" dir="2700000" algn="tl" rotWithShape="0">
-              <a:srgbClr val="333333">
-                <a:alpha val="65000"/>
-              </a:srgbClr>
-            </a:outerShdw>
-          </a:effectLst>
-        </p:spPr>
-      </p:pic>
+          <a:effectLst/>
+        </p:spPr>
+        <p:style>
+          <a:lnRef idx="2">
+            <a:schemeClr val="accent1"/>
+          </a:lnRef>
+          <a:fillRef idx="0">
+            <a:schemeClr val="accent1"/>
+          </a:fillRef>
+          <a:effectRef idx="1">
+            <a:schemeClr val="accent1"/>
+          </a:effectRef>
+          <a:fontRef idx="minor">
+            <a:schemeClr val="tx1"/>
+          </a:fontRef>
+        </p:style>
+      </p:cxnSp>
+      <p:cxnSp>
+        <p:nvCxnSpPr>
+          <p:cNvPr id="16" name="Straight Arrow Connector 15">
+            <a:extLst>
+              <a:ext uri="{FF2B5EF4-FFF2-40B4-BE49-F238E27FC236}">
+                <a16:creationId xmlns:a16="http://schemas.microsoft.com/office/drawing/2014/main" id="{3C18FD72-2A52-4A14-8E3C-1F1D218203F2}"/>
+              </a:ext>
+            </a:extLst>
+          </p:cNvPr>
+          <p:cNvCxnSpPr/>
+          <p:nvPr/>
+        </p:nvCxnSpPr>
+        <p:spPr>
+          <a:xfrm flipH="1" flipV="1">
+            <a:off x="4286250" y="1295400"/>
+            <a:ext cx="812800" cy="1771650"/>
+          </a:xfrm>
+          <a:prstGeom prst="straightConnector1">
+            <a:avLst/>
+          </a:prstGeom>
+          <a:ln>
+            <a:solidFill>
+              <a:schemeClr val="tx2"/>
+            </a:solidFill>
+            <a:tailEnd type="triangle"/>
+          </a:ln>
+          <a:effectLst/>
+        </p:spPr>
+        <p:style>
+          <a:lnRef idx="2">
+            <a:schemeClr val="accent1"/>
+          </a:lnRef>
+          <a:fillRef idx="0">
+            <a:schemeClr val="accent1"/>
+          </a:fillRef>
+          <a:effectRef idx="1">
+            <a:schemeClr val="accent1"/>
+          </a:effectRef>
+          <a:fontRef idx="minor">
+            <a:schemeClr val="tx1"/>
+          </a:fontRef>
+        </p:style>
+      </p:cxnSp>
+      <p:cxnSp>
+        <p:nvCxnSpPr>
+          <p:cNvPr id="18" name="Straight Arrow Connector 17">
+            <a:extLst>
+              <a:ext uri="{FF2B5EF4-FFF2-40B4-BE49-F238E27FC236}">
+                <a16:creationId xmlns:a16="http://schemas.microsoft.com/office/drawing/2014/main" id="{115654D4-1310-431E-A6BB-68D66EE272E6}"/>
+              </a:ext>
+            </a:extLst>
+          </p:cNvPr>
+          <p:cNvCxnSpPr/>
+          <p:nvPr/>
+        </p:nvCxnSpPr>
+        <p:spPr>
+          <a:xfrm flipH="1" flipV="1">
+            <a:off x="2181376" y="2774950"/>
+            <a:ext cx="1571474" cy="1003300"/>
+          </a:xfrm>
+          <a:prstGeom prst="straightConnector1">
+            <a:avLst/>
+          </a:prstGeom>
+          <a:ln>
+            <a:solidFill>
+              <a:schemeClr val="tx2"/>
+            </a:solidFill>
+            <a:tailEnd type="triangle"/>
+          </a:ln>
+          <a:effectLst/>
+        </p:spPr>
+        <p:style>
+          <a:lnRef idx="2">
+            <a:schemeClr val="accent1"/>
+          </a:lnRef>
+          <a:fillRef idx="0">
+            <a:schemeClr val="accent1"/>
+          </a:fillRef>
+          <a:effectRef idx="1">
+            <a:schemeClr val="accent1"/>
+          </a:effectRef>
+          <a:fontRef idx="minor">
+            <a:schemeClr val="tx1"/>
+          </a:fontRef>
+        </p:style>
+      </p:cxnSp>
     </p:spTree>
     <p:extLst>
       <p:ext uri="{BB962C8B-B14F-4D97-AF65-F5344CB8AC3E}">
-        <p14:creationId xmlns:p14="http://schemas.microsoft.com/office/powerpoint/2010/main" val="3970351120"/>
+        <p14:creationId xmlns:p14="http://schemas.microsoft.com/office/powerpoint/2010/main" val="716925225"/>
       </p:ext>
     </p:extLst>
   </p:cSld>
@@ -15400,48 +15504,6 @@
       </p:sp>
       <p:sp>
         <p:nvSpPr>
-          <p:cNvPr id="3" name="Title 2">
-            <a:extLst>
-              <a:ext uri="{FF2B5EF4-FFF2-40B4-BE49-F238E27FC236}">
-                <a16:creationId xmlns:a16="http://schemas.microsoft.com/office/drawing/2014/main" id="{DFCD3F10-262A-49AA-92F3-A28E2073C0CF}"/>
-              </a:ext>
-            </a:extLst>
-          </p:cNvPr>
-          <p:cNvSpPr>
-            <a:spLocks noGrp="1"/>
-          </p:cNvSpPr>
-          <p:nvPr>
-            <p:ph type="title"/>
-          </p:nvPr>
-        </p:nvSpPr>
-        <p:spPr>
-          <a:xfrm>
-            <a:off x="455613" y="308848"/>
-            <a:ext cx="8229600" cy="379883"/>
-          </a:xfrm>
-        </p:spPr>
-        <p:txBody>
-          <a:bodyPr/>
-          <a:lstStyle/>
-          <a:p>
-            <a:pPr>
-              <a:spcBef>
-                <a:spcPts val="600"/>
-              </a:spcBef>
-            </a:pPr>
-            <a:r>
-              <a:rPr lang="en-US" sz="3600" dirty="0" err="1"/>
-              <a:t>Esp</a:t>
-            </a:r>
-            <a:r>
-              <a:rPr lang="en-US" sz="3600" dirty="0"/>
-              <a:t>-now </a:t>
-            </a:r>
-          </a:p>
-        </p:txBody>
-      </p:sp>
-      <p:sp>
-        <p:nvSpPr>
           <p:cNvPr id="4" name="Content Placeholder 3">
             <a:extLst>
               <a:ext uri="{FF2B5EF4-FFF2-40B4-BE49-F238E27FC236}">
@@ -15475,8 +15537,13 @@
             </a:pPr>
             <a:r>
               <a:rPr lang="en-US" dirty="0"/>
-              <a:t>Works with MAC address</a:t>
-            </a:r>
+              <a:t>Protocol developed by </a:t>
+            </a:r>
+            <a:r>
+              <a:rPr lang="en-US" dirty="0" err="1"/>
+              <a:t>Espressif</a:t>
+            </a:r>
+            <a:endParaRPr lang="en-US" dirty="0"/>
           </a:p>
           <a:p>
             <a:pPr marL="285750" indent="-285750">
@@ -15488,7 +15555,7 @@
             </a:pPr>
             <a:r>
               <a:rPr lang="en-US" dirty="0"/>
-              <a:t>Need to know the our MAC and the Peer’s</a:t>
+              <a:t>Enables multiple devices to communicate without using Wi-Fi</a:t>
             </a:r>
           </a:p>
           <a:p>
@@ -15501,7 +15568,7 @@
             </a:pPr>
             <a:r>
               <a:rPr lang="en-US" dirty="0"/>
-              <a:t>Initialize the protocol</a:t>
+              <a:t>Low-power 2.4GHz wireless connectivity</a:t>
             </a:r>
           </a:p>
           <a:p>
@@ -15514,7 +15581,7 @@
             </a:pPr>
             <a:r>
               <a:rPr lang="en-US" dirty="0"/>
-              <a:t>Register callback functions for send and receive</a:t>
+              <a:t>Encrypted and unencrypted unicast communication</a:t>
             </a:r>
           </a:p>
           <a:p>
@@ -15527,7 +15594,7 @@
             </a:pPr>
             <a:r>
               <a:rPr lang="en-US" dirty="0"/>
-              <a:t>Register peers</a:t>
+              <a:t>Up to 250-byte payload can be carried</a:t>
             </a:r>
           </a:p>
           <a:p>
@@ -15540,73 +15607,21 @@
             </a:pPr>
             <a:r>
               <a:rPr lang="en-US" dirty="0"/>
-              <a:t>Upon sending the send function will be called:</a:t>
-            </a:r>
-          </a:p>
-          <a:p>
-            <a:pPr marL="511175" lvl="1" indent="-285750">
-              <a:spcBef>
-                <a:spcPts val="600"/>
-              </a:spcBef>
-              <a:buFont typeface="Arial" panose="020B0604020202020204" pitchFamily="34" charset="0"/>
-              <a:buChar char="•"/>
-            </a:pPr>
-            <a:r>
-              <a:rPr lang="en-US" dirty="0"/>
-              <a:t>With status</a:t>
-            </a:r>
-          </a:p>
-          <a:p>
-            <a:pPr marL="511175" lvl="1" indent="-285750">
-              <a:spcBef>
-                <a:spcPts val="600"/>
-              </a:spcBef>
-              <a:buFont typeface="Arial" panose="020B0604020202020204" pitchFamily="34" charset="0"/>
-              <a:buChar char="•"/>
-            </a:pPr>
-            <a:r>
-              <a:rPr lang="en-US" dirty="0"/>
-              <a:t>With the MAC of the targeted peer</a:t>
-            </a:r>
-          </a:p>
-          <a:p>
-            <a:pPr marL="285750" indent="-285750">
-              <a:spcBef>
-                <a:spcPts val="600"/>
-              </a:spcBef>
-              <a:buFont typeface="Arial" panose="020B0604020202020204" pitchFamily="34" charset="0"/>
-              <a:buChar char="•"/>
-            </a:pPr>
-            <a:r>
-              <a:rPr lang="en-US" dirty="0"/>
-              <a:t>Upon receiving the receive function will be called:</a:t>
-            </a:r>
-          </a:p>
-          <a:p>
-            <a:pPr marL="511175" lvl="1" indent="-285750">
-              <a:spcBef>
-                <a:spcPts val="600"/>
-              </a:spcBef>
-              <a:buFont typeface="Arial" panose="020B0604020202020204" pitchFamily="34" charset="0"/>
-              <a:buChar char="•"/>
-            </a:pPr>
-            <a:r>
-              <a:rPr lang="en-US" dirty="0"/>
-              <a:t>With the MAC of the sender</a:t>
-            </a:r>
-          </a:p>
-          <a:p>
-            <a:pPr marL="511175" lvl="1" indent="-285750">
-              <a:spcBef>
-                <a:spcPts val="600"/>
-              </a:spcBef>
-              <a:buFont typeface="Arial" panose="020B0604020202020204" pitchFamily="34" charset="0"/>
-              <a:buChar char="•"/>
-            </a:pPr>
-            <a:r>
-              <a:rPr lang="en-US" dirty="0"/>
-              <a:t>With the received data </a:t>
-            </a:r>
+              <a:t>10 encrypted peers at the most (STA mode), 6 for </a:t>
+            </a:r>
+            <a:r>
+              <a:rPr lang="en-US" dirty="0" err="1"/>
+              <a:t>SoftAP</a:t>
+            </a:r>
+            <a:r>
+              <a:rPr lang="en-US" dirty="0"/>
+              <a:t> or STA + </a:t>
+            </a:r>
+            <a:r>
+              <a:rPr lang="en-US" dirty="0" err="1"/>
+              <a:t>SoftAP</a:t>
+            </a:r>
+            <a:endParaRPr lang="en-US" dirty="0"/>
           </a:p>
         </p:txBody>
       </p:sp>
@@ -15615,7 +15630,7 @@
           <p:cNvPr id="5" name="Picture 4">
             <a:extLst>
               <a:ext uri="{FF2B5EF4-FFF2-40B4-BE49-F238E27FC236}">
-                <a16:creationId xmlns:a16="http://schemas.microsoft.com/office/drawing/2014/main" id="{E0CD740F-035D-419D-923E-4431F19446F0}"/>
+                <a16:creationId xmlns:a16="http://schemas.microsoft.com/office/drawing/2014/main" id="{E2EC1960-0710-42C1-8B0A-4665A64FE647}"/>
               </a:ext>
             </a:extLst>
           </p:cNvPr>
@@ -15632,30 +15647,20 @@
         </p:blipFill>
         <p:spPr>
           <a:xfrm>
-            <a:off x="5412371" y="416145"/>
-            <a:ext cx="2762392" cy="558829"/>
+            <a:off x="3393701" y="41890"/>
+            <a:ext cx="2351836" cy="673219"/>
           </a:xfrm>
           <a:prstGeom prst="rect">
             <a:avLst/>
           </a:prstGeom>
-          <a:ln>
-            <a:noFill/>
-          </a:ln>
-          <a:effectLst>
-            <a:outerShdw blurRad="292100" dist="139700" dir="2700000" algn="tl" rotWithShape="0">
-              <a:srgbClr val="333333">
-                <a:alpha val="65000"/>
-              </a:srgbClr>
-            </a:outerShdw>
-          </a:effectLst>
         </p:spPr>
       </p:pic>
       <p:pic>
         <p:nvPicPr>
-          <p:cNvPr id="6" name="Picture 5">
+          <p:cNvPr id="8" name="Picture 7">
             <a:extLst>
               <a:ext uri="{FF2B5EF4-FFF2-40B4-BE49-F238E27FC236}">
-                <a16:creationId xmlns:a16="http://schemas.microsoft.com/office/drawing/2014/main" id="{63A27537-E429-4EEC-8B70-DC7BEE487116}"/>
+                <a16:creationId xmlns:a16="http://schemas.microsoft.com/office/drawing/2014/main" id="{17C7A402-78E7-4D22-801D-EB951135DBE9}"/>
               </a:ext>
             </a:extLst>
           </p:cNvPr>
@@ -15672,8 +15677,8 @@
         </p:blipFill>
         <p:spPr>
           <a:xfrm>
-            <a:off x="5159771" y="1094540"/>
-            <a:ext cx="3425162" cy="541629"/>
+            <a:off x="2743200" y="2795652"/>
+            <a:ext cx="2617365" cy="1876113"/>
           </a:xfrm>
           <a:prstGeom prst="rect">
             <a:avLst/>
@@ -15690,130 +15695,10 @@
           </a:effectLst>
         </p:spPr>
       </p:pic>
-      <p:pic>
-        <p:nvPicPr>
-          <p:cNvPr id="7" name="Picture 6">
-            <a:extLst>
-              <a:ext uri="{FF2B5EF4-FFF2-40B4-BE49-F238E27FC236}">
-                <a16:creationId xmlns:a16="http://schemas.microsoft.com/office/drawing/2014/main" id="{0EB74540-5EA9-4A02-8111-F55BC8B9176C}"/>
-              </a:ext>
-            </a:extLst>
-          </p:cNvPr>
-          <p:cNvPicPr>
-            <a:picLocks noChangeAspect="1"/>
-          </p:cNvPicPr>
-          <p:nvPr/>
-        </p:nvPicPr>
-        <p:blipFill>
-          <a:blip r:embed="rId4"/>
-          <a:stretch>
-            <a:fillRect/>
-          </a:stretch>
-        </p:blipFill>
-        <p:spPr>
-          <a:xfrm>
-            <a:off x="5935289" y="1717892"/>
-            <a:ext cx="2239474" cy="595416"/>
-          </a:xfrm>
-          <a:prstGeom prst="rect">
-            <a:avLst/>
-          </a:prstGeom>
-          <a:ln>
-            <a:noFill/>
-          </a:ln>
-          <a:effectLst>
-            <a:outerShdw blurRad="292100" dist="139700" dir="2700000" algn="tl" rotWithShape="0">
-              <a:srgbClr val="333333">
-                <a:alpha val="65000"/>
-              </a:srgbClr>
-            </a:outerShdw>
-          </a:effectLst>
-        </p:spPr>
-      </p:pic>
-      <p:pic>
-        <p:nvPicPr>
-          <p:cNvPr id="8" name="Picture 7">
-            <a:extLst>
-              <a:ext uri="{FF2B5EF4-FFF2-40B4-BE49-F238E27FC236}">
-                <a16:creationId xmlns:a16="http://schemas.microsoft.com/office/drawing/2014/main" id="{AF44AA83-D29E-4C69-BAF1-029E0D84F56B}"/>
-              </a:ext>
-            </a:extLst>
-          </p:cNvPr>
-          <p:cNvPicPr>
-            <a:picLocks noChangeAspect="1"/>
-          </p:cNvPicPr>
-          <p:nvPr/>
-        </p:nvPicPr>
-        <p:blipFill>
-          <a:blip r:embed="rId5"/>
-          <a:stretch>
-            <a:fillRect/>
-          </a:stretch>
-        </p:blipFill>
-        <p:spPr>
-          <a:xfrm>
-            <a:off x="5637320" y="2473262"/>
-            <a:ext cx="3181387" cy="516185"/>
-          </a:xfrm>
-          <a:prstGeom prst="rect">
-            <a:avLst/>
-          </a:prstGeom>
-          <a:ln>
-            <a:noFill/>
-          </a:ln>
-          <a:effectLst>
-            <a:outerShdw blurRad="292100" dist="139700" dir="2700000" algn="tl" rotWithShape="0">
-              <a:srgbClr val="333333">
-                <a:alpha val="65000"/>
-              </a:srgbClr>
-            </a:outerShdw>
-          </a:effectLst>
-        </p:spPr>
-      </p:pic>
-      <p:pic>
-        <p:nvPicPr>
-          <p:cNvPr id="9" name="Picture 8">
-            <a:extLst>
-              <a:ext uri="{FF2B5EF4-FFF2-40B4-BE49-F238E27FC236}">
-                <a16:creationId xmlns:a16="http://schemas.microsoft.com/office/drawing/2014/main" id="{9BDDAFFD-B164-44D2-98CC-ECE3EA8C8AEA}"/>
-              </a:ext>
-            </a:extLst>
-          </p:cNvPr>
-          <p:cNvPicPr>
-            <a:picLocks noChangeAspect="1"/>
-          </p:cNvPicPr>
-          <p:nvPr/>
-        </p:nvPicPr>
-        <p:blipFill>
-          <a:blip r:embed="rId6"/>
-          <a:stretch>
-            <a:fillRect/>
-          </a:stretch>
-        </p:blipFill>
-        <p:spPr>
-          <a:xfrm>
-            <a:off x="4500883" y="3938389"/>
-            <a:ext cx="3673880" cy="484878"/>
-          </a:xfrm>
-          <a:prstGeom prst="rect">
-            <a:avLst/>
-          </a:prstGeom>
-          <a:ln>
-            <a:noFill/>
-          </a:ln>
-          <a:effectLst>
-            <a:outerShdw blurRad="292100" dist="139700" dir="2700000" algn="tl" rotWithShape="0">
-              <a:srgbClr val="333333">
-                <a:alpha val="65000"/>
-              </a:srgbClr>
-            </a:outerShdw>
-          </a:effectLst>
-        </p:spPr>
-      </p:pic>
     </p:spTree>
     <p:extLst>
       <p:ext uri="{BB962C8B-B14F-4D97-AF65-F5344CB8AC3E}">
-        <p14:creationId xmlns:p14="http://schemas.microsoft.com/office/powerpoint/2010/main" val="1910364947"/>
+        <p14:creationId xmlns:p14="http://schemas.microsoft.com/office/powerpoint/2010/main" val="3970351120"/>
       </p:ext>
     </p:extLst>
   </p:cSld>
@@ -15914,8 +15799,12 @@
               </a:spcBef>
             </a:pPr>
             <a:r>
+              <a:rPr lang="en-US" sz="3600" dirty="0" err="1"/>
+              <a:t>Esp</a:t>
+            </a:r>
+            <a:r>
               <a:rPr lang="en-US" sz="3600" dirty="0"/>
-              <a:t>IOT – Controlling our ESP32 over the cloud</a:t>
+              <a:t>-now </a:t>
             </a:r>
           </a:p>
         </p:txBody>
@@ -15955,7 +15844,7 @@
             </a:pPr>
             <a:r>
               <a:rPr lang="en-US" dirty="0"/>
-              <a:t>Using the ESP’s WIFI</a:t>
+              <a:t>Works with MAC address</a:t>
             </a:r>
           </a:p>
           <a:p>
@@ -15968,7 +15857,7 @@
             </a:pPr>
             <a:r>
               <a:rPr lang="en-US" dirty="0"/>
-              <a:t>We need to connect to a hotspot with internet access</a:t>
+              <a:t>Need to know the our MAC and the Peer’s</a:t>
             </a:r>
           </a:p>
           <a:p>
@@ -15981,7 +15870,46 @@
             </a:pPr>
             <a:r>
               <a:rPr lang="en-US" dirty="0"/>
-              <a:t>We need a service provider to enable via cloud activities such as</a:t>
+              <a:t>Initialize the protocol</a:t>
+            </a:r>
+          </a:p>
+          <a:p>
+            <a:pPr marL="285750" indent="-285750">
+              <a:spcBef>
+                <a:spcPts val="600"/>
+              </a:spcBef>
+              <a:buFont typeface="Arial" panose="020B0604020202020204" pitchFamily="34" charset="0"/>
+              <a:buChar char="•"/>
+            </a:pPr>
+            <a:r>
+              <a:rPr lang="en-US" dirty="0"/>
+              <a:t>Register callback functions for send and receive</a:t>
+            </a:r>
+          </a:p>
+          <a:p>
+            <a:pPr marL="285750" indent="-285750">
+              <a:spcBef>
+                <a:spcPts val="600"/>
+              </a:spcBef>
+              <a:buFont typeface="Arial" panose="020B0604020202020204" pitchFamily="34" charset="0"/>
+              <a:buChar char="•"/>
+            </a:pPr>
+            <a:r>
+              <a:rPr lang="en-US" dirty="0"/>
+              <a:t>Register peers</a:t>
+            </a:r>
+          </a:p>
+          <a:p>
+            <a:pPr marL="285750" indent="-285750">
+              <a:spcBef>
+                <a:spcPts val="600"/>
+              </a:spcBef>
+              <a:buFont typeface="Arial" panose="020B0604020202020204" pitchFamily="34" charset="0"/>
+              <a:buChar char="•"/>
+            </a:pPr>
+            <a:r>
+              <a:rPr lang="en-US" dirty="0"/>
+              <a:t>Upon sending the send function will be called:</a:t>
             </a:r>
           </a:p>
           <a:p>
@@ -15994,13 +15922,8 @@
             </a:pPr>
             <a:r>
               <a:rPr lang="en-US" dirty="0"/>
-              <a:t>Control I/</a:t>
-            </a:r>
-            <a:r>
-              <a:rPr lang="en-US" dirty="0" err="1"/>
-              <a:t>Os</a:t>
-            </a:r>
-            <a:endParaRPr lang="en-US" dirty="0"/>
+              <a:t>With status</a:t>
+            </a:r>
           </a:p>
           <a:p>
             <a:pPr marL="511175" lvl="1" indent="-285750">
@@ -16012,7 +15935,7 @@
             </a:pPr>
             <a:r>
               <a:rPr lang="en-US" dirty="0"/>
-              <a:t>Get and push data to our ESP</a:t>
+              <a:t>With the MAC of the targeted peer</a:t>
             </a:r>
           </a:p>
           <a:p>
@@ -16025,11 +15948,11 @@
             </a:pPr>
             <a:r>
               <a:rPr lang="en-US" dirty="0"/>
-              <a:t>There are many cloud service providers out there</a:t>
-            </a:r>
-          </a:p>
-          <a:p>
-            <a:pPr marL="285750" indent="-285750">
+              <a:t>Upon receiving the receive function will be called:</a:t>
+            </a:r>
+          </a:p>
+          <a:p>
+            <a:pPr marL="511175" lvl="1" indent="-285750">
               <a:spcBef>
                 <a:spcPts val="600"/>
               </a:spcBef>
@@ -16038,32 +15961,30 @@
             </a:pPr>
             <a:r>
               <a:rPr lang="en-US" dirty="0"/>
-              <a:t>I prefer using </a:t>
-            </a:r>
-            <a:r>
-              <a:rPr lang="en-US" dirty="0" err="1"/>
-              <a:t>Blynk</a:t>
-            </a:r>
-            <a:r>
-              <a:rPr lang="en-US" dirty="0"/>
-              <a:t> (more on the next slide </a:t>
-            </a:r>
-            <a:r>
-              <a:rPr lang="en-US" dirty="0">
-                <a:sym typeface="Wingdings" panose="05000000000000000000" pitchFamily="2" charset="2"/>
-              </a:rPr>
-              <a:t>)</a:t>
-            </a:r>
-            <a:endParaRPr lang="en-US" dirty="0"/>
+              <a:t>With the MAC of the sender</a:t>
+            </a:r>
+          </a:p>
+          <a:p>
+            <a:pPr marL="511175" lvl="1" indent="-285750">
+              <a:spcBef>
+                <a:spcPts val="600"/>
+              </a:spcBef>
+              <a:buFont typeface="Arial" panose="020B0604020202020204" pitchFamily="34" charset="0"/>
+              <a:buChar char="•"/>
+            </a:pPr>
+            <a:r>
+              <a:rPr lang="en-US" dirty="0"/>
+              <a:t>With the received data </a:t>
+            </a:r>
           </a:p>
         </p:txBody>
       </p:sp>
       <p:pic>
         <p:nvPicPr>
-          <p:cNvPr id="9" name="Picture 8">
+          <p:cNvPr id="5" name="Picture 4">
             <a:extLst>
               <a:ext uri="{FF2B5EF4-FFF2-40B4-BE49-F238E27FC236}">
-                <a16:creationId xmlns:a16="http://schemas.microsoft.com/office/drawing/2014/main" id="{A66A41D2-0362-4A72-9A6B-AE89ACCD63CB}"/>
+                <a16:creationId xmlns:a16="http://schemas.microsoft.com/office/drawing/2014/main" id="{E0CD740F-035D-419D-923E-4431F19446F0}"/>
               </a:ext>
             </a:extLst>
           </p:cNvPr>
@@ -16080,18 +16001,188 @@
         </p:blipFill>
         <p:spPr>
           <a:xfrm>
-            <a:off x="5840976" y="2432050"/>
-            <a:ext cx="3252639" cy="2294719"/>
+            <a:off x="5412371" y="416145"/>
+            <a:ext cx="2762392" cy="558829"/>
           </a:xfrm>
           <a:prstGeom prst="rect">
             <a:avLst/>
           </a:prstGeom>
+          <a:ln>
+            <a:noFill/>
+          </a:ln>
+          <a:effectLst>
+            <a:outerShdw blurRad="292100" dist="139700" dir="2700000" algn="tl" rotWithShape="0">
+              <a:srgbClr val="333333">
+                <a:alpha val="65000"/>
+              </a:srgbClr>
+            </a:outerShdw>
+          </a:effectLst>
+        </p:spPr>
+      </p:pic>
+      <p:pic>
+        <p:nvPicPr>
+          <p:cNvPr id="6" name="Picture 5">
+            <a:extLst>
+              <a:ext uri="{FF2B5EF4-FFF2-40B4-BE49-F238E27FC236}">
+                <a16:creationId xmlns:a16="http://schemas.microsoft.com/office/drawing/2014/main" id="{63A27537-E429-4EEC-8B70-DC7BEE487116}"/>
+              </a:ext>
+            </a:extLst>
+          </p:cNvPr>
+          <p:cNvPicPr>
+            <a:picLocks noChangeAspect="1"/>
+          </p:cNvPicPr>
+          <p:nvPr/>
+        </p:nvPicPr>
+        <p:blipFill>
+          <a:blip r:embed="rId3"/>
+          <a:stretch>
+            <a:fillRect/>
+          </a:stretch>
+        </p:blipFill>
+        <p:spPr>
+          <a:xfrm>
+            <a:off x="5159771" y="1094540"/>
+            <a:ext cx="3425162" cy="541629"/>
+          </a:xfrm>
+          <a:prstGeom prst="rect">
+            <a:avLst/>
+          </a:prstGeom>
+          <a:ln>
+            <a:noFill/>
+          </a:ln>
+          <a:effectLst>
+            <a:outerShdw blurRad="292100" dist="139700" dir="2700000" algn="tl" rotWithShape="0">
+              <a:srgbClr val="333333">
+                <a:alpha val="65000"/>
+              </a:srgbClr>
+            </a:outerShdw>
+          </a:effectLst>
+        </p:spPr>
+      </p:pic>
+      <p:pic>
+        <p:nvPicPr>
+          <p:cNvPr id="7" name="Picture 6">
+            <a:extLst>
+              <a:ext uri="{FF2B5EF4-FFF2-40B4-BE49-F238E27FC236}">
+                <a16:creationId xmlns:a16="http://schemas.microsoft.com/office/drawing/2014/main" id="{0EB74540-5EA9-4A02-8111-F55BC8B9176C}"/>
+              </a:ext>
+            </a:extLst>
+          </p:cNvPr>
+          <p:cNvPicPr>
+            <a:picLocks noChangeAspect="1"/>
+          </p:cNvPicPr>
+          <p:nvPr/>
+        </p:nvPicPr>
+        <p:blipFill>
+          <a:blip r:embed="rId4"/>
+          <a:stretch>
+            <a:fillRect/>
+          </a:stretch>
+        </p:blipFill>
+        <p:spPr>
+          <a:xfrm>
+            <a:off x="5935289" y="1717892"/>
+            <a:ext cx="2239474" cy="595416"/>
+          </a:xfrm>
+          <a:prstGeom prst="rect">
+            <a:avLst/>
+          </a:prstGeom>
+          <a:ln>
+            <a:noFill/>
+          </a:ln>
+          <a:effectLst>
+            <a:outerShdw blurRad="292100" dist="139700" dir="2700000" algn="tl" rotWithShape="0">
+              <a:srgbClr val="333333">
+                <a:alpha val="65000"/>
+              </a:srgbClr>
+            </a:outerShdw>
+          </a:effectLst>
+        </p:spPr>
+      </p:pic>
+      <p:pic>
+        <p:nvPicPr>
+          <p:cNvPr id="8" name="Picture 7">
+            <a:extLst>
+              <a:ext uri="{FF2B5EF4-FFF2-40B4-BE49-F238E27FC236}">
+                <a16:creationId xmlns:a16="http://schemas.microsoft.com/office/drawing/2014/main" id="{AF44AA83-D29E-4C69-BAF1-029E0D84F56B}"/>
+              </a:ext>
+            </a:extLst>
+          </p:cNvPr>
+          <p:cNvPicPr>
+            <a:picLocks noChangeAspect="1"/>
+          </p:cNvPicPr>
+          <p:nvPr/>
+        </p:nvPicPr>
+        <p:blipFill>
+          <a:blip r:embed="rId5"/>
+          <a:stretch>
+            <a:fillRect/>
+          </a:stretch>
+        </p:blipFill>
+        <p:spPr>
+          <a:xfrm>
+            <a:off x="5637320" y="2473262"/>
+            <a:ext cx="3181387" cy="516185"/>
+          </a:xfrm>
+          <a:prstGeom prst="rect">
+            <a:avLst/>
+          </a:prstGeom>
+          <a:ln>
+            <a:noFill/>
+          </a:ln>
+          <a:effectLst>
+            <a:outerShdw blurRad="292100" dist="139700" dir="2700000" algn="tl" rotWithShape="0">
+              <a:srgbClr val="333333">
+                <a:alpha val="65000"/>
+              </a:srgbClr>
+            </a:outerShdw>
+          </a:effectLst>
+        </p:spPr>
+      </p:pic>
+      <p:pic>
+        <p:nvPicPr>
+          <p:cNvPr id="9" name="Picture 8">
+            <a:extLst>
+              <a:ext uri="{FF2B5EF4-FFF2-40B4-BE49-F238E27FC236}">
+                <a16:creationId xmlns:a16="http://schemas.microsoft.com/office/drawing/2014/main" id="{9BDDAFFD-B164-44D2-98CC-ECE3EA8C8AEA}"/>
+              </a:ext>
+            </a:extLst>
+          </p:cNvPr>
+          <p:cNvPicPr>
+            <a:picLocks noChangeAspect="1"/>
+          </p:cNvPicPr>
+          <p:nvPr/>
+        </p:nvPicPr>
+        <p:blipFill>
+          <a:blip r:embed="rId6"/>
+          <a:stretch>
+            <a:fillRect/>
+          </a:stretch>
+        </p:blipFill>
+        <p:spPr>
+          <a:xfrm>
+            <a:off x="4500883" y="3938389"/>
+            <a:ext cx="3673880" cy="484878"/>
+          </a:xfrm>
+          <a:prstGeom prst="rect">
+            <a:avLst/>
+          </a:prstGeom>
+          <a:ln>
+            <a:noFill/>
+          </a:ln>
+          <a:effectLst>
+            <a:outerShdw blurRad="292100" dist="139700" dir="2700000" algn="tl" rotWithShape="0">
+              <a:srgbClr val="333333">
+                <a:alpha val="65000"/>
+              </a:srgbClr>
+            </a:outerShdw>
+          </a:effectLst>
         </p:spPr>
       </p:pic>
     </p:spTree>
     <p:extLst>
       <p:ext uri="{BB962C8B-B14F-4D97-AF65-F5344CB8AC3E}">
-        <p14:creationId xmlns:p14="http://schemas.microsoft.com/office/powerpoint/2010/main" val="1185005549"/>
+        <p14:creationId xmlns:p14="http://schemas.microsoft.com/office/powerpoint/2010/main" val="1910364947"/>
       </p:ext>
     </p:extLst>
   </p:cSld>
@@ -16193,7 +16284,7 @@
             </a:pPr>
             <a:r>
               <a:rPr lang="en-US" sz="3600" dirty="0"/>
-              <a:t>IOT – BLYNK</a:t>
+              <a:t>IOT – Controlling our ESP32 over the cloud</a:t>
             </a:r>
           </a:p>
         </p:txBody>
@@ -16233,7 +16324,7 @@
             </a:pPr>
             <a:r>
               <a:rPr lang="en-US" dirty="0"/>
-              <a:t>Works via application on a phone or tablet (No web or PC apps)</a:t>
+              <a:t>Using the ESP’s WIFI</a:t>
             </a:r>
           </a:p>
           <a:p>
@@ -16246,7 +16337,7 @@
             </a:pPr>
             <a:r>
               <a:rPr lang="en-US" dirty="0"/>
-              <a:t>Can work via Wi-Fi or Bluetooth </a:t>
+              <a:t>We need to connect to a hotspot with internet access</a:t>
             </a:r>
           </a:p>
           <a:p>
@@ -16259,7 +16350,38 @@
             </a:pPr>
             <a:r>
               <a:rPr lang="en-US" dirty="0"/>
-              <a:t>The application is very easy to use and very powerful</a:t>
+              <a:t>We need a service provider to enable via cloud activities such as</a:t>
+            </a:r>
+          </a:p>
+          <a:p>
+            <a:pPr marL="511175" lvl="1" indent="-285750">
+              <a:spcBef>
+                <a:spcPts val="600"/>
+              </a:spcBef>
+              <a:buFont typeface="Arial" panose="020B0604020202020204" pitchFamily="34" charset="0"/>
+              <a:buChar char="•"/>
+            </a:pPr>
+            <a:r>
+              <a:rPr lang="en-US" dirty="0"/>
+              <a:t>Control I/</a:t>
+            </a:r>
+            <a:r>
+              <a:rPr lang="en-US" dirty="0" err="1"/>
+              <a:t>Os</a:t>
+            </a:r>
+            <a:endParaRPr lang="en-US" dirty="0"/>
+          </a:p>
+          <a:p>
+            <a:pPr marL="511175" lvl="1" indent="-285750">
+              <a:spcBef>
+                <a:spcPts val="600"/>
+              </a:spcBef>
+              <a:buFont typeface="Arial" panose="020B0604020202020204" pitchFamily="34" charset="0"/>
+              <a:buChar char="•"/>
+            </a:pPr>
+            <a:r>
+              <a:rPr lang="en-US" dirty="0"/>
+              <a:t>Get and push data to our ESP</a:t>
             </a:r>
           </a:p>
           <a:p>
@@ -16272,7 +16394,7 @@
             </a:pPr>
             <a:r>
               <a:rPr lang="en-US" dirty="0"/>
-              <a:t>Code is extremely simple to manipulate using a dedicated library</a:t>
+              <a:t>There are many cloud service providers out there</a:t>
             </a:r>
           </a:p>
           <a:p>
@@ -16285,107 +16407,32 @@
             </a:pPr>
             <a:r>
               <a:rPr lang="en-US" dirty="0"/>
-              <a:t>Has a code wizard generator on their website</a:t>
-            </a:r>
-          </a:p>
-          <a:p>
-            <a:pPr marL="285750" indent="-285750">
-              <a:spcBef>
-                <a:spcPts val="600"/>
-              </a:spcBef>
-              <a:buFont typeface="Arial" panose="020B0604020202020204" pitchFamily="34" charset="0"/>
-              <a:buChar char="•"/>
-            </a:pPr>
-            <a:r>
-              <a:rPr lang="en-US" dirty="0"/>
-              <a:t>Wi-Fi and Bluetooth code is the same, only small change in initialization</a:t>
-            </a:r>
-          </a:p>
-          <a:p>
-            <a:pPr marL="285750" indent="-285750">
-              <a:spcBef>
-                <a:spcPts val="600"/>
-              </a:spcBef>
-              <a:buFont typeface="Arial" panose="020B0604020202020204" pitchFamily="34" charset="0"/>
-              <a:buChar char="•"/>
-            </a:pPr>
-            <a:r>
-              <a:rPr lang="en-US" dirty="0"/>
-              <a:t>Automatic application sync for all used devices</a:t>
-            </a:r>
-          </a:p>
-          <a:p>
-            <a:pPr marL="285750" indent="-285750">
-              <a:spcBef>
-                <a:spcPts val="600"/>
-              </a:spcBef>
-              <a:buFont typeface="Arial" panose="020B0604020202020204" pitchFamily="34" charset="0"/>
-              <a:buChar char="•"/>
-            </a:pPr>
-            <a:r>
-              <a:rPr lang="en-US" dirty="0"/>
-              <a:t>Android supports widgets</a:t>
-            </a:r>
-          </a:p>
-          <a:p>
-            <a:pPr marL="285750" indent="-285750">
-              <a:spcBef>
-                <a:spcPts val="600"/>
-              </a:spcBef>
-              <a:buFont typeface="Arial" panose="020B0604020202020204" pitchFamily="34" charset="0"/>
-              <a:buChar char="•"/>
-            </a:pPr>
-            <a:r>
-              <a:rPr lang="en-US" dirty="0"/>
-              <a:t>We can use </a:t>
-            </a:r>
-            <a:r>
-              <a:rPr lang="en-US" b="1" dirty="0"/>
-              <a:t>our own </a:t>
-            </a:r>
-            <a:r>
-              <a:rPr lang="en-US" dirty="0"/>
-              <a:t>server!! (RPI4)</a:t>
-            </a:r>
-          </a:p>
-          <a:p>
-            <a:pPr marL="285750" indent="-285750">
-              <a:spcBef>
-                <a:spcPts val="600"/>
-              </a:spcBef>
-              <a:buFont typeface="Arial" panose="020B0604020202020204" pitchFamily="34" charset="0"/>
-              <a:buChar char="•"/>
-            </a:pPr>
+              <a:t>I prefer using </a:t>
+            </a:r>
             <a:r>
               <a:rPr lang="en-US" dirty="0" err="1"/>
               <a:t>Blynk</a:t>
             </a:r>
             <a:r>
               <a:rPr lang="en-US" dirty="0"/>
-              <a:t> have a service to generate an application for us to be published on app store</a:t>
-            </a:r>
-          </a:p>
-          <a:p>
-            <a:pPr marL="285750" indent="-285750">
-              <a:spcBef>
-                <a:spcPts val="600"/>
-              </a:spcBef>
-              <a:buFont typeface="Arial" panose="020B0604020202020204" pitchFamily="34" charset="0"/>
-              <a:buChar char="•"/>
-            </a:pPr>
-            <a:r>
-              <a:rPr lang="en-US" dirty="0"/>
-              <a:t>Look at the course GIT for a user guide and a demo code </a:t>
-            </a:r>
+              <a:t> (more on the next slide </a:t>
+            </a:r>
+            <a:r>
+              <a:rPr lang="en-US" dirty="0">
+                <a:sym typeface="Wingdings" panose="05000000000000000000" pitchFamily="2" charset="2"/>
+              </a:rPr>
+              <a:t>)</a:t>
+            </a:r>
+            <a:endParaRPr lang="en-US" dirty="0"/>
           </a:p>
         </p:txBody>
       </p:sp>
       <p:pic>
         <p:nvPicPr>
-          <p:cNvPr id="5" name="Picture 4">
+          <p:cNvPr id="9" name="Picture 8">
             <a:extLst>
               <a:ext uri="{FF2B5EF4-FFF2-40B4-BE49-F238E27FC236}">
-                <a16:creationId xmlns:a16="http://schemas.microsoft.com/office/drawing/2014/main" id="{A0BC285A-91F1-48A8-A47B-91608C0FC074}"/>
+                <a16:creationId xmlns:a16="http://schemas.microsoft.com/office/drawing/2014/main" id="{A66A41D2-0362-4A72-9A6B-AE89ACCD63CB}"/>
               </a:ext>
             </a:extLst>
           </p:cNvPr>
@@ -16402,8 +16449,8 @@
         </p:blipFill>
         <p:spPr>
           <a:xfrm>
-            <a:off x="2241473" y="155257"/>
-            <a:ext cx="1105054" cy="533474"/>
+            <a:off x="5840976" y="2432050"/>
+            <a:ext cx="3252639" cy="2294719"/>
           </a:xfrm>
           <a:prstGeom prst="rect">
             <a:avLst/>
@@ -16413,7 +16460,7 @@
     </p:spTree>
     <p:extLst>
       <p:ext uri="{BB962C8B-B14F-4D97-AF65-F5344CB8AC3E}">
-        <p14:creationId xmlns:p14="http://schemas.microsoft.com/office/powerpoint/2010/main" val="1709890549"/>
+        <p14:creationId xmlns:p14="http://schemas.microsoft.com/office/powerpoint/2010/main" val="1185005549"/>
       </p:ext>
     </p:extLst>
   </p:cSld>
@@ -16457,7 +16504,7 @@
           <p:cNvPr id="2" name="Slide Number Placeholder 1">
             <a:extLst>
               <a:ext uri="{FF2B5EF4-FFF2-40B4-BE49-F238E27FC236}">
-                <a16:creationId xmlns:a16="http://schemas.microsoft.com/office/drawing/2014/main" id="{5BBD704F-9F97-45CE-8123-EC124FC35BB8}"/>
+                <a16:creationId xmlns:a16="http://schemas.microsoft.com/office/drawing/2014/main" id="{17744C99-9A24-4D6F-8D3C-A4CB41E876CA}"/>
               </a:ext>
             </a:extLst>
           </p:cNvPr>
@@ -16487,7 +16534,7 @@
           <p:cNvPr id="3" name="Title 2">
             <a:extLst>
               <a:ext uri="{FF2B5EF4-FFF2-40B4-BE49-F238E27FC236}">
-                <a16:creationId xmlns:a16="http://schemas.microsoft.com/office/drawing/2014/main" id="{4AE94B41-0E83-44E8-A5A7-9E145F9D82C8}"/>
+                <a16:creationId xmlns:a16="http://schemas.microsoft.com/office/drawing/2014/main" id="{DFCD3F10-262A-49AA-92F3-A28E2073C0CF}"/>
               </a:ext>
             </a:extLst>
           </p:cNvPr>
@@ -16501,16 +16548,21 @@
         <p:spPr>
           <a:xfrm>
             <a:off x="455613" y="308848"/>
-            <a:ext cx="8229600" cy="374703"/>
+            <a:ext cx="8229600" cy="379883"/>
           </a:xfrm>
         </p:spPr>
         <p:txBody>
           <a:bodyPr/>
           <a:lstStyle/>
           <a:p>
-            <a:r>
-              <a:rPr lang="en-US" dirty="0"/>
-              <a:t>FW update to our IOT device</a:t>
+            <a:pPr>
+              <a:spcBef>
+                <a:spcPts val="600"/>
+              </a:spcBef>
+            </a:pPr>
+            <a:r>
+              <a:rPr lang="en-US" sz="3600" dirty="0"/>
+              <a:t>IOT – BLYNK</a:t>
             </a:r>
           </a:p>
         </p:txBody>
@@ -16520,7 +16572,7 @@
           <p:cNvPr id="4" name="Content Placeholder 3">
             <a:extLst>
               <a:ext uri="{FF2B5EF4-FFF2-40B4-BE49-F238E27FC236}">
-                <a16:creationId xmlns:a16="http://schemas.microsoft.com/office/drawing/2014/main" id="{E451509D-3026-4955-A8C4-45DF800E8074}"/>
+                <a16:creationId xmlns:a16="http://schemas.microsoft.com/office/drawing/2014/main" id="{0DA5B5C6-365A-4798-8EE3-9AAC1659E9D7}"/>
               </a:ext>
             </a:extLst>
           </p:cNvPr>
@@ -16533,8 +16585,8 @@
         </p:nvSpPr>
         <p:spPr>
           <a:xfrm>
-            <a:off x="455613" y="710535"/>
-            <a:ext cx="8228012" cy="3918616"/>
+            <a:off x="455613" y="715109"/>
+            <a:ext cx="8228012" cy="3914042"/>
           </a:xfrm>
         </p:spPr>
         <p:txBody>
@@ -16542,70 +16594,195 @@
           <a:lstStyle/>
           <a:p>
             <a:pPr marL="285750" indent="-285750">
+              <a:spcBef>
+                <a:spcPts val="600"/>
+              </a:spcBef>
               <a:buFont typeface="Arial" panose="020B0604020202020204" pitchFamily="34" charset="0"/>
               <a:buChar char="•"/>
             </a:pPr>
             <a:r>
-              <a:rPr lang="en-US" sz="1600" dirty="0"/>
-              <a:t>IOT device without OTA (Over The Air Update) is probably not and IOT device </a:t>
-            </a:r>
-            <a:r>
-              <a:rPr lang="en-US" sz="1600" dirty="0">
-                <a:sym typeface="Wingdings" panose="05000000000000000000" pitchFamily="2" charset="2"/>
-              </a:rPr>
-              <a:t></a:t>
+              <a:rPr lang="en-US" dirty="0"/>
+              <a:t>Works via application on a phone or tablet (No web or PC apps)</a:t>
             </a:r>
           </a:p>
           <a:p>
             <a:pPr marL="285750" indent="-285750">
+              <a:spcBef>
+                <a:spcPts val="600"/>
+              </a:spcBef>
               <a:buFont typeface="Arial" panose="020B0604020202020204" pitchFamily="34" charset="0"/>
               <a:buChar char="•"/>
             </a:pPr>
             <a:r>
-              <a:rPr lang="en-US" sz="1600" dirty="0">
-                <a:sym typeface="Wingdings" panose="05000000000000000000" pitchFamily="2" charset="2"/>
-              </a:rPr>
-              <a:t>We have few options to update the software of our ESP32</a:t>
-            </a:r>
-          </a:p>
-          <a:p>
-            <a:pPr marL="511175" lvl="1" indent="-285750">
+              <a:rPr lang="en-US" dirty="0"/>
+              <a:t>Can work via Wi-Fi or Bluetooth </a:t>
+            </a:r>
+          </a:p>
+          <a:p>
+            <a:pPr marL="285750" indent="-285750">
+              <a:spcBef>
+                <a:spcPts val="600"/>
+              </a:spcBef>
               <a:buFont typeface="Arial" panose="020B0604020202020204" pitchFamily="34" charset="0"/>
               <a:buChar char="•"/>
             </a:pPr>
             <a:r>
-              <a:rPr lang="en-US" sz="1600" dirty="0">
-                <a:sym typeface="Wingdings" panose="05000000000000000000" pitchFamily="2" charset="2"/>
-              </a:rPr>
-              <a:t>Automatically Over The Air where the new FW is placed on our GIT account!</a:t>
-            </a:r>
-          </a:p>
-          <a:p>
-            <a:pPr marL="511175" lvl="1" indent="-285750">
+              <a:rPr lang="en-US" dirty="0"/>
+              <a:t>The application is very easy to use and very powerful</a:t>
+            </a:r>
+          </a:p>
+          <a:p>
+            <a:pPr marL="285750" indent="-285750">
+              <a:spcBef>
+                <a:spcPts val="600"/>
+              </a:spcBef>
               <a:buFont typeface="Arial" panose="020B0604020202020204" pitchFamily="34" charset="0"/>
               <a:buChar char="•"/>
             </a:pPr>
             <a:r>
-              <a:rPr lang="en-US" sz="1600" dirty="0"/>
-              <a:t>Through WEB page running on ESP32’s WEB server</a:t>
-            </a:r>
-          </a:p>
-          <a:p>
-            <a:pPr marL="511175" lvl="1" indent="-285750">
+              <a:rPr lang="en-US" dirty="0"/>
+              <a:t>Code is extremely simple to manipulate using a dedicated library</a:t>
+            </a:r>
+          </a:p>
+          <a:p>
+            <a:pPr marL="285750" indent="-285750">
+              <a:spcBef>
+                <a:spcPts val="600"/>
+              </a:spcBef>
               <a:buFont typeface="Arial" panose="020B0604020202020204" pitchFamily="34" charset="0"/>
               <a:buChar char="•"/>
             </a:pPr>
             <a:r>
-              <a:rPr lang="en-US" sz="1600" dirty="0"/>
-              <a:t>From a file residing on a SD card</a:t>
+              <a:rPr lang="en-US" dirty="0"/>
+              <a:t>Has a code wizard generator on their website</a:t>
+            </a:r>
+          </a:p>
+          <a:p>
+            <a:pPr marL="285750" indent="-285750">
+              <a:spcBef>
+                <a:spcPts val="600"/>
+              </a:spcBef>
+              <a:buFont typeface="Arial" panose="020B0604020202020204" pitchFamily="34" charset="0"/>
+              <a:buChar char="•"/>
+            </a:pPr>
+            <a:r>
+              <a:rPr lang="en-US" dirty="0"/>
+              <a:t>Wi-Fi and Bluetooth code is the same, only small change in initialization</a:t>
+            </a:r>
+          </a:p>
+          <a:p>
+            <a:pPr marL="285750" indent="-285750">
+              <a:spcBef>
+                <a:spcPts val="600"/>
+              </a:spcBef>
+              <a:buFont typeface="Arial" panose="020B0604020202020204" pitchFamily="34" charset="0"/>
+              <a:buChar char="•"/>
+            </a:pPr>
+            <a:r>
+              <a:rPr lang="en-US" dirty="0"/>
+              <a:t>Automatic application sync for all used devices</a:t>
+            </a:r>
+          </a:p>
+          <a:p>
+            <a:pPr marL="285750" indent="-285750">
+              <a:spcBef>
+                <a:spcPts val="600"/>
+              </a:spcBef>
+              <a:buFont typeface="Arial" panose="020B0604020202020204" pitchFamily="34" charset="0"/>
+              <a:buChar char="•"/>
+            </a:pPr>
+            <a:r>
+              <a:rPr lang="en-US" dirty="0"/>
+              <a:t>Android supports widgets</a:t>
+            </a:r>
+          </a:p>
+          <a:p>
+            <a:pPr marL="285750" indent="-285750">
+              <a:spcBef>
+                <a:spcPts val="600"/>
+              </a:spcBef>
+              <a:buFont typeface="Arial" panose="020B0604020202020204" pitchFamily="34" charset="0"/>
+              <a:buChar char="•"/>
+            </a:pPr>
+            <a:r>
+              <a:rPr lang="en-US" dirty="0"/>
+              <a:t>We can use </a:t>
+            </a:r>
+            <a:r>
+              <a:rPr lang="en-US" b="1" dirty="0"/>
+              <a:t>our own </a:t>
+            </a:r>
+            <a:r>
+              <a:rPr lang="en-US" dirty="0"/>
+              <a:t>server!! (RPI4)</a:t>
+            </a:r>
+          </a:p>
+          <a:p>
+            <a:pPr marL="285750" indent="-285750">
+              <a:spcBef>
+                <a:spcPts val="600"/>
+              </a:spcBef>
+              <a:buFont typeface="Arial" panose="020B0604020202020204" pitchFamily="34" charset="0"/>
+              <a:buChar char="•"/>
+            </a:pPr>
+            <a:r>
+              <a:rPr lang="en-US" dirty="0" err="1"/>
+              <a:t>Blynk</a:t>
+            </a:r>
+            <a:r>
+              <a:rPr lang="en-US" dirty="0"/>
+              <a:t> have a service to generate an application for us to be published on app store</a:t>
+            </a:r>
+          </a:p>
+          <a:p>
+            <a:pPr marL="285750" indent="-285750">
+              <a:spcBef>
+                <a:spcPts val="600"/>
+              </a:spcBef>
+              <a:buFont typeface="Arial" panose="020B0604020202020204" pitchFamily="34" charset="0"/>
+              <a:buChar char="•"/>
+            </a:pPr>
+            <a:r>
+              <a:rPr lang="en-US" dirty="0"/>
+              <a:t>Look at the course GIT for a user guide and a demo code </a:t>
             </a:r>
           </a:p>
         </p:txBody>
       </p:sp>
+      <p:pic>
+        <p:nvPicPr>
+          <p:cNvPr id="5" name="Picture 4">
+            <a:extLst>
+              <a:ext uri="{FF2B5EF4-FFF2-40B4-BE49-F238E27FC236}">
+                <a16:creationId xmlns:a16="http://schemas.microsoft.com/office/drawing/2014/main" id="{A0BC285A-91F1-48A8-A47B-91608C0FC074}"/>
+              </a:ext>
+            </a:extLst>
+          </p:cNvPr>
+          <p:cNvPicPr>
+            <a:picLocks noChangeAspect="1"/>
+          </p:cNvPicPr>
+          <p:nvPr/>
+        </p:nvPicPr>
+        <p:blipFill>
+          <a:blip r:embed="rId2"/>
+          <a:stretch>
+            <a:fillRect/>
+          </a:stretch>
+        </p:blipFill>
+        <p:spPr>
+          <a:xfrm>
+            <a:off x="2241473" y="155257"/>
+            <a:ext cx="1105054" cy="533474"/>
+          </a:xfrm>
+          <a:prstGeom prst="rect">
+            <a:avLst/>
+          </a:prstGeom>
+        </p:spPr>
+      </p:pic>
     </p:spTree>
     <p:extLst>
       <p:ext uri="{BB962C8B-B14F-4D97-AF65-F5344CB8AC3E}">
-        <p14:creationId xmlns:p14="http://schemas.microsoft.com/office/powerpoint/2010/main" val="3879790285"/>
+        <p14:creationId xmlns:p14="http://schemas.microsoft.com/office/powerpoint/2010/main" val="1709890549"/>
       </p:ext>
     </p:extLst>
   </p:cSld>
@@ -16649,6 +16826,198 @@
           <p:cNvPr id="2" name="Slide Number Placeholder 1">
             <a:extLst>
               <a:ext uri="{FF2B5EF4-FFF2-40B4-BE49-F238E27FC236}">
+                <a16:creationId xmlns:a16="http://schemas.microsoft.com/office/drawing/2014/main" id="{5BBD704F-9F97-45CE-8123-EC124FC35BB8}"/>
+              </a:ext>
+            </a:extLst>
+          </p:cNvPr>
+          <p:cNvSpPr>
+            <a:spLocks noGrp="1"/>
+          </p:cNvSpPr>
+          <p:nvPr>
+            <p:ph type="sldNum" sz="quarter" idx="12"/>
+          </p:nvPr>
+        </p:nvSpPr>
+        <p:spPr/>
+        <p:txBody>
+          <a:bodyPr/>
+          <a:lstStyle/>
+          <a:p>
+            <a:fld id="{EE2556C5-CE8C-6547-B838-EA80C61A4AF7}" type="slidenum">
+              <a:rPr lang="en-US" smtClean="0"/>
+              <a:pPr/>
+              <a:t>26</a:t>
+            </a:fld>
+            <a:endParaRPr lang="en-US" dirty="0"/>
+          </a:p>
+        </p:txBody>
+      </p:sp>
+      <p:sp>
+        <p:nvSpPr>
+          <p:cNvPr id="3" name="Title 2">
+            <a:extLst>
+              <a:ext uri="{FF2B5EF4-FFF2-40B4-BE49-F238E27FC236}">
+                <a16:creationId xmlns:a16="http://schemas.microsoft.com/office/drawing/2014/main" id="{4AE94B41-0E83-44E8-A5A7-9E145F9D82C8}"/>
+              </a:ext>
+            </a:extLst>
+          </p:cNvPr>
+          <p:cNvSpPr>
+            <a:spLocks noGrp="1"/>
+          </p:cNvSpPr>
+          <p:nvPr>
+            <p:ph type="title"/>
+          </p:nvPr>
+        </p:nvSpPr>
+        <p:spPr>
+          <a:xfrm>
+            <a:off x="455613" y="308848"/>
+            <a:ext cx="8229600" cy="374703"/>
+          </a:xfrm>
+        </p:spPr>
+        <p:txBody>
+          <a:bodyPr/>
+          <a:lstStyle/>
+          <a:p>
+            <a:r>
+              <a:rPr lang="en-US" dirty="0"/>
+              <a:t>FW update to our IOT device</a:t>
+            </a:r>
+          </a:p>
+        </p:txBody>
+      </p:sp>
+      <p:sp>
+        <p:nvSpPr>
+          <p:cNvPr id="4" name="Content Placeholder 3">
+            <a:extLst>
+              <a:ext uri="{FF2B5EF4-FFF2-40B4-BE49-F238E27FC236}">
+                <a16:creationId xmlns:a16="http://schemas.microsoft.com/office/drawing/2014/main" id="{E451509D-3026-4955-A8C4-45DF800E8074}"/>
+              </a:ext>
+            </a:extLst>
+          </p:cNvPr>
+          <p:cNvSpPr>
+            <a:spLocks noGrp="1"/>
+          </p:cNvSpPr>
+          <p:nvPr>
+            <p:ph sz="quarter" idx="13"/>
+          </p:nvPr>
+        </p:nvSpPr>
+        <p:spPr>
+          <a:xfrm>
+            <a:off x="455613" y="710535"/>
+            <a:ext cx="8228012" cy="3918616"/>
+          </a:xfrm>
+        </p:spPr>
+        <p:txBody>
+          <a:bodyPr/>
+          <a:lstStyle/>
+          <a:p>
+            <a:pPr marL="285750" indent="-285750">
+              <a:buFont typeface="Arial" panose="020B0604020202020204" pitchFamily="34" charset="0"/>
+              <a:buChar char="•"/>
+            </a:pPr>
+            <a:r>
+              <a:rPr lang="en-US" sz="1600" dirty="0"/>
+              <a:t>IOT device without OTA (Over The Air Update) is probably not and IOT device </a:t>
+            </a:r>
+            <a:r>
+              <a:rPr lang="en-US" sz="1600" dirty="0">
+                <a:sym typeface="Wingdings" panose="05000000000000000000" pitchFamily="2" charset="2"/>
+              </a:rPr>
+              <a:t></a:t>
+            </a:r>
+          </a:p>
+          <a:p>
+            <a:pPr marL="285750" indent="-285750">
+              <a:buFont typeface="Arial" panose="020B0604020202020204" pitchFamily="34" charset="0"/>
+              <a:buChar char="•"/>
+            </a:pPr>
+            <a:r>
+              <a:rPr lang="en-US" sz="1600" dirty="0">
+                <a:sym typeface="Wingdings" panose="05000000000000000000" pitchFamily="2" charset="2"/>
+              </a:rPr>
+              <a:t>We have few options to update the software of our ESP32</a:t>
+            </a:r>
+          </a:p>
+          <a:p>
+            <a:pPr marL="511175" lvl="1" indent="-285750">
+              <a:buFont typeface="Arial" panose="020B0604020202020204" pitchFamily="34" charset="0"/>
+              <a:buChar char="•"/>
+            </a:pPr>
+            <a:r>
+              <a:rPr lang="en-US" sz="1600" dirty="0">
+                <a:sym typeface="Wingdings" panose="05000000000000000000" pitchFamily="2" charset="2"/>
+              </a:rPr>
+              <a:t>Automatically Over The Air where the new FW is placed on our GIT account!</a:t>
+            </a:r>
+          </a:p>
+          <a:p>
+            <a:pPr marL="511175" lvl="1" indent="-285750">
+              <a:buFont typeface="Arial" panose="020B0604020202020204" pitchFamily="34" charset="0"/>
+              <a:buChar char="•"/>
+            </a:pPr>
+            <a:r>
+              <a:rPr lang="en-US" sz="1600" dirty="0"/>
+              <a:t>Through WEB page running on ESP32’s WEB server</a:t>
+            </a:r>
+          </a:p>
+          <a:p>
+            <a:pPr marL="511175" lvl="1" indent="-285750">
+              <a:buFont typeface="Arial" panose="020B0604020202020204" pitchFamily="34" charset="0"/>
+              <a:buChar char="•"/>
+            </a:pPr>
+            <a:r>
+              <a:rPr lang="en-US" sz="1600" dirty="0"/>
+              <a:t>From a file residing on a SD card</a:t>
+            </a:r>
+          </a:p>
+        </p:txBody>
+      </p:sp>
+    </p:spTree>
+    <p:extLst>
+      <p:ext uri="{BB962C8B-B14F-4D97-AF65-F5344CB8AC3E}">
+        <p14:creationId xmlns:p14="http://schemas.microsoft.com/office/powerpoint/2010/main" val="3879790285"/>
+      </p:ext>
+    </p:extLst>
+  </p:cSld>
+  <p:clrMapOvr>
+    <a:masterClrMapping/>
+  </p:clrMapOvr>
+  <mc:AlternateContent xmlns:mc="http://schemas.openxmlformats.org/markup-compatibility/2006" xmlns:p14="http://schemas.microsoft.com/office/powerpoint/2010/main">
+    <mc:Choice Requires="p14">
+      <p:transition spd="med" p14:dur="700">
+        <p:fade/>
+      </p:transition>
+    </mc:Choice>
+    <mc:Fallback xmlns="">
+      <p:transition spd="med">
+        <p:fade/>
+      </p:transition>
+    </mc:Fallback>
+  </mc:AlternateContent>
+</p:sld>
+</file>
+
+<file path=ppt/slides/slide27.xml><?xml version="1.0" encoding="utf-8"?>
+<p:sld xmlns:a="http://schemas.openxmlformats.org/drawingml/2006/main" xmlns:r="http://schemas.openxmlformats.org/officeDocument/2006/relationships" xmlns:p="http://schemas.openxmlformats.org/presentationml/2006/main">
+  <p:cSld>
+    <p:spTree>
+      <p:nvGrpSpPr>
+        <p:cNvPr id="1" name=""/>
+        <p:cNvGrpSpPr/>
+        <p:nvPr/>
+      </p:nvGrpSpPr>
+      <p:grpSpPr>
+        <a:xfrm>
+          <a:off x="0" y="0"/>
+          <a:ext cx="0" cy="0"/>
+          <a:chOff x="0" y="0"/>
+          <a:chExt cx="0" cy="0"/>
+        </a:xfrm>
+      </p:grpSpPr>
+      <p:sp>
+        <p:nvSpPr>
+          <p:cNvPr id="2" name="Slide Number Placeholder 1">
+            <a:extLst>
+              <a:ext uri="{FF2B5EF4-FFF2-40B4-BE49-F238E27FC236}">
                 <a16:creationId xmlns:a16="http://schemas.microsoft.com/office/drawing/2014/main" id="{D3DA242B-88B8-4AE7-A086-9AC916AAC80B}"/>
               </a:ext>
             </a:extLst>
@@ -16668,7 +17037,7 @@
             <a:fld id="{EE2556C5-CE8C-6547-B838-EA80C61A4AF7}" type="slidenum">
               <a:rPr lang="en-US" smtClean="0"/>
               <a:pPr/>
-              <a:t>26</a:t>
+              <a:t>27</a:t>
             </a:fld>
             <a:endParaRPr lang="en-US" dirty="0"/>
           </a:p>
@@ -16809,7 +17178,7 @@
 </p:sld>
 </file>
 
-<file path=ppt/slides/slide27.xml><?xml version="1.0" encoding="utf-8"?>
+<file path=ppt/slides/slide28.xml><?xml version="1.0" encoding="utf-8"?>
 <p:sld xmlns:a="http://schemas.openxmlformats.org/drawingml/2006/main" xmlns:r="http://schemas.openxmlformats.org/officeDocument/2006/relationships" xmlns:p="http://schemas.openxmlformats.org/presentationml/2006/main">
   <p:cSld>
     <p:spTree>
@@ -17009,6 +17378,19 @@
             </a:r>
           </a:p>
           <a:p>
+            <a:pPr marL="396875" lvl="1" indent="-171450">
+              <a:spcBef>
+                <a:spcPts val="600"/>
+              </a:spcBef>
+              <a:buFont typeface="Arial" panose="020B0604020202020204" pitchFamily="34" charset="0"/>
+              <a:buChar char="•"/>
+            </a:pPr>
+            <a:r>
+              <a:rPr lang="en-US" dirty="0"/>
+              <a:t>LoRa</a:t>
+            </a:r>
+          </a:p>
+          <a:p>
             <a:pPr marL="171450" indent="-171450">
               <a:spcBef>
                 <a:spcPts val="600"/>
@@ -17053,58 +17435,6 @@
             <a:r>
               <a:rPr lang="en-US" dirty="0"/>
               <a:t>)</a:t>
-            </a:r>
-          </a:p>
-          <a:p>
-            <a:pPr marL="171450" indent="-171450">
-              <a:spcBef>
-                <a:spcPts val="600"/>
-              </a:spcBef>
-              <a:buFont typeface="Arial" panose="020B0604020202020204" pitchFamily="34" charset="0"/>
-              <a:buChar char="•"/>
-            </a:pPr>
-            <a:r>
-              <a:rPr lang="en-US" dirty="0"/>
-              <a:t>ESP-Now protocol</a:t>
-            </a:r>
-          </a:p>
-          <a:p>
-            <a:pPr marL="171450" indent="-171450">
-              <a:spcBef>
-                <a:spcPts val="600"/>
-              </a:spcBef>
-              <a:buFont typeface="Arial" panose="020B0604020202020204" pitchFamily="34" charset="0"/>
-              <a:buChar char="•"/>
-            </a:pPr>
-            <a:r>
-              <a:rPr lang="en-US" dirty="0"/>
-              <a:t>Useful web services and protocols</a:t>
-            </a:r>
-          </a:p>
-          <a:p>
-            <a:pPr marL="171450" indent="-171450">
-              <a:spcBef>
-                <a:spcPts val="600"/>
-              </a:spcBef>
-              <a:buFont typeface="Arial" panose="020B0604020202020204" pitchFamily="34" charset="0"/>
-              <a:buChar char="•"/>
-            </a:pPr>
-            <a:r>
-              <a:rPr lang="en-US" dirty="0"/>
-              <a:t>Bluetooth</a:t>
-            </a:r>
-          </a:p>
-          <a:p>
-            <a:pPr marL="171450" indent="-171450">
-              <a:spcBef>
-                <a:spcPts val="600"/>
-              </a:spcBef>
-              <a:buFont typeface="Arial" panose="020B0604020202020204" pitchFamily="34" charset="0"/>
-              <a:buChar char="•"/>
-            </a:pPr>
-            <a:r>
-              <a:rPr lang="en-US" dirty="0"/>
-              <a:t>OTA (Over The Air update)</a:t>
             </a:r>
           </a:p>
         </p:txBody>
@@ -17156,7 +17486,7 @@
           <p:cNvPr id="2" name="Slide Number Placeholder 1">
             <a:extLst>
               <a:ext uri="{FF2B5EF4-FFF2-40B4-BE49-F238E27FC236}">
-                <a16:creationId xmlns:a16="http://schemas.microsoft.com/office/drawing/2014/main" id="{2DC88899-F4B1-4345-B2EA-7B087819FD19}"/>
+                <a16:creationId xmlns:a16="http://schemas.microsoft.com/office/drawing/2014/main" id="{E934EB1A-2475-5B44-BD4D-BDC457630A0B}"/>
               </a:ext>
             </a:extLst>
           </p:cNvPr>
@@ -17186,7 +17516,7 @@
           <p:cNvPr id="3" name="Title 2">
             <a:extLst>
               <a:ext uri="{FF2B5EF4-FFF2-40B4-BE49-F238E27FC236}">
-                <a16:creationId xmlns:a16="http://schemas.microsoft.com/office/drawing/2014/main" id="{6FB8D95E-DD54-408D-9B04-419C52CC2C6C}"/>
+                <a16:creationId xmlns:a16="http://schemas.microsoft.com/office/drawing/2014/main" id="{6E3C6D0A-8B55-9345-B774-BED156D93DEB}"/>
               </a:ext>
             </a:extLst>
           </p:cNvPr>
@@ -17200,7 +17530,7 @@
         <p:spPr>
           <a:xfrm>
             <a:off x="455613" y="308848"/>
-            <a:ext cx="8229600" cy="407682"/>
+            <a:ext cx="8229600" cy="386447"/>
           </a:xfrm>
         </p:spPr>
         <p:txBody>
@@ -17209,7 +17539,7 @@
           <a:p>
             <a:r>
               <a:rPr lang="en-US" dirty="0"/>
-              <a:t>IOT</a:t>
+              <a:t>Class 6 agenda:</a:t>
             </a:r>
           </a:p>
         </p:txBody>
@@ -17219,7 +17549,7 @@
           <p:cNvPr id="4" name="Content Placeholder 3">
             <a:extLst>
               <a:ext uri="{FF2B5EF4-FFF2-40B4-BE49-F238E27FC236}">
-                <a16:creationId xmlns:a16="http://schemas.microsoft.com/office/drawing/2014/main" id="{8085130C-84FC-4F97-823B-59322B394411}"/>
+                <a16:creationId xmlns:a16="http://schemas.microsoft.com/office/drawing/2014/main" id="{979EC5FC-28FF-4A46-99C9-D7F63D2F3E80}"/>
               </a:ext>
             </a:extLst>
           </p:cNvPr>
@@ -17232,153 +17562,84 @@
         </p:nvSpPr>
         <p:spPr>
           <a:xfrm>
-            <a:off x="455613" y="692547"/>
-            <a:ext cx="8228012" cy="3936604"/>
+            <a:off x="455613" y="721588"/>
+            <a:ext cx="8228012" cy="3982298"/>
           </a:xfrm>
         </p:spPr>
         <p:txBody>
           <a:bodyPr/>
           <a:lstStyle/>
           <a:p>
-            <a:pPr marL="285750" indent="-285750">
+            <a:pPr marL="171450" indent="-171450">
+              <a:spcBef>
+                <a:spcPts val="600"/>
+              </a:spcBef>
               <a:buFont typeface="Arial" panose="020B0604020202020204" pitchFamily="34" charset="0"/>
               <a:buChar char="•"/>
             </a:pPr>
             <a:r>
-              <a:rPr lang="en-US" sz="1400" b="1" dirty="0"/>
-              <a:t>The Internet of things (IoT) </a:t>
-            </a:r>
-            <a:r>
-              <a:rPr lang="en-US" sz="1400" dirty="0"/>
-              <a:t>describes the network of physical objects - a.k.a. "things“ - that are embedded with sensors, software, and other technologies for the purpose of connecting and exchanging data with other devices and systems over the </a:t>
-            </a:r>
-            <a:r>
-              <a:rPr lang="en-US" sz="1400" dirty="0">
-                <a:hlinkClick r:id="rId2">
-                  <a:extLst>
-                    <a:ext uri="{A12FA001-AC4F-418D-AE19-62706E023703}">
-                      <ahyp:hlinkClr xmlns:ahyp="http://schemas.microsoft.com/office/drawing/2018/hyperlinkcolor" val="tx"/>
-                    </a:ext>
-                  </a:extLst>
-                </a:hlinkClick>
-              </a:rPr>
-              <a:t>Internet</a:t>
-            </a:r>
-            <a:endParaRPr lang="en-US" sz="1400" dirty="0"/>
-          </a:p>
-          <a:p>
-            <a:pPr marL="285750" indent="-285750">
+              <a:rPr lang="en-US" dirty="0"/>
+              <a:t>ESP-Now protocol</a:t>
+            </a:r>
+          </a:p>
+          <a:p>
+            <a:pPr marL="171450" indent="-171450">
+              <a:spcBef>
+                <a:spcPts val="600"/>
+              </a:spcBef>
               <a:buFont typeface="Arial" panose="020B0604020202020204" pitchFamily="34" charset="0"/>
               <a:buChar char="•"/>
             </a:pPr>
             <a:r>
-              <a:rPr lang="en-US" sz="1400" dirty="0"/>
-              <a:t>Used for:</a:t>
-            </a:r>
-          </a:p>
-          <a:p>
-            <a:pPr marL="511175" lvl="1" indent="-285750">
+              <a:rPr lang="en-US" dirty="0"/>
+              <a:t>Useful web services and protocols</a:t>
+            </a:r>
+          </a:p>
+          <a:p>
+            <a:pPr marL="171450" indent="-171450">
+              <a:spcBef>
+                <a:spcPts val="600"/>
+              </a:spcBef>
               <a:buFont typeface="Arial" panose="020B0604020202020204" pitchFamily="34" charset="0"/>
               <a:buChar char="•"/>
             </a:pPr>
             <a:r>
-              <a:rPr lang="en-US" sz="1400" dirty="0"/>
-              <a:t>Smart Homes</a:t>
-            </a:r>
-          </a:p>
-          <a:p>
-            <a:pPr marL="511175" lvl="1" indent="-285750">
+              <a:rPr lang="en-US" dirty="0"/>
+              <a:t>Bluetooth</a:t>
+            </a:r>
+          </a:p>
+          <a:p>
+            <a:pPr marL="171450" indent="-171450">
+              <a:spcBef>
+                <a:spcPts val="600"/>
+              </a:spcBef>
               <a:buFont typeface="Arial" panose="020B0604020202020204" pitchFamily="34" charset="0"/>
               <a:buChar char="•"/>
             </a:pPr>
             <a:r>
-              <a:rPr lang="en-US" sz="1400" dirty="0"/>
-              <a:t>Elder care</a:t>
-            </a:r>
-          </a:p>
-          <a:p>
-            <a:pPr marL="511175" lvl="1" indent="-285750">
+              <a:rPr lang="en-US" dirty="0"/>
+              <a:t>OTA (Over The Air update)</a:t>
+            </a:r>
+          </a:p>
+          <a:p>
+            <a:pPr marL="171450" indent="-171450">
+              <a:spcBef>
+                <a:spcPts val="600"/>
+              </a:spcBef>
               <a:buFont typeface="Arial" panose="020B0604020202020204" pitchFamily="34" charset="0"/>
               <a:buChar char="•"/>
             </a:pPr>
             <a:r>
-              <a:rPr lang="en-US" sz="1400" dirty="0"/>
-              <a:t>Agriculture</a:t>
-            </a:r>
-          </a:p>
-          <a:p>
-            <a:pPr marL="511175" lvl="1" indent="-285750">
-              <a:buFont typeface="Arial" panose="020B0604020202020204" pitchFamily="34" charset="0"/>
-              <a:buChar char="•"/>
-            </a:pPr>
-            <a:r>
-              <a:rPr lang="en-US" sz="1400" dirty="0"/>
-              <a:t>Environmental monitoring</a:t>
-            </a:r>
-          </a:p>
-          <a:p>
-            <a:pPr marL="511175" lvl="1" indent="-285750">
-              <a:buFont typeface="Arial" panose="020B0604020202020204" pitchFamily="34" charset="0"/>
-              <a:buChar char="•"/>
-            </a:pPr>
-            <a:r>
-              <a:rPr lang="en-US" sz="1400" dirty="0"/>
-              <a:t>And more ….</a:t>
+              <a:rPr lang="en-US" dirty="0"/>
+              <a:t>LoRa</a:t>
             </a:r>
           </a:p>
         </p:txBody>
       </p:sp>
-      <p:pic>
-        <p:nvPicPr>
-          <p:cNvPr id="1028" name="Picture 4" descr="What Do the Next Five Years Hold For the Internet of Things?">
-            <a:extLst>
-              <a:ext uri="{FF2B5EF4-FFF2-40B4-BE49-F238E27FC236}">
-                <a16:creationId xmlns:a16="http://schemas.microsoft.com/office/drawing/2014/main" id="{944B019E-E476-479A-9A18-98A728BC966B}"/>
-              </a:ext>
-            </a:extLst>
-          </p:cNvPr>
-          <p:cNvPicPr>
-            <a:picLocks noChangeAspect="1" noChangeArrowheads="1"/>
-          </p:cNvPicPr>
-          <p:nvPr/>
-        </p:nvPicPr>
-        <p:blipFill>
-          <a:blip r:embed="rId3">
-            <a:extLst>
-              <a:ext uri="{28A0092B-C50C-407E-A947-70E740481C1C}">
-                <a14:useLocalDpi xmlns:a14="http://schemas.microsoft.com/office/drawing/2010/main" val="0"/>
-              </a:ext>
-            </a:extLst>
-          </a:blip>
-          <a:srcRect/>
-          <a:stretch>
-            <a:fillRect/>
-          </a:stretch>
-        </p:blipFill>
-        <p:spPr bwMode="auto">
-          <a:xfrm>
-            <a:off x="3516391" y="1463039"/>
-            <a:ext cx="5208152" cy="3015442"/>
-          </a:xfrm>
-          <a:prstGeom prst="rect">
-            <a:avLst/>
-          </a:prstGeom>
-          <a:noFill/>
-          <a:extLst>
-            <a:ext uri="{909E8E84-426E-40DD-AFC4-6F175D3DCCD1}">
-              <a14:hiddenFill xmlns:a14="http://schemas.microsoft.com/office/drawing/2010/main">
-                <a:solidFill>
-                  <a:srgbClr val="FFFFFF"/>
-                </a:solidFill>
-              </a14:hiddenFill>
-            </a:ext>
-          </a:extLst>
-        </p:spPr>
-      </p:pic>
     </p:spTree>
     <p:extLst>
       <p:ext uri="{BB962C8B-B14F-4D97-AF65-F5344CB8AC3E}">
-        <p14:creationId xmlns:p14="http://schemas.microsoft.com/office/powerpoint/2010/main" val="3239562473"/>
+        <p14:creationId xmlns:p14="http://schemas.microsoft.com/office/powerpoint/2010/main" val="758553892"/>
       </p:ext>
     </p:extLst>
   </p:cSld>
@@ -17422,7 +17683,7 @@
           <p:cNvPr id="2" name="Slide Number Placeholder 1">
             <a:extLst>
               <a:ext uri="{FF2B5EF4-FFF2-40B4-BE49-F238E27FC236}">
-                <a16:creationId xmlns:a16="http://schemas.microsoft.com/office/drawing/2014/main" id="{17744C99-9A24-4D6F-8D3C-A4CB41E876CA}"/>
+                <a16:creationId xmlns:a16="http://schemas.microsoft.com/office/drawing/2014/main" id="{2DC88899-F4B1-4345-B2EA-7B087819FD19}"/>
               </a:ext>
             </a:extLst>
           </p:cNvPr>
@@ -17452,7 +17713,7 @@
           <p:cNvPr id="3" name="Title 2">
             <a:extLst>
               <a:ext uri="{FF2B5EF4-FFF2-40B4-BE49-F238E27FC236}">
-                <a16:creationId xmlns:a16="http://schemas.microsoft.com/office/drawing/2014/main" id="{DFCD3F10-262A-49AA-92F3-A28E2073C0CF}"/>
+                <a16:creationId xmlns:a16="http://schemas.microsoft.com/office/drawing/2014/main" id="{6FB8D95E-DD54-408D-9B04-419C52CC2C6C}"/>
               </a:ext>
             </a:extLst>
           </p:cNvPr>
@@ -17466,21 +17727,16 @@
         <p:spPr>
           <a:xfrm>
             <a:off x="455613" y="308848"/>
-            <a:ext cx="8229600" cy="379883"/>
+            <a:ext cx="8229600" cy="407682"/>
           </a:xfrm>
         </p:spPr>
         <p:txBody>
           <a:bodyPr/>
           <a:lstStyle/>
           <a:p>
-            <a:pPr>
-              <a:spcBef>
-                <a:spcPts val="600"/>
-              </a:spcBef>
-            </a:pPr>
-            <a:r>
-              <a:rPr lang="en-US" sz="3600" dirty="0"/>
-              <a:t>Wi-fi basics</a:t>
+            <a:r>
+              <a:rPr lang="en-US" dirty="0"/>
+              <a:t>IOT</a:t>
             </a:r>
           </a:p>
         </p:txBody>
@@ -17490,7 +17746,7 @@
           <p:cNvPr id="4" name="Content Placeholder 3">
             <a:extLst>
               <a:ext uri="{FF2B5EF4-FFF2-40B4-BE49-F238E27FC236}">
-                <a16:creationId xmlns:a16="http://schemas.microsoft.com/office/drawing/2014/main" id="{0DA5B5C6-365A-4798-8EE3-9AAC1659E9D7}"/>
+                <a16:creationId xmlns:a16="http://schemas.microsoft.com/office/drawing/2014/main" id="{8085130C-84FC-4F97-823B-59322B394411}"/>
               </a:ext>
             </a:extLst>
           </p:cNvPr>
@@ -17503,8 +17759,8 @@
         </p:nvSpPr>
         <p:spPr>
           <a:xfrm>
-            <a:off x="455613" y="715109"/>
-            <a:ext cx="8228012" cy="3914042"/>
+            <a:off x="455613" y="692547"/>
+            <a:ext cx="8228012" cy="3936604"/>
           </a:xfrm>
         </p:spPr>
         <p:txBody>
@@ -17512,127 +17768,144 @@
           <a:lstStyle/>
           <a:p>
             <a:pPr marL="285750" indent="-285750">
-              <a:spcBef>
-                <a:spcPts val="600"/>
-              </a:spcBef>
               <a:buFont typeface="Arial" panose="020B0604020202020204" pitchFamily="34" charset="0"/>
               <a:buChar char="•"/>
             </a:pPr>
             <a:r>
-              <a:rPr lang="en-US" dirty="0"/>
-              <a:t>Wi-Fi basics:</a:t>
-            </a:r>
-          </a:p>
-          <a:p>
-            <a:pPr marL="511175" lvl="1" indent="-285750">
-              <a:spcBef>
-                <a:spcPts val="600"/>
-              </a:spcBef>
+              <a:rPr lang="en-US" sz="1400" b="1" dirty="0"/>
+              <a:t>The Internet of things (IoT) </a:t>
+            </a:r>
+            <a:r>
+              <a:rPr lang="en-US" sz="1400" dirty="0"/>
+              <a:t>describes the network of physical objects - a.k.a. "things“ - that are embedded with sensors, software, and other technologies for the purpose of connecting and exchanging data with other devices and systems over the </a:t>
+            </a:r>
+            <a:r>
+              <a:rPr lang="en-US" sz="1400" dirty="0">
+                <a:hlinkClick r:id="rId2">
+                  <a:extLst>
+                    <a:ext uri="{A12FA001-AC4F-418D-AE19-62706E023703}">
+                      <ahyp:hlinkClr xmlns:ahyp="http://schemas.microsoft.com/office/drawing/2018/hyperlinkcolor" val="tx"/>
+                    </a:ext>
+                  </a:extLst>
+                </a:hlinkClick>
+              </a:rPr>
+              <a:t>Internet</a:t>
+            </a:r>
+            <a:endParaRPr lang="en-US" sz="1400" dirty="0"/>
+          </a:p>
+          <a:p>
+            <a:pPr marL="285750" indent="-285750">
               <a:buFont typeface="Arial" panose="020B0604020202020204" pitchFamily="34" charset="0"/>
               <a:buChar char="•"/>
             </a:pPr>
             <a:r>
-              <a:rPr lang="en-US" dirty="0"/>
-              <a:t>Family of wireless networking technologies</a:t>
+              <a:rPr lang="en-US" sz="1400" dirty="0"/>
+              <a:t>Used for:</a:t>
             </a:r>
           </a:p>
           <a:p>
             <a:pPr marL="511175" lvl="1" indent="-285750">
-              <a:spcBef>
-                <a:spcPts val="600"/>
-              </a:spcBef>
               <a:buFont typeface="Arial" panose="020B0604020202020204" pitchFamily="34" charset="0"/>
               <a:buChar char="•"/>
             </a:pPr>
             <a:r>
-              <a:rPr lang="en-US" dirty="0">
-                <a:hlinkClick r:id="rId2" tooltip="IEEE 802.11"/>
-              </a:rPr>
-              <a:t>IEEE 802.11</a:t>
-            </a:r>
-            <a:r>
-              <a:rPr lang="en-US" dirty="0"/>
-              <a:t> family of standards</a:t>
+              <a:rPr lang="en-US" sz="1400" dirty="0"/>
+              <a:t>Smart Homes</a:t>
             </a:r>
           </a:p>
           <a:p>
             <a:pPr marL="511175" lvl="1" indent="-285750">
-              <a:spcBef>
-                <a:spcPts val="600"/>
-              </a:spcBef>
               <a:buFont typeface="Arial" panose="020B0604020202020204" pitchFamily="34" charset="0"/>
               <a:buChar char="•"/>
             </a:pPr>
             <a:r>
-              <a:rPr lang="en-US" dirty="0"/>
-              <a:t>Used for </a:t>
-            </a:r>
-            <a:r>
-              <a:rPr lang="en-US" dirty="0">
-                <a:hlinkClick r:id="rId3" tooltip="Wireless LAN"/>
-              </a:rPr>
-              <a:t>local area networking</a:t>
-            </a:r>
-            <a:r>
-              <a:rPr lang="en-US" dirty="0"/>
-              <a:t> of devices and </a:t>
-            </a:r>
-            <a:r>
-              <a:rPr lang="en-US" dirty="0">
-                <a:hlinkClick r:id="rId4" tooltip="Internet"/>
-              </a:rPr>
-              <a:t>Internet</a:t>
-            </a:r>
-            <a:r>
-              <a:rPr lang="en-US" dirty="0"/>
-              <a:t> access</a:t>
+              <a:rPr lang="en-US" sz="1400" dirty="0"/>
+              <a:t>Elder care</a:t>
             </a:r>
           </a:p>
           <a:p>
             <a:pPr marL="511175" lvl="1" indent="-285750">
-              <a:spcBef>
-                <a:spcPts val="600"/>
-              </a:spcBef>
               <a:buFont typeface="Arial" panose="020B0604020202020204" pitchFamily="34" charset="0"/>
               <a:buChar char="•"/>
             </a:pPr>
             <a:r>
-              <a:rPr lang="en-US" dirty="0"/>
-              <a:t>20-150 meters range</a:t>
+              <a:rPr lang="en-US" sz="1400" dirty="0"/>
+              <a:t>Agriculture</a:t>
             </a:r>
           </a:p>
           <a:p>
             <a:pPr marL="511175" lvl="1" indent="-285750">
-              <a:spcBef>
-                <a:spcPts val="600"/>
-              </a:spcBef>
               <a:buFont typeface="Arial" panose="020B0604020202020204" pitchFamily="34" charset="0"/>
               <a:buChar char="•"/>
             </a:pPr>
             <a:r>
-              <a:rPr lang="en-US" dirty="0"/>
-              <a:t>Standard defines 16 channels for communication</a:t>
-            </a:r>
-          </a:p>
-          <a:p>
-            <a:pPr marL="857250" lvl="2" indent="-285750">
-              <a:spcBef>
-                <a:spcPts val="600"/>
-              </a:spcBef>
+              <a:rPr lang="en-US" sz="1400" dirty="0"/>
+              <a:t>Environmental monitoring</a:t>
+            </a:r>
+          </a:p>
+          <a:p>
+            <a:pPr marL="511175" lvl="1" indent="-285750">
               <a:buFont typeface="Arial" panose="020B0604020202020204" pitchFamily="34" charset="0"/>
               <a:buChar char="•"/>
             </a:pPr>
             <a:r>
-              <a:rPr lang="en-US" dirty="0"/>
-              <a:t>Enables multiple access points at the same physical location</a:t>
+              <a:rPr lang="en-US" sz="1400" dirty="0"/>
+              <a:t>And more ….</a:t>
             </a:r>
           </a:p>
         </p:txBody>
       </p:sp>
+      <p:pic>
+        <p:nvPicPr>
+          <p:cNvPr id="1028" name="Picture 4" descr="What Do the Next Five Years Hold For the Internet of Things?">
+            <a:extLst>
+              <a:ext uri="{FF2B5EF4-FFF2-40B4-BE49-F238E27FC236}">
+                <a16:creationId xmlns:a16="http://schemas.microsoft.com/office/drawing/2014/main" id="{944B019E-E476-479A-9A18-98A728BC966B}"/>
+              </a:ext>
+            </a:extLst>
+          </p:cNvPr>
+          <p:cNvPicPr>
+            <a:picLocks noChangeAspect="1" noChangeArrowheads="1"/>
+          </p:cNvPicPr>
+          <p:nvPr/>
+        </p:nvPicPr>
+        <p:blipFill>
+          <a:blip r:embed="rId3">
+            <a:extLst>
+              <a:ext uri="{28A0092B-C50C-407E-A947-70E740481C1C}">
+                <a14:useLocalDpi xmlns:a14="http://schemas.microsoft.com/office/drawing/2010/main" val="0"/>
+              </a:ext>
+            </a:extLst>
+          </a:blip>
+          <a:srcRect/>
+          <a:stretch>
+            <a:fillRect/>
+          </a:stretch>
+        </p:blipFill>
+        <p:spPr bwMode="auto">
+          <a:xfrm>
+            <a:off x="3516391" y="1463039"/>
+            <a:ext cx="5208152" cy="3015442"/>
+          </a:xfrm>
+          <a:prstGeom prst="rect">
+            <a:avLst/>
+          </a:prstGeom>
+          <a:noFill/>
+          <a:extLst>
+            <a:ext uri="{909E8E84-426E-40DD-AFC4-6F175D3DCCD1}">
+              <a14:hiddenFill xmlns:a14="http://schemas.microsoft.com/office/drawing/2010/main">
+                <a:solidFill>
+                  <a:srgbClr val="FFFFFF"/>
+                </a:solidFill>
+              </a14:hiddenFill>
+            </a:ext>
+          </a:extLst>
+        </p:spPr>
+      </p:pic>
     </p:spTree>
     <p:extLst>
       <p:ext uri="{BB962C8B-B14F-4D97-AF65-F5344CB8AC3E}">
-        <p14:creationId xmlns:p14="http://schemas.microsoft.com/office/powerpoint/2010/main" val="3475864705"/>
+        <p14:creationId xmlns:p14="http://schemas.microsoft.com/office/powerpoint/2010/main" val="3239562473"/>
       </p:ext>
     </p:extLst>
   </p:cSld>
@@ -17734,13 +18007,8 @@
             </a:pPr>
             <a:r>
               <a:rPr lang="en-US" sz="3600" dirty="0"/>
-              <a:t>Wi-fi basics: AP and </a:t>
-            </a:r>
-            <a:r>
-              <a:rPr lang="en-US" sz="3600" dirty="0" err="1"/>
-              <a:t>sta</a:t>
-            </a:r>
-            <a:endParaRPr lang="en-US" sz="3600" dirty="0"/>
+              <a:t>Wi-fi basics</a:t>
+            </a:r>
           </a:p>
         </p:txBody>
       </p:sp>
@@ -17762,7 +18030,7 @@
         </p:nvSpPr>
         <p:spPr>
           <a:xfrm>
-            <a:off x="455613" y="669926"/>
+            <a:off x="455613" y="715109"/>
             <a:ext cx="8228012" cy="3914042"/>
           </a:xfrm>
         </p:spPr>
@@ -17778,8 +18046,8 @@
               <a:buChar char="•"/>
             </a:pPr>
             <a:r>
-              <a:rPr lang="en-US" sz="1600" dirty="0"/>
-              <a:t>AP – Access point</a:t>
+              <a:rPr lang="en-US" dirty="0"/>
+              <a:t>Wi-Fi basics:</a:t>
             </a:r>
           </a:p>
           <a:p>
@@ -17791,8 +18059,8 @@
               <a:buChar char="•"/>
             </a:pPr>
             <a:r>
-              <a:rPr lang="en-US" sz="1600" dirty="0"/>
-              <a:t>Enable the creation of a local Wi-Fi network</a:t>
+              <a:rPr lang="en-US" dirty="0"/>
+              <a:t>Family of wireless networking technologies</a:t>
             </a:r>
           </a:p>
           <a:p>
@@ -17804,8 +18072,14 @@
               <a:buChar char="•"/>
             </a:pPr>
             <a:r>
-              <a:rPr lang="en-US" sz="1600" dirty="0"/>
-              <a:t>We connect to an access point</a:t>
+              <a:rPr lang="en-US" dirty="0">
+                <a:hlinkClick r:id="rId2" tooltip="IEEE 802.11"/>
+              </a:rPr>
+              <a:t>IEEE 802.11</a:t>
+            </a:r>
+            <a:r>
+              <a:rPr lang="en-US" dirty="0"/>
+              <a:t> family of standards</a:t>
             </a:r>
           </a:p>
           <a:p>
@@ -17817,12 +18091,28 @@
               <a:buChar char="•"/>
             </a:pPr>
             <a:r>
-              <a:rPr lang="en-US" sz="1600" b="1" u="sng" dirty="0"/>
-              <a:t>With or without</a:t>
-            </a:r>
-            <a:r>
-              <a:rPr lang="en-US" sz="1600" dirty="0"/>
-              <a:t> access to the internet</a:t>
+              <a:rPr lang="en-US" dirty="0"/>
+              <a:t>Used for </a:t>
+            </a:r>
+            <a:r>
+              <a:rPr lang="en-US" dirty="0">
+                <a:hlinkClick r:id="rId3" tooltip="Wireless LAN"/>
+              </a:rPr>
+              <a:t>local area networking</a:t>
+            </a:r>
+            <a:r>
+              <a:rPr lang="en-US" dirty="0"/>
+              <a:t> of devices and </a:t>
+            </a:r>
+            <a:r>
+              <a:rPr lang="en-US" dirty="0">
+                <a:hlinkClick r:id="rId4" tooltip="Internet"/>
+              </a:rPr>
+              <a:t>Internet</a:t>
+            </a:r>
+            <a:r>
+              <a:rPr lang="en-US" dirty="0"/>
+              <a:t> access</a:t>
             </a:r>
           </a:p>
           <a:p>
@@ -17834,8 +18124,8 @@
               <a:buChar char="•"/>
             </a:pPr>
             <a:r>
-              <a:rPr lang="en-US" sz="1600" dirty="0"/>
-              <a:t>Uses a specific channel which can be modified while operating</a:t>
+              <a:rPr lang="en-US" dirty="0"/>
+              <a:t>20-150 meters range</a:t>
             </a:r>
           </a:p>
           <a:p>
@@ -17847,12 +18137,12 @@
               <a:buChar char="•"/>
             </a:pPr>
             <a:r>
-              <a:rPr lang="en-US" sz="1600" dirty="0"/>
-              <a:t>Has limitation for number of connected devices</a:t>
-            </a:r>
-          </a:p>
-          <a:p>
-            <a:pPr marL="511175" lvl="1" indent="-285750">
+              <a:rPr lang="en-US" dirty="0"/>
+              <a:t>Standard defines 16 channels for communication</a:t>
+            </a:r>
+          </a:p>
+          <a:p>
+            <a:pPr marL="857250" lvl="2" indent="-285750">
               <a:spcBef>
                 <a:spcPts val="600"/>
               </a:spcBef>
@@ -17860,217 +18150,8 @@
               <a:buChar char="•"/>
             </a:pPr>
             <a:r>
-              <a:rPr lang="en-US" sz="1600" dirty="0"/>
-              <a:t>Has a name and an optional password</a:t>
-            </a:r>
-          </a:p>
-          <a:p>
-            <a:pPr marL="511175" lvl="1" indent="-285750">
-              <a:spcBef>
-                <a:spcPts val="600"/>
-              </a:spcBef>
-              <a:buFont typeface="Arial" panose="020B0604020202020204" pitchFamily="34" charset="0"/>
-              <a:buChar char="•"/>
-            </a:pPr>
-            <a:r>
-              <a:rPr lang="en-US" sz="1600" dirty="0"/>
-              <a:t>Can use an encrypted communication protocol</a:t>
-            </a:r>
-          </a:p>
-          <a:p>
-            <a:pPr marL="285750" indent="-285750">
-              <a:spcBef>
-                <a:spcPts val="600"/>
-              </a:spcBef>
-              <a:buFont typeface="Arial" panose="020B0604020202020204" pitchFamily="34" charset="0"/>
-              <a:buChar char="•"/>
-            </a:pPr>
-            <a:r>
-              <a:rPr lang="en-US" sz="1600" dirty="0"/>
-              <a:t>STA – Station</a:t>
-            </a:r>
-          </a:p>
-          <a:p>
-            <a:pPr marL="511175" lvl="1" indent="-285750">
-              <a:spcBef>
-                <a:spcPts val="600"/>
-              </a:spcBef>
-              <a:buFont typeface="Arial" panose="020B0604020202020204" pitchFamily="34" charset="0"/>
-              <a:buChar char="•"/>
-            </a:pPr>
-            <a:r>
-              <a:rPr lang="en-US" sz="1600" dirty="0"/>
-              <a:t>An end point device </a:t>
-            </a:r>
-          </a:p>
-          <a:p>
-            <a:pPr marL="511175" lvl="1" indent="-285750">
-              <a:spcBef>
-                <a:spcPts val="600"/>
-              </a:spcBef>
-              <a:buFont typeface="Arial" panose="020B0604020202020204" pitchFamily="34" charset="0"/>
-              <a:buChar char="•"/>
-            </a:pPr>
-            <a:r>
-              <a:rPr lang="en-US" sz="1600" dirty="0"/>
-              <a:t>Connects to an AP</a:t>
-            </a:r>
-          </a:p>
-          <a:p>
-            <a:pPr marL="511175" lvl="1" indent="-285750">
-              <a:spcBef>
-                <a:spcPts val="600"/>
-              </a:spcBef>
-              <a:buFont typeface="Arial" panose="020B0604020202020204" pitchFamily="34" charset="0"/>
-              <a:buChar char="•"/>
-            </a:pPr>
-            <a:r>
-              <a:rPr lang="en-US" sz="1600" dirty="0"/>
-              <a:t>While searching for an AP needs to scan different channels until found</a:t>
-            </a:r>
-          </a:p>
-          <a:p>
-            <a:pPr marL="511175" lvl="1" indent="-285750">
-              <a:spcBef>
-                <a:spcPts val="600"/>
-              </a:spcBef>
-              <a:buFont typeface="Arial" panose="020B0604020202020204" pitchFamily="34" charset="0"/>
-              <a:buChar char="•"/>
-            </a:pPr>
-            <a:r>
-              <a:rPr lang="en-US" sz="1600" dirty="0"/>
-              <a:t>Station name and password can be saved on EEPROM, SPIFFS or SDCARD</a:t>
-            </a:r>
-          </a:p>
-        </p:txBody>
-      </p:sp>
-      <p:pic>
-        <p:nvPicPr>
-          <p:cNvPr id="6" name="Picture 2" descr="Image result for wi-fi images&quot;">
-            <a:extLst>
-              <a:ext uri="{FF2B5EF4-FFF2-40B4-BE49-F238E27FC236}">
-                <a16:creationId xmlns:a16="http://schemas.microsoft.com/office/drawing/2014/main" id="{2BF78BDA-0CF0-47AB-AE3A-C531C322AC75}"/>
-              </a:ext>
-            </a:extLst>
-          </p:cNvPr>
-          <p:cNvPicPr>
-            <a:picLocks noChangeAspect="1" noChangeArrowheads="1"/>
-          </p:cNvPicPr>
-          <p:nvPr/>
-        </p:nvPicPr>
-        <p:blipFill>
-          <a:blip r:embed="rId2">
-            <a:extLst>
-              <a:ext uri="{28A0092B-C50C-407E-A947-70E740481C1C}">
-                <a14:useLocalDpi xmlns:a14="http://schemas.microsoft.com/office/drawing/2010/main" val="0"/>
-              </a:ext>
-            </a:extLst>
-          </a:blip>
-          <a:srcRect/>
-          <a:stretch>
-            <a:fillRect/>
-          </a:stretch>
-        </p:blipFill>
-        <p:spPr bwMode="auto">
-          <a:xfrm>
-            <a:off x="5987842" y="192348"/>
-            <a:ext cx="2208435" cy="1595391"/>
-          </a:xfrm>
-          <a:prstGeom prst="rect">
-            <a:avLst/>
-          </a:prstGeom>
-          <a:noFill/>
-          <a:extLst>
-            <a:ext uri="{909E8E84-426E-40DD-AFC4-6F175D3DCCD1}">
-              <a14:hiddenFill xmlns:a14="http://schemas.microsoft.com/office/drawing/2010/main">
-                <a:solidFill>
-                  <a:srgbClr val="FFFFFF"/>
-                </a:solidFill>
-              </a14:hiddenFill>
-            </a:ext>
-          </a:extLst>
-        </p:spPr>
-      </p:pic>
-      <p:sp>
-        <p:nvSpPr>
-          <p:cNvPr id="5" name="TextBox 4">
-            <a:extLst>
-              <a:ext uri="{FF2B5EF4-FFF2-40B4-BE49-F238E27FC236}">
-                <a16:creationId xmlns:a16="http://schemas.microsoft.com/office/drawing/2014/main" id="{DF4DD946-E3AD-4C68-8E63-1A64F115D7C3}"/>
-              </a:ext>
-            </a:extLst>
-          </p:cNvPr>
-          <p:cNvSpPr txBox="1"/>
-          <p:nvPr/>
-        </p:nvSpPr>
-        <p:spPr>
-          <a:xfrm>
-            <a:off x="7003282" y="1757779"/>
-            <a:ext cx="177553" cy="169277"/>
-          </a:xfrm>
-          <a:prstGeom prst="rect">
-            <a:avLst/>
-          </a:prstGeom>
-          <a:noFill/>
-        </p:spPr>
-        <p:txBody>
-          <a:bodyPr vert="horz" wrap="square" lIns="0" tIns="0" rIns="0" bIns="0" rtlCol="0">
-            <a:spAutoFit/>
-          </a:bodyPr>
-          <a:lstStyle/>
-          <a:p>
-            <a:r>
-              <a:rPr lang="en-US" sz="1100" dirty="0">
-                <a:solidFill>
-                  <a:srgbClr val="003C71"/>
-                </a:solidFill>
-                <a:highlight>
-                  <a:srgbClr val="FFFF00"/>
-                </a:highlight>
-              </a:rPr>
-              <a:t>AP</a:t>
-            </a:r>
-          </a:p>
-        </p:txBody>
-      </p:sp>
-      <p:sp>
-        <p:nvSpPr>
-          <p:cNvPr id="7" name="TextBox 6">
-            <a:extLst>
-              <a:ext uri="{FF2B5EF4-FFF2-40B4-BE49-F238E27FC236}">
-                <a16:creationId xmlns:a16="http://schemas.microsoft.com/office/drawing/2014/main" id="{EB50E1A9-71D0-4C32-A40A-D28F6163A5EE}"/>
-              </a:ext>
-            </a:extLst>
-          </p:cNvPr>
-          <p:cNvSpPr txBox="1"/>
-          <p:nvPr/>
-        </p:nvSpPr>
-        <p:spPr>
-          <a:xfrm>
-            <a:off x="5965794" y="308848"/>
-            <a:ext cx="636233" cy="338554"/>
-          </a:xfrm>
-          <a:prstGeom prst="rect">
-            <a:avLst/>
-          </a:prstGeom>
-          <a:noFill/>
-        </p:spPr>
-        <p:txBody>
-          <a:bodyPr vert="horz" wrap="square" lIns="0" tIns="0" rIns="0" bIns="0" rtlCol="0">
-            <a:spAutoFit/>
-          </a:bodyPr>
-          <a:lstStyle/>
-          <a:p>
-            <a:r>
-              <a:rPr lang="en-US" sz="1100" dirty="0">
-                <a:solidFill>
-                  <a:srgbClr val="003C71"/>
-                </a:solidFill>
-                <a:highlight>
-                  <a:srgbClr val="FFFF00"/>
-                </a:highlight>
-              </a:rPr>
-              <a:t>End Point device</a:t>
+              <a:rPr lang="en-US" dirty="0"/>
+              <a:t>Enables multiple access points at the same physical location</a:t>
             </a:r>
           </a:p>
         </p:txBody>
@@ -18078,7 +18159,7 @@
     </p:spTree>
     <p:extLst>
       <p:ext uri="{BB962C8B-B14F-4D97-AF65-F5344CB8AC3E}">
-        <p14:creationId xmlns:p14="http://schemas.microsoft.com/office/powerpoint/2010/main" val="3609594223"/>
+        <p14:creationId xmlns:p14="http://schemas.microsoft.com/office/powerpoint/2010/main" val="3475864705"/>
       </p:ext>
     </p:extLst>
   </p:cSld>
@@ -18180,8 +18261,13 @@
             </a:pPr>
             <a:r>
               <a:rPr lang="en-US" sz="3600" dirty="0"/>
-              <a:t>Wi-fi basics: our esp32 </a:t>
-            </a:r>
+              <a:t>Wi-fi basics: AP and </a:t>
+            </a:r>
+            <a:r>
+              <a:rPr lang="en-US" sz="3600" dirty="0" err="1"/>
+              <a:t>sta</a:t>
+            </a:r>
+            <a:endParaRPr lang="en-US" sz="3600" dirty="0"/>
           </a:p>
         </p:txBody>
       </p:sp>
@@ -18203,7 +18289,7 @@
         </p:nvSpPr>
         <p:spPr>
           <a:xfrm>
-            <a:off x="455613" y="715109"/>
+            <a:off x="455613" y="669926"/>
             <a:ext cx="8228012" cy="3914042"/>
           </a:xfrm>
         </p:spPr>
@@ -18219,8 +18305,103 @@
               <a:buChar char="•"/>
             </a:pPr>
             <a:r>
-              <a:rPr lang="en-US" dirty="0"/>
-              <a:t>Runs full network stack</a:t>
+              <a:rPr lang="en-US" sz="1600" dirty="0"/>
+              <a:t>AP – Access point</a:t>
+            </a:r>
+          </a:p>
+          <a:p>
+            <a:pPr marL="511175" lvl="1" indent="-285750">
+              <a:spcBef>
+                <a:spcPts val="600"/>
+              </a:spcBef>
+              <a:buFont typeface="Arial" panose="020B0604020202020204" pitchFamily="34" charset="0"/>
+              <a:buChar char="•"/>
+            </a:pPr>
+            <a:r>
+              <a:rPr lang="en-US" sz="1600" dirty="0"/>
+              <a:t>Enable the creation of a local Wi-Fi network</a:t>
+            </a:r>
+          </a:p>
+          <a:p>
+            <a:pPr marL="511175" lvl="1" indent="-285750">
+              <a:spcBef>
+                <a:spcPts val="600"/>
+              </a:spcBef>
+              <a:buFont typeface="Arial" panose="020B0604020202020204" pitchFamily="34" charset="0"/>
+              <a:buChar char="•"/>
+            </a:pPr>
+            <a:r>
+              <a:rPr lang="en-US" sz="1600" dirty="0"/>
+              <a:t>We connect to an access point</a:t>
+            </a:r>
+          </a:p>
+          <a:p>
+            <a:pPr marL="511175" lvl="1" indent="-285750">
+              <a:spcBef>
+                <a:spcPts val="600"/>
+              </a:spcBef>
+              <a:buFont typeface="Arial" panose="020B0604020202020204" pitchFamily="34" charset="0"/>
+              <a:buChar char="•"/>
+            </a:pPr>
+            <a:r>
+              <a:rPr lang="en-US" sz="1600" b="1" u="sng" dirty="0"/>
+              <a:t>With or without</a:t>
+            </a:r>
+            <a:r>
+              <a:rPr lang="en-US" sz="1600" dirty="0"/>
+              <a:t> access to the internet</a:t>
+            </a:r>
+          </a:p>
+          <a:p>
+            <a:pPr marL="511175" lvl="1" indent="-285750">
+              <a:spcBef>
+                <a:spcPts val="600"/>
+              </a:spcBef>
+              <a:buFont typeface="Arial" panose="020B0604020202020204" pitchFamily="34" charset="0"/>
+              <a:buChar char="•"/>
+            </a:pPr>
+            <a:r>
+              <a:rPr lang="en-US" sz="1600" dirty="0"/>
+              <a:t>Uses a specific channel which can be modified while operating</a:t>
+            </a:r>
+          </a:p>
+          <a:p>
+            <a:pPr marL="511175" lvl="1" indent="-285750">
+              <a:spcBef>
+                <a:spcPts val="600"/>
+              </a:spcBef>
+              <a:buFont typeface="Arial" panose="020B0604020202020204" pitchFamily="34" charset="0"/>
+              <a:buChar char="•"/>
+            </a:pPr>
+            <a:r>
+              <a:rPr lang="en-US" sz="1600" dirty="0"/>
+              <a:t>Has limitation for number of connected devices</a:t>
+            </a:r>
+          </a:p>
+          <a:p>
+            <a:pPr marL="511175" lvl="1" indent="-285750">
+              <a:spcBef>
+                <a:spcPts val="600"/>
+              </a:spcBef>
+              <a:buFont typeface="Arial" panose="020B0604020202020204" pitchFamily="34" charset="0"/>
+              <a:buChar char="•"/>
+            </a:pPr>
+            <a:r>
+              <a:rPr lang="en-US" sz="1600" dirty="0"/>
+              <a:t>Has a name and an optional password</a:t>
+            </a:r>
+          </a:p>
+          <a:p>
+            <a:pPr marL="511175" lvl="1" indent="-285750">
+              <a:spcBef>
+                <a:spcPts val="600"/>
+              </a:spcBef>
+              <a:buFont typeface="Arial" panose="020B0604020202020204" pitchFamily="34" charset="0"/>
+              <a:buChar char="•"/>
+            </a:pPr>
+            <a:r>
+              <a:rPr lang="en-US" sz="1600" dirty="0"/>
+              <a:t>Can use an encrypted communication protocol</a:t>
             </a:r>
           </a:p>
           <a:p>
@@ -18232,8 +18413,8 @@
               <a:buChar char="•"/>
             </a:pPr>
             <a:r>
-              <a:rPr lang="en-US" dirty="0"/>
-              <a:t>Can function as:</a:t>
+              <a:rPr lang="en-US" sz="1600" dirty="0"/>
+              <a:t>STA – Station</a:t>
             </a:r>
           </a:p>
           <a:p>
@@ -18245,21 +18426,8 @@
               <a:buChar char="•"/>
             </a:pPr>
             <a:r>
-              <a:rPr lang="en-US" dirty="0"/>
-              <a:t>AP</a:t>
-            </a:r>
-          </a:p>
-          <a:p>
-            <a:pPr marL="857250" lvl="2" indent="-285750">
-              <a:spcBef>
-                <a:spcPts val="600"/>
-              </a:spcBef>
-              <a:buFont typeface="Arial" panose="020B0604020202020204" pitchFamily="34" charset="0"/>
-              <a:buChar char="•"/>
-            </a:pPr>
-            <a:r>
-              <a:rPr lang="en-US" dirty="0"/>
-              <a:t>By default enables up to 4 users</a:t>
+              <a:rPr lang="en-US" sz="1600" dirty="0"/>
+              <a:t>An end point device </a:t>
             </a:r>
           </a:p>
           <a:p>
@@ -18271,8 +18439,8 @@
               <a:buChar char="•"/>
             </a:pPr>
             <a:r>
-              <a:rPr lang="en-US" dirty="0"/>
-              <a:t>STA</a:t>
+              <a:rPr lang="en-US" sz="1600" dirty="0"/>
+              <a:t>Connects to an AP</a:t>
             </a:r>
           </a:p>
           <a:p>
@@ -18284,136 +18452,160 @@
               <a:buChar char="•"/>
             </a:pPr>
             <a:r>
-              <a:rPr lang="en-US" dirty="0"/>
-              <a:t>Both*</a:t>
+              <a:rPr lang="en-US" sz="1600" dirty="0"/>
+              <a:t>While searching for an AP needs to scan different channels until found</a:t>
+            </a:r>
+          </a:p>
+          <a:p>
+            <a:pPr marL="511175" lvl="1" indent="-285750">
+              <a:spcBef>
+                <a:spcPts val="600"/>
+              </a:spcBef>
+              <a:buFont typeface="Arial" panose="020B0604020202020204" pitchFamily="34" charset="0"/>
+              <a:buChar char="•"/>
+            </a:pPr>
+            <a:r>
+              <a:rPr lang="en-US" sz="1600" dirty="0"/>
+              <a:t>Station name and password can be saved on EEPROM, SPIFFS or SDCARD</a:t>
             </a:r>
           </a:p>
         </p:txBody>
       </p:sp>
       <p:pic>
         <p:nvPicPr>
-          <p:cNvPr id="6" name="Picture 5">
+          <p:cNvPr id="6" name="Picture 2" descr="Image result for wi-fi images&quot;">
             <a:extLst>
               <a:ext uri="{FF2B5EF4-FFF2-40B4-BE49-F238E27FC236}">
-                <a16:creationId xmlns:a16="http://schemas.microsoft.com/office/drawing/2014/main" id="{84F7A131-4C6E-4746-9212-8A046340010F}"/>
+                <a16:creationId xmlns:a16="http://schemas.microsoft.com/office/drawing/2014/main" id="{2BF78BDA-0CF0-47AB-AE3A-C531C322AC75}"/>
               </a:ext>
             </a:extLst>
           </p:cNvPr>
           <p:cNvPicPr>
-            <a:picLocks noChangeAspect="1"/>
+            <a:picLocks noChangeAspect="1" noChangeArrowheads="1"/>
           </p:cNvPicPr>
           <p:nvPr/>
         </p:nvPicPr>
         <p:blipFill>
-          <a:blip r:embed="rId2"/>
+          <a:blip r:embed="rId2">
+            <a:extLst>
+              <a:ext uri="{28A0092B-C50C-407E-A947-70E740481C1C}">
+                <a14:useLocalDpi xmlns:a14="http://schemas.microsoft.com/office/drawing/2010/main" val="0"/>
+              </a:ext>
+            </a:extLst>
+          </a:blip>
+          <a:srcRect/>
           <a:stretch>
             <a:fillRect/>
           </a:stretch>
         </p:blipFill>
-        <p:spPr>
-          <a:xfrm>
-            <a:off x="4830359" y="1302059"/>
-            <a:ext cx="4030704" cy="2681718"/>
+        <p:spPr bwMode="auto">
+          <a:xfrm>
+            <a:off x="5987842" y="192348"/>
+            <a:ext cx="2208435" cy="1595391"/>
           </a:xfrm>
           <a:prstGeom prst="rect">
             <a:avLst/>
           </a:prstGeom>
-          <a:solidFill>
-            <a:srgbClr val="FFFFFF">
-              <a:shade val="85000"/>
-            </a:srgbClr>
-          </a:solidFill>
-          <a:ln w="88900" cap="sq">
-            <a:solidFill>
-              <a:srgbClr val="FFFFFF"/>
-            </a:solidFill>
-            <a:miter lim="800000"/>
-          </a:ln>
-          <a:effectLst>
-            <a:outerShdw blurRad="55000" dist="18000" dir="5400000" algn="tl" rotWithShape="0">
-              <a:srgbClr val="000000">
-                <a:alpha val="40000"/>
-              </a:srgbClr>
-            </a:outerShdw>
-          </a:effectLst>
-          <a:scene3d>
-            <a:camera prst="orthographicFront"/>
-            <a:lightRig rig="twoPt" dir="t">
-              <a:rot lat="0" lon="0" rev="7200000"/>
-            </a:lightRig>
-          </a:scene3d>
-          <a:sp3d>
-            <a:bevelT w="25400" h="19050"/>
-            <a:contourClr>
-              <a:srgbClr val="FFFFFF"/>
-            </a:contourClr>
-          </a:sp3d>
+          <a:noFill/>
+          <a:extLst>
+            <a:ext uri="{909E8E84-426E-40DD-AFC4-6F175D3DCCD1}">
+              <a14:hiddenFill xmlns:a14="http://schemas.microsoft.com/office/drawing/2010/main">
+                <a:solidFill>
+                  <a:srgbClr val="FFFFFF"/>
+                </a:solidFill>
+              </a14:hiddenFill>
+            </a:ext>
+          </a:extLst>
         </p:spPr>
       </p:pic>
-      <p:pic>
-        <p:nvPicPr>
-          <p:cNvPr id="7" name="Picture 6">
+      <p:sp>
+        <p:nvSpPr>
+          <p:cNvPr id="5" name="TextBox 4">
             <a:extLst>
               <a:ext uri="{FF2B5EF4-FFF2-40B4-BE49-F238E27FC236}">
-                <a16:creationId xmlns:a16="http://schemas.microsoft.com/office/drawing/2014/main" id="{4F49C436-C2C7-4639-B7CA-959597DE5C3D}"/>
+                <a16:creationId xmlns:a16="http://schemas.microsoft.com/office/drawing/2014/main" id="{DF4DD946-E3AD-4C68-8E63-1A64F115D7C3}"/>
               </a:ext>
             </a:extLst>
           </p:cNvPr>
-          <p:cNvPicPr>
-            <a:picLocks noChangeAspect="1"/>
-          </p:cNvPicPr>
+          <p:cNvSpPr txBox="1"/>
           <p:nvPr/>
-        </p:nvPicPr>
-        <p:blipFill>
-          <a:blip r:embed="rId3"/>
-          <a:stretch>
-            <a:fillRect/>
-          </a:stretch>
-        </p:blipFill>
-        <p:spPr>
-          <a:xfrm>
-            <a:off x="674703" y="2860447"/>
-            <a:ext cx="2995020" cy="1642899"/>
+        </p:nvSpPr>
+        <p:spPr>
+          <a:xfrm>
+            <a:off x="7003282" y="1757779"/>
+            <a:ext cx="177553" cy="169277"/>
           </a:xfrm>
           <a:prstGeom prst="rect">
             <a:avLst/>
           </a:prstGeom>
-          <a:solidFill>
-            <a:srgbClr val="FFFFFF">
-              <a:shade val="85000"/>
-            </a:srgbClr>
-          </a:solidFill>
-          <a:ln w="88900" cap="sq">
-            <a:solidFill>
-              <a:srgbClr val="FFFFFF"/>
-            </a:solidFill>
-            <a:miter lim="800000"/>
-          </a:ln>
-          <a:effectLst>
-            <a:outerShdw blurRad="55000" dist="18000" dir="5400000" algn="tl" rotWithShape="0">
-              <a:srgbClr val="000000">
-                <a:alpha val="40000"/>
-              </a:srgbClr>
-            </a:outerShdw>
-          </a:effectLst>
-          <a:scene3d>
-            <a:camera prst="orthographicFront"/>
-            <a:lightRig rig="twoPt" dir="t">
-              <a:rot lat="0" lon="0" rev="7200000"/>
-            </a:lightRig>
-          </a:scene3d>
-          <a:sp3d>
-            <a:bevelT w="25400" h="19050"/>
-            <a:contourClr>
-              <a:srgbClr val="FFFFFF"/>
-            </a:contourClr>
-          </a:sp3d>
-        </p:spPr>
-      </p:pic>
+          <a:noFill/>
+        </p:spPr>
+        <p:txBody>
+          <a:bodyPr vert="horz" wrap="square" lIns="0" tIns="0" rIns="0" bIns="0" rtlCol="0">
+            <a:spAutoFit/>
+          </a:bodyPr>
+          <a:lstStyle/>
+          <a:p>
+            <a:r>
+              <a:rPr lang="en-US" sz="1100" dirty="0">
+                <a:solidFill>
+                  <a:srgbClr val="003C71"/>
+                </a:solidFill>
+                <a:highlight>
+                  <a:srgbClr val="FFFF00"/>
+                </a:highlight>
+              </a:rPr>
+              <a:t>AP</a:t>
+            </a:r>
+          </a:p>
+        </p:txBody>
+      </p:sp>
+      <p:sp>
+        <p:nvSpPr>
+          <p:cNvPr id="7" name="TextBox 6">
+            <a:extLst>
+              <a:ext uri="{FF2B5EF4-FFF2-40B4-BE49-F238E27FC236}">
+                <a16:creationId xmlns:a16="http://schemas.microsoft.com/office/drawing/2014/main" id="{EB50E1A9-71D0-4C32-A40A-D28F6163A5EE}"/>
+              </a:ext>
+            </a:extLst>
+          </p:cNvPr>
+          <p:cNvSpPr txBox="1"/>
+          <p:nvPr/>
+        </p:nvSpPr>
+        <p:spPr>
+          <a:xfrm>
+            <a:off x="5965794" y="308848"/>
+            <a:ext cx="636233" cy="338554"/>
+          </a:xfrm>
+          <a:prstGeom prst="rect">
+            <a:avLst/>
+          </a:prstGeom>
+          <a:noFill/>
+        </p:spPr>
+        <p:txBody>
+          <a:bodyPr vert="horz" wrap="square" lIns="0" tIns="0" rIns="0" bIns="0" rtlCol="0">
+            <a:spAutoFit/>
+          </a:bodyPr>
+          <a:lstStyle/>
+          <a:p>
+            <a:r>
+              <a:rPr lang="en-US" sz="1100" dirty="0">
+                <a:solidFill>
+                  <a:srgbClr val="003C71"/>
+                </a:solidFill>
+                <a:highlight>
+                  <a:srgbClr val="FFFF00"/>
+                </a:highlight>
+              </a:rPr>
+              <a:t>End Point device</a:t>
+            </a:r>
+          </a:p>
+        </p:txBody>
+      </p:sp>
     </p:spTree>
     <p:extLst>
       <p:ext uri="{BB962C8B-B14F-4D97-AF65-F5344CB8AC3E}">
-        <p14:creationId xmlns:p14="http://schemas.microsoft.com/office/powerpoint/2010/main" val="2116287997"/>
+        <p14:creationId xmlns:p14="http://schemas.microsoft.com/office/powerpoint/2010/main" val="3609594223"/>
       </p:ext>
     </p:extLst>
   </p:cSld>
@@ -18457,7 +18649,7 @@
           <p:cNvPr id="2" name="Slide Number Placeholder 1">
             <a:extLst>
               <a:ext uri="{FF2B5EF4-FFF2-40B4-BE49-F238E27FC236}">
-                <a16:creationId xmlns:a16="http://schemas.microsoft.com/office/drawing/2014/main" id="{81EE2E05-54A1-4C08-B620-45724406CD66}"/>
+                <a16:creationId xmlns:a16="http://schemas.microsoft.com/office/drawing/2014/main" id="{17744C99-9A24-4D6F-8D3C-A4CB41E876CA}"/>
               </a:ext>
             </a:extLst>
           </p:cNvPr>
@@ -18487,7 +18679,7 @@
           <p:cNvPr id="3" name="Title 2">
             <a:extLst>
               <a:ext uri="{FF2B5EF4-FFF2-40B4-BE49-F238E27FC236}">
-                <a16:creationId xmlns:a16="http://schemas.microsoft.com/office/drawing/2014/main" id="{8B53D94C-2134-421E-8945-5C08738013E7}"/>
+                <a16:creationId xmlns:a16="http://schemas.microsoft.com/office/drawing/2014/main" id="{DFCD3F10-262A-49AA-92F3-A28E2073C0CF}"/>
               </a:ext>
             </a:extLst>
           </p:cNvPr>
@@ -18501,16 +18693,21 @@
         <p:spPr>
           <a:xfrm>
             <a:off x="455613" y="308848"/>
-            <a:ext cx="8229600" cy="365709"/>
+            <a:ext cx="8229600" cy="379883"/>
           </a:xfrm>
         </p:spPr>
         <p:txBody>
           <a:bodyPr/>
           <a:lstStyle/>
           <a:p>
-            <a:r>
-              <a:rPr lang="en-US" dirty="0"/>
-              <a:t>HTML</a:t>
+            <a:pPr>
+              <a:spcBef>
+                <a:spcPts val="600"/>
+              </a:spcBef>
+            </a:pPr>
+            <a:r>
+              <a:rPr lang="en-US" sz="3600" dirty="0"/>
+              <a:t>Wi-fi basics: our esp32 </a:t>
             </a:r>
           </a:p>
         </p:txBody>
@@ -18520,7 +18717,7 @@
           <p:cNvPr id="4" name="Content Placeholder 3">
             <a:extLst>
               <a:ext uri="{FF2B5EF4-FFF2-40B4-BE49-F238E27FC236}">
-                <a16:creationId xmlns:a16="http://schemas.microsoft.com/office/drawing/2014/main" id="{D9CD328D-89B4-43EC-A63A-7523F1999001}"/>
+                <a16:creationId xmlns:a16="http://schemas.microsoft.com/office/drawing/2014/main" id="{0DA5B5C6-365A-4798-8EE3-9AAC1659E9D7}"/>
               </a:ext>
             </a:extLst>
           </p:cNvPr>
@@ -18533,8 +18730,8 @@
         </p:nvSpPr>
         <p:spPr>
           <a:xfrm>
-            <a:off x="455613" y="791481"/>
-            <a:ext cx="8228012" cy="3837669"/>
+            <a:off x="455613" y="715109"/>
+            <a:ext cx="8228012" cy="3914042"/>
           </a:xfrm>
         </p:spPr>
         <p:txBody>
@@ -18542,75 +18739,208 @@
           <a:lstStyle/>
           <a:p>
             <a:pPr marL="285750" indent="-285750">
+              <a:spcBef>
+                <a:spcPts val="600"/>
+              </a:spcBef>
               <a:buFont typeface="Arial" panose="020B0604020202020204" pitchFamily="34" charset="0"/>
               <a:buChar char="•"/>
             </a:pPr>
             <a:r>
-              <a:rPr lang="en-US" sz="1400" b="1" dirty="0"/>
-              <a:t>Hyper Text Markup Language</a:t>
-            </a:r>
-          </a:p>
-          <a:p>
-            <a:pPr marL="511175" lvl="1" indent="-285750">
+              <a:rPr lang="en-US" dirty="0"/>
+              <a:t>Runs full network stack</a:t>
+            </a:r>
+          </a:p>
+          <a:p>
+            <a:pPr marL="285750" indent="-285750">
+              <a:spcBef>
+                <a:spcPts val="600"/>
+              </a:spcBef>
               <a:buFont typeface="Arial" panose="020B0604020202020204" pitchFamily="34" charset="0"/>
               <a:buChar char="•"/>
             </a:pPr>
             <a:r>
-              <a:rPr lang="en-US" sz="1400" dirty="0"/>
-              <a:t>Is the standard markup language for documents designed to be displayed in a web browser</a:t>
+              <a:rPr lang="en-US" dirty="0"/>
+              <a:t>Can function as:</a:t>
             </a:r>
           </a:p>
           <a:p>
             <a:pPr marL="511175" lvl="1" indent="-285750">
+              <a:spcBef>
+                <a:spcPts val="600"/>
+              </a:spcBef>
               <a:buFont typeface="Arial" panose="020B0604020202020204" pitchFamily="34" charset="0"/>
               <a:buChar char="•"/>
             </a:pPr>
             <a:r>
-              <a:rPr lang="en-US" sz="1400" dirty="0"/>
-              <a:t>It can be assisted by technologies such as </a:t>
-            </a:r>
-            <a:r>
-              <a:rPr lang="en-US" sz="1400" b="1" dirty="0"/>
-              <a:t>Cascading Style Sheets (CSS)</a:t>
-            </a:r>
-            <a:r>
-              <a:rPr lang="en-US" sz="1400" dirty="0"/>
-              <a:t> and scripting languages such as </a:t>
-            </a:r>
-            <a:r>
-              <a:rPr lang="en-US" sz="1400" b="1" dirty="0"/>
-              <a:t>JavaScript</a:t>
-            </a:r>
-          </a:p>
-          <a:p>
-            <a:pPr marL="511175" lvl="1" indent="-285750">
+              <a:rPr lang="en-US" dirty="0"/>
+              <a:t>AP</a:t>
+            </a:r>
+          </a:p>
+          <a:p>
+            <a:pPr marL="857250" lvl="2" indent="-285750">
+              <a:spcBef>
+                <a:spcPts val="600"/>
+              </a:spcBef>
               <a:buFont typeface="Arial" panose="020B0604020202020204" pitchFamily="34" charset="0"/>
               <a:buChar char="•"/>
             </a:pPr>
             <a:r>
-              <a:rPr lang="en-US" sz="1400" b="1" dirty="0">
-                <a:hlinkClick r:id="rId2"/>
-              </a:rPr>
-              <a:t>https://www.w3schools.com/</a:t>
-            </a:r>
-            <a:r>
-              <a:rPr lang="en-US" sz="1400" b="1" dirty="0"/>
-              <a:t> - great site for learning and designing web pages</a:t>
+              <a:rPr lang="en-US" dirty="0"/>
+              <a:t>By default enables up to 4 users</a:t>
             </a:r>
           </a:p>
           <a:p>
             <a:pPr marL="511175" lvl="1" indent="-285750">
+              <a:spcBef>
+                <a:spcPts val="600"/>
+              </a:spcBef>
               <a:buFont typeface="Arial" panose="020B0604020202020204" pitchFamily="34" charset="0"/>
               <a:buChar char="•"/>
             </a:pPr>
-            <a:endParaRPr lang="en-US" sz="1400" b="1" dirty="0"/>
+            <a:r>
+              <a:rPr lang="en-US" dirty="0"/>
+              <a:t>STA</a:t>
+            </a:r>
+          </a:p>
+          <a:p>
+            <a:pPr marL="511175" lvl="1" indent="-285750">
+              <a:spcBef>
+                <a:spcPts val="600"/>
+              </a:spcBef>
+              <a:buFont typeface="Arial" panose="020B0604020202020204" pitchFamily="34" charset="0"/>
+              <a:buChar char="•"/>
+            </a:pPr>
+            <a:r>
+              <a:rPr lang="en-US" dirty="0"/>
+              <a:t>Both*</a:t>
+            </a:r>
           </a:p>
         </p:txBody>
       </p:sp>
+      <p:pic>
+        <p:nvPicPr>
+          <p:cNvPr id="6" name="Picture 5">
+            <a:extLst>
+              <a:ext uri="{FF2B5EF4-FFF2-40B4-BE49-F238E27FC236}">
+                <a16:creationId xmlns:a16="http://schemas.microsoft.com/office/drawing/2014/main" id="{84F7A131-4C6E-4746-9212-8A046340010F}"/>
+              </a:ext>
+            </a:extLst>
+          </p:cNvPr>
+          <p:cNvPicPr>
+            <a:picLocks noChangeAspect="1"/>
+          </p:cNvPicPr>
+          <p:nvPr/>
+        </p:nvPicPr>
+        <p:blipFill>
+          <a:blip r:embed="rId2"/>
+          <a:stretch>
+            <a:fillRect/>
+          </a:stretch>
+        </p:blipFill>
+        <p:spPr>
+          <a:xfrm>
+            <a:off x="4830359" y="1302059"/>
+            <a:ext cx="4030704" cy="2681718"/>
+          </a:xfrm>
+          <a:prstGeom prst="rect">
+            <a:avLst/>
+          </a:prstGeom>
+          <a:solidFill>
+            <a:srgbClr val="FFFFFF">
+              <a:shade val="85000"/>
+            </a:srgbClr>
+          </a:solidFill>
+          <a:ln w="88900" cap="sq">
+            <a:solidFill>
+              <a:srgbClr val="FFFFFF"/>
+            </a:solidFill>
+            <a:miter lim="800000"/>
+          </a:ln>
+          <a:effectLst>
+            <a:outerShdw blurRad="55000" dist="18000" dir="5400000" algn="tl" rotWithShape="0">
+              <a:srgbClr val="000000">
+                <a:alpha val="40000"/>
+              </a:srgbClr>
+            </a:outerShdw>
+          </a:effectLst>
+          <a:scene3d>
+            <a:camera prst="orthographicFront"/>
+            <a:lightRig rig="twoPt" dir="t">
+              <a:rot lat="0" lon="0" rev="7200000"/>
+            </a:lightRig>
+          </a:scene3d>
+          <a:sp3d>
+            <a:bevelT w="25400" h="19050"/>
+            <a:contourClr>
+              <a:srgbClr val="FFFFFF"/>
+            </a:contourClr>
+          </a:sp3d>
+        </p:spPr>
+      </p:pic>
+      <p:pic>
+        <p:nvPicPr>
+          <p:cNvPr id="7" name="Picture 6">
+            <a:extLst>
+              <a:ext uri="{FF2B5EF4-FFF2-40B4-BE49-F238E27FC236}">
+                <a16:creationId xmlns:a16="http://schemas.microsoft.com/office/drawing/2014/main" id="{4F49C436-C2C7-4639-B7CA-959597DE5C3D}"/>
+              </a:ext>
+            </a:extLst>
+          </p:cNvPr>
+          <p:cNvPicPr>
+            <a:picLocks noChangeAspect="1"/>
+          </p:cNvPicPr>
+          <p:nvPr/>
+        </p:nvPicPr>
+        <p:blipFill>
+          <a:blip r:embed="rId3"/>
+          <a:stretch>
+            <a:fillRect/>
+          </a:stretch>
+        </p:blipFill>
+        <p:spPr>
+          <a:xfrm>
+            <a:off x="674703" y="2860447"/>
+            <a:ext cx="2995020" cy="1642899"/>
+          </a:xfrm>
+          <a:prstGeom prst="rect">
+            <a:avLst/>
+          </a:prstGeom>
+          <a:solidFill>
+            <a:srgbClr val="FFFFFF">
+              <a:shade val="85000"/>
+            </a:srgbClr>
+          </a:solidFill>
+          <a:ln w="88900" cap="sq">
+            <a:solidFill>
+              <a:srgbClr val="FFFFFF"/>
+            </a:solidFill>
+            <a:miter lim="800000"/>
+          </a:ln>
+          <a:effectLst>
+            <a:outerShdw blurRad="55000" dist="18000" dir="5400000" algn="tl" rotWithShape="0">
+              <a:srgbClr val="000000">
+                <a:alpha val="40000"/>
+              </a:srgbClr>
+            </a:outerShdw>
+          </a:effectLst>
+          <a:scene3d>
+            <a:camera prst="orthographicFront"/>
+            <a:lightRig rig="twoPt" dir="t">
+              <a:rot lat="0" lon="0" rev="7200000"/>
+            </a:lightRig>
+          </a:scene3d>
+          <a:sp3d>
+            <a:bevelT w="25400" h="19050"/>
+            <a:contourClr>
+              <a:srgbClr val="FFFFFF"/>
+            </a:contourClr>
+          </a:sp3d>
+        </p:spPr>
+      </p:pic>
     </p:spTree>
     <p:extLst>
       <p:ext uri="{BB962C8B-B14F-4D97-AF65-F5344CB8AC3E}">
-        <p14:creationId xmlns:p14="http://schemas.microsoft.com/office/powerpoint/2010/main" val="3775745792"/>
+        <p14:creationId xmlns:p14="http://schemas.microsoft.com/office/powerpoint/2010/main" val="2116287997"/>
       </p:ext>
     </p:extLst>
   </p:cSld>
@@ -18654,7 +18984,7 @@
           <p:cNvPr id="2" name="Slide Number Placeholder 1">
             <a:extLst>
               <a:ext uri="{FF2B5EF4-FFF2-40B4-BE49-F238E27FC236}">
-                <a16:creationId xmlns:a16="http://schemas.microsoft.com/office/drawing/2014/main" id="{17744C99-9A24-4D6F-8D3C-A4CB41E876CA}"/>
+                <a16:creationId xmlns:a16="http://schemas.microsoft.com/office/drawing/2014/main" id="{81EE2E05-54A1-4C08-B620-45724406CD66}"/>
               </a:ext>
             </a:extLst>
           </p:cNvPr>
@@ -18684,7 +19014,7 @@
           <p:cNvPr id="3" name="Title 2">
             <a:extLst>
               <a:ext uri="{FF2B5EF4-FFF2-40B4-BE49-F238E27FC236}">
-                <a16:creationId xmlns:a16="http://schemas.microsoft.com/office/drawing/2014/main" id="{DFCD3F10-262A-49AA-92F3-A28E2073C0CF}"/>
+                <a16:creationId xmlns:a16="http://schemas.microsoft.com/office/drawing/2014/main" id="{8B53D94C-2134-421E-8945-5C08738013E7}"/>
               </a:ext>
             </a:extLst>
           </p:cNvPr>
@@ -18698,21 +19028,16 @@
         <p:spPr>
           <a:xfrm>
             <a:off x="455613" y="308848"/>
-            <a:ext cx="8229600" cy="379883"/>
+            <a:ext cx="8229600" cy="365709"/>
           </a:xfrm>
         </p:spPr>
         <p:txBody>
           <a:bodyPr/>
           <a:lstStyle/>
           <a:p>
-            <a:pPr>
-              <a:spcBef>
-                <a:spcPts val="600"/>
-              </a:spcBef>
-            </a:pPr>
-            <a:r>
-              <a:rPr lang="en-US" sz="3600" dirty="0"/>
-              <a:t>webserver</a:t>
+            <a:r>
+              <a:rPr lang="en-US" dirty="0"/>
+              <a:t>HTML</a:t>
             </a:r>
           </a:p>
         </p:txBody>
@@ -18722,7 +19047,7 @@
           <p:cNvPr id="4" name="Content Placeholder 3">
             <a:extLst>
               <a:ext uri="{FF2B5EF4-FFF2-40B4-BE49-F238E27FC236}">
-                <a16:creationId xmlns:a16="http://schemas.microsoft.com/office/drawing/2014/main" id="{0DA5B5C6-365A-4798-8EE3-9AAC1659E9D7}"/>
+                <a16:creationId xmlns:a16="http://schemas.microsoft.com/office/drawing/2014/main" id="{D9CD328D-89B4-43EC-A63A-7523F1999001}"/>
               </a:ext>
             </a:extLst>
           </p:cNvPr>
@@ -18735,8 +19060,8 @@
         </p:nvSpPr>
         <p:spPr>
           <a:xfrm>
-            <a:off x="455613" y="715109"/>
-            <a:ext cx="8228012" cy="3914042"/>
+            <a:off x="455613" y="791481"/>
+            <a:ext cx="8228012" cy="3837669"/>
           </a:xfrm>
         </p:spPr>
         <p:txBody>
@@ -18744,236 +19069,75 @@
           <a:lstStyle/>
           <a:p>
             <a:pPr marL="285750" indent="-285750">
-              <a:spcBef>
-                <a:spcPts val="600"/>
-              </a:spcBef>
               <a:buFont typeface="Arial" panose="020B0604020202020204" pitchFamily="34" charset="0"/>
               <a:buChar char="•"/>
             </a:pPr>
             <a:r>
-              <a:rPr lang="en-US" sz="1600" dirty="0"/>
-              <a:t>Web pages are hosted on a webserver</a:t>
+              <a:rPr lang="en-US" sz="1400" b="1" dirty="0"/>
+              <a:t>Hyper Text Markup Language</a:t>
             </a:r>
           </a:p>
           <a:p>
             <a:pPr marL="511175" lvl="1" indent="-285750">
-              <a:spcBef>
-                <a:spcPts val="600"/>
-              </a:spcBef>
               <a:buFont typeface="Arial" panose="020B0604020202020204" pitchFamily="34" charset="0"/>
               <a:buChar char="•"/>
             </a:pPr>
             <a:r>
-              <a:rPr lang="en-US" sz="1600" dirty="0"/>
-              <a:t>Most commonly written in HTML5 + JAVA script</a:t>
+              <a:rPr lang="en-US" sz="1400" dirty="0"/>
+              <a:t>Is the standard markup language for documents designed to be displayed in a web browser</a:t>
             </a:r>
           </a:p>
           <a:p>
             <a:pPr marL="511175" lvl="1" indent="-285750">
-              <a:spcBef>
-                <a:spcPts val="600"/>
-              </a:spcBef>
               <a:buFont typeface="Arial" panose="020B0604020202020204" pitchFamily="34" charset="0"/>
               <a:buChar char="•"/>
             </a:pPr>
             <a:r>
-              <a:rPr lang="en-US" sz="1600" dirty="0"/>
-              <a:t>There are various HTML5 emulators out there</a:t>
-            </a:r>
-          </a:p>
-          <a:p>
-            <a:pPr marL="285750" indent="-285750">
-              <a:spcBef>
-                <a:spcPts val="600"/>
-              </a:spcBef>
+              <a:rPr lang="en-US" sz="1400" dirty="0"/>
+              <a:t>It can be assisted by technologies such as </a:t>
+            </a:r>
+            <a:r>
+              <a:rPr lang="en-US" sz="1400" b="1" dirty="0"/>
+              <a:t>Cascading Style Sheets (CSS)</a:t>
+            </a:r>
+            <a:r>
+              <a:rPr lang="en-US" sz="1400" dirty="0"/>
+              <a:t> and scripting languages such as </a:t>
+            </a:r>
+            <a:r>
+              <a:rPr lang="en-US" sz="1400" b="1" dirty="0"/>
+              <a:t>JavaScript</a:t>
+            </a:r>
+          </a:p>
+          <a:p>
+            <a:pPr marL="511175" lvl="1" indent="-285750">
               <a:buFont typeface="Arial" panose="020B0604020202020204" pitchFamily="34" charset="0"/>
               <a:buChar char="•"/>
             </a:pPr>
             <a:r>
-              <a:rPr lang="en-US" sz="1600" dirty="0"/>
-              <a:t>Has a specific IP address (192.168.14.1 for example)</a:t>
-            </a:r>
-          </a:p>
-          <a:p>
-            <a:pPr marL="285750" indent="-285750">
-              <a:spcBef>
-                <a:spcPts val="600"/>
-              </a:spcBef>
+              <a:rPr lang="en-US" sz="1400" b="1" dirty="0">
+                <a:hlinkClick r:id="rId2"/>
+              </a:rPr>
+              <a:t>https://www.w3schools.com/</a:t>
+            </a:r>
+            <a:r>
+              <a:rPr lang="en-US" sz="1400" b="1" dirty="0"/>
+              <a:t> - great site for learning and designing web pages</a:t>
+            </a:r>
+          </a:p>
+          <a:p>
+            <a:pPr marL="511175" lvl="1" indent="-285750">
               <a:buFont typeface="Arial" panose="020B0604020202020204" pitchFamily="34" charset="0"/>
               <a:buChar char="•"/>
             </a:pPr>
-            <a:r>
-              <a:rPr lang="en-US" sz="1600" dirty="0"/>
-              <a:t>Is a passive device</a:t>
-            </a:r>
-          </a:p>
-          <a:p>
-            <a:pPr marL="285750" indent="-285750">
-              <a:spcBef>
-                <a:spcPts val="600"/>
-              </a:spcBef>
-              <a:buFont typeface="Arial" panose="020B0604020202020204" pitchFamily="34" charset="0"/>
-              <a:buChar char="•"/>
-            </a:pPr>
-            <a:r>
-              <a:rPr lang="en-US" sz="1600" dirty="0"/>
-              <a:t>We need a browser to access it</a:t>
-            </a:r>
-          </a:p>
-          <a:p>
-            <a:pPr marL="511175" lvl="1" indent="-285750">
-              <a:spcBef>
-                <a:spcPts val="600"/>
-              </a:spcBef>
-              <a:buFont typeface="Arial" panose="020B0604020202020204" pitchFamily="34" charset="0"/>
-              <a:buChar char="•"/>
-            </a:pPr>
-            <a:r>
-              <a:rPr lang="en-US" sz="1600" dirty="0"/>
-              <a:t>Browser </a:t>
-            </a:r>
-            <a:r>
-              <a:rPr lang="en-US" sz="1600" b="1" dirty="0">
-                <a:highlight>
-                  <a:srgbClr val="FFFF00"/>
-                </a:highlight>
-              </a:rPr>
-              <a:t>is</a:t>
-            </a:r>
-            <a:r>
-              <a:rPr lang="en-US" sz="1600" dirty="0"/>
-              <a:t> executing the HTML5 code</a:t>
-            </a:r>
-          </a:p>
-          <a:p>
-            <a:pPr marL="511175" lvl="1" indent="-285750">
-              <a:spcBef>
-                <a:spcPts val="600"/>
-              </a:spcBef>
-              <a:buFont typeface="Arial" panose="020B0604020202020204" pitchFamily="34" charset="0"/>
-              <a:buChar char="•"/>
-            </a:pPr>
-            <a:r>
-              <a:rPr lang="en-US" sz="1600" dirty="0"/>
-              <a:t>The communication protocol is HTTP</a:t>
-            </a:r>
-          </a:p>
-          <a:p>
-            <a:pPr marL="285750" indent="-285750">
-              <a:spcBef>
-                <a:spcPts val="600"/>
-              </a:spcBef>
-              <a:buFont typeface="Arial" panose="020B0604020202020204" pitchFamily="34" charset="0"/>
-              <a:buChar char="•"/>
-            </a:pPr>
-            <a:r>
-              <a:rPr lang="en-US" sz="1600" dirty="0"/>
-              <a:t>There are large number of hosting providers</a:t>
-            </a:r>
-          </a:p>
-          <a:p>
-            <a:pPr marL="285750" indent="-285750">
-              <a:spcBef>
-                <a:spcPts val="600"/>
-              </a:spcBef>
-              <a:buFont typeface="Arial" panose="020B0604020202020204" pitchFamily="34" charset="0"/>
-              <a:buChar char="•"/>
-            </a:pPr>
-            <a:r>
-              <a:rPr lang="en-US" sz="1600" dirty="0"/>
-              <a:t>IP address can be replaced by a name</a:t>
-            </a:r>
-          </a:p>
-          <a:p>
-            <a:pPr marL="511175" lvl="1" indent="-285750">
-              <a:spcBef>
-                <a:spcPts val="600"/>
-              </a:spcBef>
-              <a:buFont typeface="Arial" panose="020B0604020202020204" pitchFamily="34" charset="0"/>
-              <a:buChar char="•"/>
-            </a:pPr>
-            <a:r>
-              <a:rPr lang="en-US" sz="1600" dirty="0"/>
-              <a:t>DNS server translates the name to the specific IP address</a:t>
-            </a:r>
-          </a:p>
-          <a:p>
-            <a:pPr marL="285750" indent="-285750">
-              <a:spcBef>
-                <a:spcPts val="600"/>
-              </a:spcBef>
-              <a:buFont typeface="Arial" panose="020B0604020202020204" pitchFamily="34" charset="0"/>
-              <a:buChar char="•"/>
-            </a:pPr>
-            <a:r>
-              <a:rPr lang="en-US" sz="1600" dirty="0">
-                <a:highlight>
-                  <a:srgbClr val="FFFF00"/>
-                </a:highlight>
-              </a:rPr>
-              <a:t>ESP32 can run a webserver! </a:t>
-            </a:r>
-            <a:r>
-              <a:rPr lang="en-US" sz="1600" dirty="0">
-                <a:highlight>
-                  <a:srgbClr val="FFFF00"/>
-                </a:highlight>
-                <a:sym typeface="Wingdings" panose="05000000000000000000" pitchFamily="2" charset="2"/>
-              </a:rPr>
-              <a:t></a:t>
-            </a:r>
-            <a:endParaRPr lang="en-US" sz="1600" dirty="0">
-              <a:highlight>
-                <a:srgbClr val="FFFF00"/>
-              </a:highlight>
-            </a:endParaRPr>
-          </a:p>
-          <a:p>
-            <a:pPr marL="511175" lvl="1" indent="-285750">
-              <a:spcBef>
-                <a:spcPts val="600"/>
-              </a:spcBef>
-              <a:buFont typeface="Arial" panose="020B0604020202020204" pitchFamily="34" charset="0"/>
-              <a:buChar char="•"/>
-            </a:pPr>
-            <a:endParaRPr lang="en-US" sz="1600" dirty="0"/>
+            <a:endParaRPr lang="en-US" sz="1400" b="1" dirty="0"/>
           </a:p>
         </p:txBody>
       </p:sp>
-      <p:pic>
-        <p:nvPicPr>
-          <p:cNvPr id="5" name="Picture 4">
-            <a:extLst>
-              <a:ext uri="{FF2B5EF4-FFF2-40B4-BE49-F238E27FC236}">
-                <a16:creationId xmlns:a16="http://schemas.microsoft.com/office/drawing/2014/main" id="{D84109C7-EA7E-4815-A02E-48B3E8DA296F}"/>
-              </a:ext>
-            </a:extLst>
-          </p:cNvPr>
-          <p:cNvPicPr>
-            <a:picLocks noChangeAspect="1"/>
-          </p:cNvPicPr>
-          <p:nvPr/>
-        </p:nvPicPr>
-        <p:blipFill>
-          <a:blip r:embed="rId2"/>
-          <a:stretch>
-            <a:fillRect/>
-          </a:stretch>
-        </p:blipFill>
-        <p:spPr>
-          <a:xfrm>
-            <a:off x="5930283" y="308848"/>
-            <a:ext cx="3121979" cy="3663352"/>
-          </a:xfrm>
-          <a:prstGeom prst="rect">
-            <a:avLst/>
-          </a:prstGeom>
-        </p:spPr>
-      </p:pic>
     </p:spTree>
     <p:extLst>
       <p:ext uri="{BB962C8B-B14F-4D97-AF65-F5344CB8AC3E}">
-        <p14:creationId xmlns:p14="http://schemas.microsoft.com/office/powerpoint/2010/main" val="3135779313"/>
+        <p14:creationId xmlns:p14="http://schemas.microsoft.com/office/powerpoint/2010/main" val="3775745792"/>
       </p:ext>
     </p:extLst>
   </p:cSld>
